--- a/PRESENTATION.pptx
+++ b/PRESENTATION.pptx
@@ -5,19 +5,17 @@
     <p:sldMasterId id="2147483648" r:id="rId1"/>
   </p:sldMasterIdLst>
   <p:notesMasterIdLst>
-    <p:notesMasterId r:id="rId12"/>
+    <p:notesMasterId r:id="rId10"/>
   </p:notesMasterIdLst>
   <p:sldIdLst>
     <p:sldId id="256" r:id="rId2"/>
     <p:sldId id="257" r:id="rId3"/>
     <p:sldId id="258" r:id="rId4"/>
-    <p:sldId id="259" r:id="rId5"/>
-    <p:sldId id="260" r:id="rId6"/>
-    <p:sldId id="261" r:id="rId7"/>
-    <p:sldId id="262" r:id="rId8"/>
-    <p:sldId id="263" r:id="rId9"/>
-    <p:sldId id="264" r:id="rId10"/>
-    <p:sldId id="265" r:id="rId11"/>
+    <p:sldId id="260" r:id="rId5"/>
+    <p:sldId id="261" r:id="rId6"/>
+    <p:sldId id="262" r:id="rId7"/>
+    <p:sldId id="263" r:id="rId8"/>
+    <p:sldId id="265" r:id="rId9"/>
   </p:sldIdLst>
   <p:sldSz cx="9144000" cy="5143500" type="screen16x9"/>
   <p:notesSz cx="5143500" cy="9144000"/>
@@ -121,309 +119,6 @@
 </p:presentation>
 </file>
 
-<file path=ppt/charts/chart1.xml><?xml version="1.0" encoding="utf-8"?>
-<c:chartSpace xmlns:c="http://schemas.openxmlformats.org/drawingml/2006/chart" xmlns:a="http://schemas.openxmlformats.org/drawingml/2006/main" xmlns:r="http://schemas.openxmlformats.org/officeDocument/2006/relationships" xmlns:c16r2="http://schemas.microsoft.com/office/drawing/2015/06/chart">
-  <c:date1904 val="0"/>
-  <c:lang val="de-DE"/>
-  <c:roundedCorners val="1"/>
-  <c:style val="2"/>
-  <c:chart>
-    <c:autoTitleDeleted val="1"/>
-    <c:plotArea>
-      <c:layout/>
-      <c:barChart>
-        <c:barDir val="col"/>
-        <c:grouping val="clustered"/>
-        <c:varyColors val="0"/>
-        <c:ser>
-          <c:idx val="0"/>
-          <c:order val="0"/>
-          <c:tx>
-            <c:strRef>
-              <c:f>Sheet1!$B$1</c:f>
-              <c:strCache>
-                <c:ptCount val="1"/>
-                <c:pt idx="0">
-                  <c:v>Gemessener Wert</c:v>
-                </c:pt>
-              </c:strCache>
-            </c:strRef>
-          </c:tx>
-          <c:spPr>
-            <a:solidFill>
-              <a:srgbClr val="457B9D"/>
-            </a:solidFill>
-            <a:effectLst/>
-          </c:spPr>
-          <c:invertIfNegative val="0"/>
-          <c:dPt>
-            <c:idx val="0"/>
-            <c:invertIfNegative val="0"/>
-            <c:bubble3D val="0"/>
-            <c:extLst>
-              <c:ext xmlns:c16="http://schemas.microsoft.com/office/drawing/2014/chart" uri="{C3380CC4-5D6E-409C-BE32-E72D297353CC}">
-                <c16:uniqueId val="{00000001-9A10-4C2B-88F4-695A11A09A62}"/>
-              </c:ext>
-            </c:extLst>
-          </c:dPt>
-          <c:dPt>
-            <c:idx val="1"/>
-            <c:invertIfNegative val="0"/>
-            <c:bubble3D val="0"/>
-            <c:extLst>
-              <c:ext xmlns:c16="http://schemas.microsoft.com/office/drawing/2014/chart" uri="{C3380CC4-5D6E-409C-BE32-E72D297353CC}">
-                <c16:uniqueId val="{00000003-9A10-4C2B-88F4-695A11A09A62}"/>
-              </c:ext>
-            </c:extLst>
-          </c:dPt>
-          <c:dPt>
-            <c:idx val="2"/>
-            <c:invertIfNegative val="0"/>
-            <c:bubble3D val="0"/>
-            <c:spPr>
-              <a:solidFill>
-                <a:srgbClr val="1A7D4A"/>
-              </a:solidFill>
-              <a:effectLst/>
-            </c:spPr>
-            <c:extLst>
-              <c:ext xmlns:c16="http://schemas.microsoft.com/office/drawing/2014/chart" uri="{C3380CC4-5D6E-409C-BE32-E72D297353CC}">
-                <c16:uniqueId val="{00000005-9A10-4C2B-88F4-695A11A09A62}"/>
-              </c:ext>
-            </c:extLst>
-          </c:dPt>
-          <c:dPt>
-            <c:idx val="3"/>
-            <c:invertIfNegative val="0"/>
-            <c:bubble3D val="0"/>
-            <c:spPr>
-              <a:solidFill>
-                <a:srgbClr val="E63946"/>
-              </a:solidFill>
-              <a:effectLst/>
-            </c:spPr>
-            <c:extLst>
-              <c:ext xmlns:c16="http://schemas.microsoft.com/office/drawing/2014/chart" uri="{C3380CC4-5D6E-409C-BE32-E72D297353CC}">
-                <c16:uniqueId val="{00000007-9A10-4C2B-88F4-695A11A09A62}"/>
-              </c:ext>
-            </c:extLst>
-          </c:dPt>
-          <c:dLbls>
-            <c:numFmt formatCode="#,##0" sourceLinked="0"/>
-            <c:spPr>
-              <a:noFill/>
-              <a:ln>
-                <a:noFill/>
-              </a:ln>
-              <a:effectLst/>
-            </c:spPr>
-            <c:txPr>
-              <a:bodyPr/>
-              <a:lstStyle/>
-              <a:p>
-                <a:pPr>
-                  <a:defRPr sz="1200" b="0" i="0" u="none" strike="noStrike">
-                    <a:solidFill>
-                      <a:srgbClr val="1D3557"/>
-                    </a:solidFill>
-                    <a:latin typeface="Arial"/>
-                  </a:defRPr>
-                </a:pPr>
-                <a:endParaRPr lang="de-DE"/>
-              </a:p>
-            </c:txPr>
-            <c:showLegendKey val="0"/>
-            <c:showVal val="1"/>
-            <c:showCatName val="0"/>
-            <c:showSerName val="0"/>
-            <c:showPercent val="0"/>
-            <c:showBubbleSize val="0"/>
-            <c:showLeaderLines val="0"/>
-            <c:extLst>
-              <c:ext xmlns:c15="http://schemas.microsoft.com/office/drawing/2012/chart" uri="{CE6537A1-D6FC-4f65-9D91-7224C49458BB}">
-                <c15:showLeaderLines val="0"/>
-              </c:ext>
-            </c:extLst>
-          </c:dLbls>
-          <c:cat>
-            <c:strRef>
-              <c:f>Sheet1!$A$2:$A$5</c:f>
-              <c:strCache>
-                <c:ptCount val="4"/>
-                <c:pt idx="0">
-                  <c:v>p(50) Response Time</c:v>
-                </c:pt>
-                <c:pt idx="1">
-                  <c:v>p(90) Response Time</c:v>
-                </c:pt>
-                <c:pt idx="2">
-                  <c:v>p(95) Response Time</c:v>
-                </c:pt>
-                <c:pt idx="3">
-                  <c:v>Threshold p(95)</c:v>
-                </c:pt>
-              </c:strCache>
-            </c:strRef>
-          </c:cat>
-          <c:val>
-            <c:numRef>
-              <c:f>Sheet1!$B$2:$B$5</c:f>
-              <c:numCache>
-                <c:formatCode>General</c:formatCode>
-                <c:ptCount val="4"/>
-                <c:pt idx="0">
-                  <c:v>180</c:v>
-                </c:pt>
-                <c:pt idx="1">
-                  <c:v>310</c:v>
-                </c:pt>
-                <c:pt idx="2">
-                  <c:v>352</c:v>
-                </c:pt>
-                <c:pt idx="3">
-                  <c:v>1200</c:v>
-                </c:pt>
-              </c:numCache>
-            </c:numRef>
-          </c:val>
-          <c:extLst>
-            <c:ext xmlns:c16="http://schemas.microsoft.com/office/drawing/2014/chart" uri="{C3380CC4-5D6E-409C-BE32-E72D297353CC}">
-              <c16:uniqueId val="{00000008-9A10-4C2B-88F4-695A11A09A62}"/>
-            </c:ext>
-          </c:extLst>
-        </c:ser>
-        <c:dLbls>
-          <c:showLegendKey val="0"/>
-          <c:showVal val="1"/>
-          <c:showCatName val="0"/>
-          <c:showSerName val="0"/>
-          <c:showPercent val="0"/>
-          <c:showBubbleSize val="0"/>
-        </c:dLbls>
-        <c:gapWidth val="150"/>
-        <c:axId val="2094734554"/>
-        <c:axId val="2094734552"/>
-      </c:barChart>
-      <c:catAx>
-        <c:axId val="2094734554"/>
-        <c:scaling>
-          <c:orientation val="minMax"/>
-        </c:scaling>
-        <c:delete val="0"/>
-        <c:axPos val="b"/>
-        <c:numFmt formatCode="General" sourceLinked="1"/>
-        <c:majorTickMark val="out"/>
-        <c:minorTickMark val="none"/>
-        <c:tickLblPos val="low"/>
-        <c:spPr>
-          <a:ln w="12700" cap="flat">
-            <a:solidFill>
-              <a:srgbClr val="888888"/>
-            </a:solidFill>
-            <a:prstDash val="solid"/>
-            <a:round/>
-          </a:ln>
-        </c:spPr>
-        <c:txPr>
-          <a:bodyPr/>
-          <a:lstStyle/>
-          <a:p>
-            <a:pPr>
-              <a:defRPr sz="1200" b="0" i="0" u="none" strike="noStrike">
-                <a:solidFill>
-                  <a:srgbClr val="5C7A9B"/>
-                </a:solidFill>
-                <a:latin typeface="Arial"/>
-              </a:defRPr>
-            </a:pPr>
-            <a:endParaRPr lang="en-US"/>
-          </a:p>
-        </c:txPr>
-        <c:crossAx val="2094734552"/>
-        <c:crosses val="autoZero"/>
-        <c:auto val="1"/>
-        <c:lblAlgn val="ctr"/>
-        <c:lblOffset val="100"/>
-        <c:noMultiLvlLbl val="1"/>
-      </c:catAx>
-      <c:valAx>
-        <c:axId val="2094734552"/>
-        <c:scaling>
-          <c:orientation val="minMax"/>
-          <c:max val="1400"/>
-        </c:scaling>
-        <c:delete val="0"/>
-        <c:axPos val="l"/>
-        <c:majorGridlines>
-          <c:spPr>
-            <a:ln w="6350" cap="flat">
-              <a:solidFill>
-                <a:srgbClr val="E2EAF4"/>
-              </a:solidFill>
-              <a:prstDash val="solid"/>
-              <a:round/>
-            </a:ln>
-          </c:spPr>
-        </c:majorGridlines>
-        <c:numFmt formatCode="General" sourceLinked="0"/>
-        <c:majorTickMark val="out"/>
-        <c:minorTickMark val="none"/>
-        <c:tickLblPos val="nextTo"/>
-        <c:spPr>
-          <a:ln w="12700" cap="flat">
-            <a:solidFill>
-              <a:srgbClr val="888888"/>
-            </a:solidFill>
-            <a:prstDash val="solid"/>
-            <a:round/>
-          </a:ln>
-        </c:spPr>
-        <c:txPr>
-          <a:bodyPr/>
-          <a:lstStyle/>
-          <a:p>
-            <a:pPr>
-              <a:defRPr sz="1200" b="0" i="0" u="none" strike="noStrike">
-                <a:solidFill>
-                  <a:srgbClr val="5C7A9B"/>
-                </a:solidFill>
-                <a:latin typeface="Arial"/>
-              </a:defRPr>
-            </a:pPr>
-            <a:endParaRPr lang="en-US"/>
-          </a:p>
-        </c:txPr>
-        <c:crossAx val="2094734554"/>
-        <c:crosses val="autoZero"/>
-        <c:crossBetween val="between"/>
-      </c:valAx>
-      <c:spPr>
-        <a:noFill/>
-        <a:ln>
-          <a:noFill/>
-        </a:ln>
-        <a:effectLst/>
-      </c:spPr>
-    </c:plotArea>
-    <c:plotVisOnly val="1"/>
-    <c:dispBlanksAs val="span"/>
-    <c:showDLblsOverMax val="1"/>
-  </c:chart>
-  <c:spPr>
-    <a:solidFill>
-      <a:srgbClr val="FFFFFF"/>
-    </a:solidFill>
-    <a:ln>
-      <a:noFill/>
-    </a:ln>
-    <a:effectLst/>
-  </c:spPr>
-  <c:externalData r:id="rId1">
-    <c:autoUpdate val="0"/>
-  </c:externalData>
-</c:chartSpace>
-</file>
-
 <file path=ppt/notesMasters/notesMaster1.xml><?xml version="1.0" encoding="utf-8"?>
 <p:notesMaster xmlns:a="http://schemas.openxmlformats.org/drawingml/2006/main" xmlns:r="http://schemas.openxmlformats.org/officeDocument/2006/relationships" xmlns:p="http://schemas.openxmlformats.org/presentationml/2006/main">
   <p:cSld>
@@ -449,7 +144,7 @@
     </p:spTree>
     <p:extLst>
       <p:ext uri="{BB962C8B-B14F-4D97-AF65-F5344CB8AC3E}">
-        <p14:creationId xmlns:p14="http://schemas.microsoft.com/office/powerpoint/2010/main" val="4143998049"/>
+        <p14:creationId xmlns:p14="http://schemas.microsoft.com/office/powerpoint/2010/main" val="937225629"/>
       </p:ext>
     </p:extLst>
   </p:cSld>
@@ -633,90 +328,6 @@
 </p:notes>
 </file>
 
-<file path=ppt/notesSlides/notesSlide10.xml><?xml version="1.0" encoding="utf-8"?>
-<p:notes xmlns:a="http://schemas.openxmlformats.org/drawingml/2006/main" xmlns:r="http://schemas.openxmlformats.org/officeDocument/2006/relationships" xmlns:p="http://schemas.openxmlformats.org/presentationml/2006/main">
-  <p:cSld>
-    <p:spTree>
-      <p:nvGrpSpPr>
-        <p:cNvPr id="1" name=""/>
-        <p:cNvGrpSpPr/>
-        <p:nvPr/>
-      </p:nvGrpSpPr>
-      <p:grpSpPr>
-        <a:xfrm>
-          <a:off x="0" y="0"/>
-          <a:ext cx="0" cy="0"/>
-          <a:chOff x="0" y="0"/>
-          <a:chExt cx="0" cy="0"/>
-        </a:xfrm>
-      </p:grpSpPr>
-      <p:sp>
-        <p:nvSpPr>
-          <p:cNvPr id="2" name="Slide Image Placeholder 1"/>
-          <p:cNvSpPr>
-            <a:spLocks noGrp="1" noRot="1" noChangeAspect="1"/>
-          </p:cNvSpPr>
-          <p:nvPr>
-            <p:ph type="sldImg"/>
-          </p:nvPr>
-        </p:nvSpPr>
-        <p:spPr/>
-      </p:sp>
-      <p:sp>
-        <p:nvSpPr>
-          <p:cNvPr id="3" name="Notes Placeholder 2"/>
-          <p:cNvSpPr>
-            <a:spLocks noGrp="1"/>
-          </p:cNvSpPr>
-          <p:nvPr>
-            <p:ph type="body" idx="1"/>
-          </p:nvPr>
-        </p:nvSpPr>
-        <p:spPr/>
-        <p:txBody>
-          <a:bodyPr/>
-          <a:lstStyle/>
-          <a:p>
-            <a:endParaRPr lang="en-US" dirty="0"/>
-          </a:p>
-        </p:txBody>
-      </p:sp>
-      <p:sp>
-        <p:nvSpPr>
-          <p:cNvPr id="4" name="Slide Number Placeholder 3"/>
-          <p:cNvSpPr>
-            <a:spLocks noGrp="1"/>
-          </p:cNvSpPr>
-          <p:nvPr>
-            <p:ph type="sldNum" sz="quarter" idx="10"/>
-          </p:nvPr>
-        </p:nvSpPr>
-        <p:spPr/>
-        <p:txBody>
-          <a:bodyPr/>
-          <a:lstStyle/>
-          <a:p>
-            <a:fld id="{F7021451-1387-4CA6-816F-3879F97B5CBC}" type="slidenum">
-              <a:rPr lang="en-US"/>
-              <a:t>10</a:t>
-            </a:fld>
-            <a:endParaRPr lang="en-US"/>
-          </a:p>
-        </p:txBody>
-      </p:sp>
-    </p:spTree>
-    <p:extLst>
-      <p:ext uri="{BB962C8B-B14F-4D97-AF65-F5344CB8AC3E}">
-        <p14:creationId xmlns:p14="http://schemas.microsoft.com/office/powerpoint/2010/main" val="1024086991"/>
-      </p:ext>
-    </p:extLst>
-  </p:cSld>
-  <p:clrMapOvr>
-    <a:masterClrMapping/>
-  </p:clrMapOvr>
-</p:notes>
-</file>
-
 <file path=ppt/notesSlides/notesSlide2.xml><?xml version="1.0" encoding="utf-8"?>
 <p:notes xmlns:a="http://schemas.openxmlformats.org/drawingml/2006/main" xmlns:r="http://schemas.openxmlformats.org/officeDocument/2006/relationships" xmlns:p="http://schemas.openxmlformats.org/presentationml/2006/main">
   <p:cSld>
@@ -1287,90 +898,6 @@
             <a:fld id="{F7021451-1387-4CA6-816F-3879F97B5CBC}" type="slidenum">
               <a:rPr lang="en-US"/>
               <a:t>8</a:t>
-            </a:fld>
-            <a:endParaRPr lang="en-US"/>
-          </a:p>
-        </p:txBody>
-      </p:sp>
-    </p:spTree>
-    <p:extLst>
-      <p:ext uri="{BB962C8B-B14F-4D97-AF65-F5344CB8AC3E}">
-        <p14:creationId xmlns:p14="http://schemas.microsoft.com/office/powerpoint/2010/main" val="1024086991"/>
-      </p:ext>
-    </p:extLst>
-  </p:cSld>
-  <p:clrMapOvr>
-    <a:masterClrMapping/>
-  </p:clrMapOvr>
-</p:notes>
-</file>
-
-<file path=ppt/notesSlides/notesSlide9.xml><?xml version="1.0" encoding="utf-8"?>
-<p:notes xmlns:a="http://schemas.openxmlformats.org/drawingml/2006/main" xmlns:r="http://schemas.openxmlformats.org/officeDocument/2006/relationships" xmlns:p="http://schemas.openxmlformats.org/presentationml/2006/main">
-  <p:cSld>
-    <p:spTree>
-      <p:nvGrpSpPr>
-        <p:cNvPr id="1" name=""/>
-        <p:cNvGrpSpPr/>
-        <p:nvPr/>
-      </p:nvGrpSpPr>
-      <p:grpSpPr>
-        <a:xfrm>
-          <a:off x="0" y="0"/>
-          <a:ext cx="0" cy="0"/>
-          <a:chOff x="0" y="0"/>
-          <a:chExt cx="0" cy="0"/>
-        </a:xfrm>
-      </p:grpSpPr>
-      <p:sp>
-        <p:nvSpPr>
-          <p:cNvPr id="2" name="Slide Image Placeholder 1"/>
-          <p:cNvSpPr>
-            <a:spLocks noGrp="1" noRot="1" noChangeAspect="1"/>
-          </p:cNvSpPr>
-          <p:nvPr>
-            <p:ph type="sldImg"/>
-          </p:nvPr>
-        </p:nvSpPr>
-        <p:spPr/>
-      </p:sp>
-      <p:sp>
-        <p:nvSpPr>
-          <p:cNvPr id="3" name="Notes Placeholder 2"/>
-          <p:cNvSpPr>
-            <a:spLocks noGrp="1"/>
-          </p:cNvSpPr>
-          <p:nvPr>
-            <p:ph type="body" idx="1"/>
-          </p:nvPr>
-        </p:nvSpPr>
-        <p:spPr/>
-        <p:txBody>
-          <a:bodyPr/>
-          <a:lstStyle/>
-          <a:p>
-            <a:endParaRPr lang="en-US" dirty="0"/>
-          </a:p>
-        </p:txBody>
-      </p:sp>
-      <p:sp>
-        <p:nvSpPr>
-          <p:cNvPr id="4" name="Slide Number Placeholder 3"/>
-          <p:cNvSpPr>
-            <a:spLocks noGrp="1"/>
-          </p:cNvSpPr>
-          <p:nvPr>
-            <p:ph type="sldNum" sz="quarter" idx="10"/>
-          </p:nvPr>
-        </p:nvSpPr>
-        <p:spPr/>
-        <p:txBody>
-          <a:bodyPr/>
-          <a:lstStyle/>
-          <a:p>
-            <a:fld id="{F7021451-1387-4CA6-816F-3879F97B5CBC}" type="slidenum">
-              <a:rPr lang="en-US"/>
-              <a:t>9</a:t>
             </a:fld>
             <a:endParaRPr lang="en-US"/>
           </a:p>
@@ -1945,9 +1472,6 @@
           <a:bodyPr wrap="square" lIns="0" tIns="0" rIns="0" bIns="0" rtlCol="0" anchor="ctr"/>
           <a:lstStyle/>
           <a:p>
-            <a:pPr marL="0" indent="0">
-              <a:buNone/>
-            </a:pPr>
             <a:r>
               <a:rPr lang="en-US" sz="1400" dirty="0">
                 <a:solidFill>
@@ -1960,738 +1484,6 @@
               <a:t>Christoph Herndler, Lucas Kemmer</a:t>
             </a:r>
             <a:endParaRPr lang="en-US" sz="1400" dirty="0"/>
-          </a:p>
-        </p:txBody>
-      </p:sp>
-    </p:spTree>
-  </p:cSld>
-  <p:clrMapOvr>
-    <a:masterClrMapping/>
-  </p:clrMapOvr>
-</p:sld>
-</file>
-
-<file path=ppt/slides/slide10.xml><?xml version="1.0" encoding="utf-8"?>
-<p:sld xmlns:a="http://schemas.openxmlformats.org/drawingml/2006/main" xmlns:r="http://schemas.openxmlformats.org/officeDocument/2006/relationships" xmlns:p="http://schemas.openxmlformats.org/presentationml/2006/main">
-  <p:cSld name="Slide 10">
-    <p:bg>
-      <p:bgPr>
-        <a:solidFill>
-          <a:srgbClr val="1A2744"/>
-        </a:solidFill>
-        <a:effectLst/>
-      </p:bgPr>
-    </p:bg>
-    <p:spTree>
-      <p:nvGrpSpPr>
-        <p:cNvPr id="1" name=""/>
-        <p:cNvGrpSpPr/>
-        <p:nvPr/>
-      </p:nvGrpSpPr>
-      <p:grpSpPr>
-        <a:xfrm>
-          <a:off x="0" y="0"/>
-          <a:ext cx="0" cy="0"/>
-          <a:chOff x="0" y="0"/>
-          <a:chExt cx="0" cy="0"/>
-        </a:xfrm>
-      </p:grpSpPr>
-      <p:sp>
-        <p:nvSpPr>
-          <p:cNvPr id="2" name="Shape 0"/>
-          <p:cNvSpPr/>
-          <p:nvPr/>
-        </p:nvSpPr>
-        <p:spPr>
-          <a:xfrm>
-            <a:off x="0" y="0"/>
-            <a:ext cx="137160" cy="5143500"/>
-          </a:xfrm>
-          <a:prstGeom prst="rect">
-            <a:avLst/>
-          </a:prstGeom>
-          <a:solidFill>
-            <a:srgbClr val="E63946"/>
-          </a:solidFill>
-          <a:ln w="12700">
-            <a:solidFill>
-              <a:srgbClr val="E63946"/>
-            </a:solidFill>
-            <a:prstDash val="solid"/>
-          </a:ln>
-        </p:spPr>
-        <p:txBody>
-          <a:bodyPr/>
-          <a:lstStyle/>
-          <a:p>
-            <a:endParaRPr lang="de-AT"/>
-          </a:p>
-        </p:txBody>
-      </p:sp>
-      <p:sp>
-        <p:nvSpPr>
-          <p:cNvPr id="3" name="Text 1"/>
-          <p:cNvSpPr/>
-          <p:nvPr/>
-        </p:nvSpPr>
-        <p:spPr>
-          <a:xfrm>
-            <a:off x="457200" y="365760"/>
-            <a:ext cx="8229600" cy="548640"/>
-          </a:xfrm>
-          <a:prstGeom prst="rect">
-            <a:avLst/>
-          </a:prstGeom>
-          <a:noFill/>
-          <a:ln/>
-        </p:spPr>
-        <p:txBody>
-          <a:bodyPr wrap="square" lIns="0" tIns="0" rIns="0" bIns="0" rtlCol="0" anchor="ctr"/>
-          <a:lstStyle/>
-          <a:p>
-            <a:pPr marL="0" indent="0">
-              <a:buNone/>
-            </a:pPr>
-            <a:r>
-              <a:rPr lang="en-US" sz="3200" b="1" dirty="0">
-                <a:solidFill>
-                  <a:srgbClr val="FFFFFF"/>
-                </a:solidFill>
-                <a:latin typeface="Trebuchet MS" pitchFamily="34" charset="0"/>
-                <a:ea typeface="Trebuchet MS" pitchFamily="34" charset="-122"/>
-                <a:cs typeface="Trebuchet MS" pitchFamily="34" charset="-120"/>
-              </a:rPr>
-              <a:t>Zusammenfassung</a:t>
-            </a:r>
-            <a:endParaRPr lang="en-US" sz="3200" dirty="0"/>
-          </a:p>
-        </p:txBody>
-      </p:sp>
-      <p:sp>
-        <p:nvSpPr>
-          <p:cNvPr id="4" name="Shape 2"/>
-          <p:cNvSpPr/>
-          <p:nvPr/>
-        </p:nvSpPr>
-        <p:spPr>
-          <a:xfrm>
-            <a:off x="457200" y="1097280"/>
-            <a:ext cx="411480" cy="475488"/>
-          </a:xfrm>
-          <a:prstGeom prst="rect">
-            <a:avLst/>
-          </a:prstGeom>
-          <a:solidFill>
-            <a:srgbClr val="E63946"/>
-          </a:solidFill>
-          <a:ln w="12700">
-            <a:solidFill>
-              <a:srgbClr val="E63946"/>
-            </a:solidFill>
-            <a:prstDash val="solid"/>
-          </a:ln>
-        </p:spPr>
-        <p:txBody>
-          <a:bodyPr/>
-          <a:lstStyle/>
-          <a:p>
-            <a:endParaRPr lang="de-AT"/>
-          </a:p>
-        </p:txBody>
-      </p:sp>
-      <p:sp>
-        <p:nvSpPr>
-          <p:cNvPr id="5" name="Text 3"/>
-          <p:cNvSpPr/>
-          <p:nvPr/>
-        </p:nvSpPr>
-        <p:spPr>
-          <a:xfrm>
-            <a:off x="457200" y="1097280"/>
-            <a:ext cx="411480" cy="475488"/>
-          </a:xfrm>
-          <a:prstGeom prst="rect">
-            <a:avLst/>
-          </a:prstGeom>
-          <a:noFill/>
-          <a:ln/>
-        </p:spPr>
-        <p:txBody>
-          <a:bodyPr wrap="square" lIns="0" tIns="0" rIns="0" bIns="0" rtlCol="0" anchor="ctr"/>
-          <a:lstStyle/>
-          <a:p>
-            <a:pPr marL="0" indent="0" algn="ctr">
-              <a:buNone/>
-            </a:pPr>
-            <a:r>
-              <a:rPr lang="en-US" sz="1800" b="1" dirty="0">
-                <a:solidFill>
-                  <a:srgbClr val="FFFFFF"/>
-                </a:solidFill>
-                <a:latin typeface="Calibri" pitchFamily="34" charset="0"/>
-                <a:ea typeface="Calibri" pitchFamily="34" charset="-122"/>
-                <a:cs typeface="Calibri" pitchFamily="34" charset="-120"/>
-              </a:rPr>
-              <a:t>✓</a:t>
-            </a:r>
-            <a:endParaRPr lang="en-US" sz="1800" dirty="0"/>
-          </a:p>
-        </p:txBody>
-      </p:sp>
-      <p:sp>
-        <p:nvSpPr>
-          <p:cNvPr id="6" name="Text 4"/>
-          <p:cNvSpPr/>
-          <p:nvPr/>
-        </p:nvSpPr>
-        <p:spPr>
-          <a:xfrm>
-            <a:off x="960120" y="1115568"/>
-            <a:ext cx="7315200" cy="438912"/>
-          </a:xfrm>
-          <a:prstGeom prst="rect">
-            <a:avLst/>
-          </a:prstGeom>
-          <a:noFill/>
-          <a:ln/>
-        </p:spPr>
-        <p:txBody>
-          <a:bodyPr wrap="square" lIns="0" tIns="0" rIns="0" bIns="0" rtlCol="0" anchor="ctr"/>
-          <a:lstStyle/>
-          <a:p>
-            <a:pPr marL="0" indent="0">
-              <a:buNone/>
-            </a:pPr>
-            <a:r>
-              <a:rPr lang="en-US" sz="1400" dirty="0">
-                <a:solidFill>
-                  <a:srgbClr val="C5D8EE"/>
-                </a:solidFill>
-                <a:latin typeface="Calibri" pitchFamily="34" charset="0"/>
-                <a:ea typeface="Calibri" pitchFamily="34" charset="-122"/>
-                <a:cs typeface="Calibri" pitchFamily="34" charset="-120"/>
-              </a:rPr>
-              <a:t>11 Tests implementiert — 5 Unit, 3 Integration, 2 E2E, 1 Load</a:t>
-            </a:r>
-            <a:endParaRPr lang="en-US" sz="1400" dirty="0"/>
-          </a:p>
-        </p:txBody>
-      </p:sp>
-      <p:sp>
-        <p:nvSpPr>
-          <p:cNvPr id="7" name="Shape 5"/>
-          <p:cNvSpPr/>
-          <p:nvPr/>
-        </p:nvSpPr>
-        <p:spPr>
-          <a:xfrm>
-            <a:off x="457200" y="1755648"/>
-            <a:ext cx="411480" cy="475488"/>
-          </a:xfrm>
-          <a:prstGeom prst="rect">
-            <a:avLst/>
-          </a:prstGeom>
-          <a:solidFill>
-            <a:srgbClr val="E63946"/>
-          </a:solidFill>
-          <a:ln w="12700">
-            <a:solidFill>
-              <a:srgbClr val="E63946"/>
-            </a:solidFill>
-            <a:prstDash val="solid"/>
-          </a:ln>
-        </p:spPr>
-        <p:txBody>
-          <a:bodyPr/>
-          <a:lstStyle/>
-          <a:p>
-            <a:endParaRPr lang="de-AT"/>
-          </a:p>
-        </p:txBody>
-      </p:sp>
-      <p:sp>
-        <p:nvSpPr>
-          <p:cNvPr id="8" name="Text 6"/>
-          <p:cNvSpPr/>
-          <p:nvPr/>
-        </p:nvSpPr>
-        <p:spPr>
-          <a:xfrm>
-            <a:off x="457200" y="1755648"/>
-            <a:ext cx="411480" cy="475488"/>
-          </a:xfrm>
-          <a:prstGeom prst="rect">
-            <a:avLst/>
-          </a:prstGeom>
-          <a:noFill/>
-          <a:ln/>
-        </p:spPr>
-        <p:txBody>
-          <a:bodyPr wrap="square" lIns="0" tIns="0" rIns="0" bIns="0" rtlCol="0" anchor="ctr"/>
-          <a:lstStyle/>
-          <a:p>
-            <a:pPr marL="0" indent="0" algn="ctr">
-              <a:buNone/>
-            </a:pPr>
-            <a:r>
-              <a:rPr lang="en-US" sz="1800" b="1" dirty="0">
-                <a:solidFill>
-                  <a:srgbClr val="FFFFFF"/>
-                </a:solidFill>
-                <a:latin typeface="Calibri" pitchFamily="34" charset="0"/>
-                <a:ea typeface="Calibri" pitchFamily="34" charset="-122"/>
-                <a:cs typeface="Calibri" pitchFamily="34" charset="-120"/>
-              </a:rPr>
-              <a:t>✓</a:t>
-            </a:r>
-            <a:endParaRPr lang="en-US" sz="1800" dirty="0"/>
-          </a:p>
-        </p:txBody>
-      </p:sp>
-      <p:sp>
-        <p:nvSpPr>
-          <p:cNvPr id="9" name="Text 7"/>
-          <p:cNvSpPr/>
-          <p:nvPr/>
-        </p:nvSpPr>
-        <p:spPr>
-          <a:xfrm>
-            <a:off x="960120" y="1773936"/>
-            <a:ext cx="7315200" cy="438912"/>
-          </a:xfrm>
-          <a:prstGeom prst="rect">
-            <a:avLst/>
-          </a:prstGeom>
-          <a:noFill/>
-          <a:ln/>
-        </p:spPr>
-        <p:txBody>
-          <a:bodyPr wrap="square" lIns="0" tIns="0" rIns="0" bIns="0" rtlCol="0" anchor="ctr"/>
-          <a:lstStyle/>
-          <a:p>
-            <a:pPr marL="0" indent="0">
-              <a:buNone/>
-            </a:pPr>
-            <a:r>
-              <a:rPr lang="en-US" sz="1400" dirty="0">
-                <a:solidFill>
-                  <a:srgbClr val="C5D8EE"/>
-                </a:solidFill>
-                <a:latin typeface="Calibri" pitchFamily="34" charset="0"/>
-                <a:ea typeface="Calibri" pitchFamily="34" charset="-122"/>
-                <a:cs typeface="Calibri" pitchFamily="34" charset="-120"/>
-              </a:rPr>
-              <a:t>Playwright deckt alle funktionalen Test-Ebenen ab (TypeScript)</a:t>
-            </a:r>
-            <a:endParaRPr lang="en-US" sz="1400" dirty="0"/>
-          </a:p>
-        </p:txBody>
-      </p:sp>
-      <p:sp>
-        <p:nvSpPr>
-          <p:cNvPr id="10" name="Shape 8"/>
-          <p:cNvSpPr/>
-          <p:nvPr/>
-        </p:nvSpPr>
-        <p:spPr>
-          <a:xfrm>
-            <a:off x="457200" y="2414016"/>
-            <a:ext cx="411480" cy="475488"/>
-          </a:xfrm>
-          <a:prstGeom prst="rect">
-            <a:avLst/>
-          </a:prstGeom>
-          <a:solidFill>
-            <a:srgbClr val="E63946"/>
-          </a:solidFill>
-          <a:ln w="12700">
-            <a:solidFill>
-              <a:srgbClr val="E63946"/>
-            </a:solidFill>
-            <a:prstDash val="solid"/>
-          </a:ln>
-        </p:spPr>
-        <p:txBody>
-          <a:bodyPr/>
-          <a:lstStyle/>
-          <a:p>
-            <a:endParaRPr lang="de-AT"/>
-          </a:p>
-        </p:txBody>
-      </p:sp>
-      <p:sp>
-        <p:nvSpPr>
-          <p:cNvPr id="11" name="Text 9"/>
-          <p:cNvSpPr/>
-          <p:nvPr/>
-        </p:nvSpPr>
-        <p:spPr>
-          <a:xfrm>
-            <a:off x="457200" y="2414016"/>
-            <a:ext cx="411480" cy="475488"/>
-          </a:xfrm>
-          <a:prstGeom prst="rect">
-            <a:avLst/>
-          </a:prstGeom>
-          <a:noFill/>
-          <a:ln/>
-        </p:spPr>
-        <p:txBody>
-          <a:bodyPr wrap="square" lIns="0" tIns="0" rIns="0" bIns="0" rtlCol="0" anchor="ctr"/>
-          <a:lstStyle/>
-          <a:p>
-            <a:pPr marL="0" indent="0" algn="ctr">
-              <a:buNone/>
-            </a:pPr>
-            <a:r>
-              <a:rPr lang="en-US" sz="1800" b="1" dirty="0">
-                <a:solidFill>
-                  <a:srgbClr val="FFFFFF"/>
-                </a:solidFill>
-                <a:latin typeface="Calibri" pitchFamily="34" charset="0"/>
-                <a:ea typeface="Calibri" pitchFamily="34" charset="-122"/>
-                <a:cs typeface="Calibri" pitchFamily="34" charset="-120"/>
-              </a:rPr>
-              <a:t>✓</a:t>
-            </a:r>
-            <a:endParaRPr lang="en-US" sz="1800" dirty="0"/>
-          </a:p>
-        </p:txBody>
-      </p:sp>
-      <p:sp>
-        <p:nvSpPr>
-          <p:cNvPr id="12" name="Text 10"/>
-          <p:cNvSpPr/>
-          <p:nvPr/>
-        </p:nvSpPr>
-        <p:spPr>
-          <a:xfrm>
-            <a:off x="960120" y="2432304"/>
-            <a:ext cx="7315200" cy="438912"/>
-          </a:xfrm>
-          <a:prstGeom prst="rect">
-            <a:avLst/>
-          </a:prstGeom>
-          <a:noFill/>
-          <a:ln/>
-        </p:spPr>
-        <p:txBody>
-          <a:bodyPr wrap="square" lIns="0" tIns="0" rIns="0" bIns="0" rtlCol="0" anchor="ctr"/>
-          <a:lstStyle/>
-          <a:p>
-            <a:pPr marL="0" indent="0">
-              <a:buNone/>
-            </a:pPr>
-            <a:r>
-              <a:rPr lang="en-US" sz="1400" dirty="0">
-                <a:solidFill>
-                  <a:srgbClr val="C5D8EE"/>
-                </a:solidFill>
-                <a:latin typeface="Calibri" pitchFamily="34" charset="0"/>
-                <a:ea typeface="Calibri" pitchFamily="34" charset="-122"/>
-                <a:cs typeface="Calibri" pitchFamily="34" charset="-120"/>
-              </a:rPr>
-              <a:t>k6 Load Test: p95 = 352ms, 0% Fehler — alle Thresholds bestanden</a:t>
-            </a:r>
-            <a:endParaRPr lang="en-US" sz="1400" dirty="0"/>
-          </a:p>
-        </p:txBody>
-      </p:sp>
-      <p:sp>
-        <p:nvSpPr>
-          <p:cNvPr id="13" name="Shape 11"/>
-          <p:cNvSpPr/>
-          <p:nvPr/>
-        </p:nvSpPr>
-        <p:spPr>
-          <a:xfrm>
-            <a:off x="457200" y="3072384"/>
-            <a:ext cx="411480" cy="475488"/>
-          </a:xfrm>
-          <a:prstGeom prst="rect">
-            <a:avLst/>
-          </a:prstGeom>
-          <a:solidFill>
-            <a:srgbClr val="E63946"/>
-          </a:solidFill>
-          <a:ln w="12700">
-            <a:solidFill>
-              <a:srgbClr val="E63946"/>
-            </a:solidFill>
-            <a:prstDash val="solid"/>
-          </a:ln>
-        </p:spPr>
-        <p:txBody>
-          <a:bodyPr/>
-          <a:lstStyle/>
-          <a:p>
-            <a:endParaRPr lang="de-AT"/>
-          </a:p>
-        </p:txBody>
-      </p:sp>
-      <p:sp>
-        <p:nvSpPr>
-          <p:cNvPr id="14" name="Text 12"/>
-          <p:cNvSpPr/>
-          <p:nvPr/>
-        </p:nvSpPr>
-        <p:spPr>
-          <a:xfrm>
-            <a:off x="457200" y="3072384"/>
-            <a:ext cx="411480" cy="475488"/>
-          </a:xfrm>
-          <a:prstGeom prst="rect">
-            <a:avLst/>
-          </a:prstGeom>
-          <a:noFill/>
-          <a:ln/>
-        </p:spPr>
-        <p:txBody>
-          <a:bodyPr wrap="square" lIns="0" tIns="0" rIns="0" bIns="0" rtlCol="0" anchor="ctr"/>
-          <a:lstStyle/>
-          <a:p>
-            <a:pPr marL="0" indent="0" algn="ctr">
-              <a:buNone/>
-            </a:pPr>
-            <a:r>
-              <a:rPr lang="en-US" sz="1800" b="1" dirty="0">
-                <a:solidFill>
-                  <a:srgbClr val="FFFFFF"/>
-                </a:solidFill>
-                <a:latin typeface="Calibri" pitchFamily="34" charset="0"/>
-                <a:ea typeface="Calibri" pitchFamily="34" charset="-122"/>
-                <a:cs typeface="Calibri" pitchFamily="34" charset="-120"/>
-              </a:rPr>
-              <a:t>✓</a:t>
-            </a:r>
-            <a:endParaRPr lang="en-US" sz="1800" dirty="0"/>
-          </a:p>
-        </p:txBody>
-      </p:sp>
-      <p:sp>
-        <p:nvSpPr>
-          <p:cNvPr id="15" name="Text 13"/>
-          <p:cNvSpPr/>
-          <p:nvPr/>
-        </p:nvSpPr>
-        <p:spPr>
-          <a:xfrm>
-            <a:off x="960120" y="3090672"/>
-            <a:ext cx="7315200" cy="438912"/>
-          </a:xfrm>
-          <a:prstGeom prst="rect">
-            <a:avLst/>
-          </a:prstGeom>
-          <a:noFill/>
-          <a:ln/>
-        </p:spPr>
-        <p:txBody>
-          <a:bodyPr wrap="square" lIns="0" tIns="0" rIns="0" bIns="0" rtlCol="0" anchor="ctr"/>
-          <a:lstStyle/>
-          <a:p>
-            <a:pPr marL="0" indent="0">
-              <a:buNone/>
-            </a:pPr>
-            <a:r>
-              <a:rPr lang="en-US" sz="1400" dirty="0">
-                <a:solidFill>
-                  <a:srgbClr val="C5D8EE"/>
-                </a:solidFill>
-                <a:latin typeface="Calibri" pitchFamily="34" charset="0"/>
-                <a:ea typeface="Calibri" pitchFamily="34" charset="-122"/>
-                <a:cs typeface="Calibri" pitchFamily="34" charset="-120"/>
-              </a:rPr>
-              <a:t>GitHub Actions CI/CD Pipeline automatisiert Test-Ausführung auf Push/PR</a:t>
-            </a:r>
-            <a:endParaRPr lang="en-US" sz="1400" dirty="0"/>
-          </a:p>
-        </p:txBody>
-      </p:sp>
-      <p:sp>
-        <p:nvSpPr>
-          <p:cNvPr id="16" name="Shape 14"/>
-          <p:cNvSpPr/>
-          <p:nvPr/>
-        </p:nvSpPr>
-        <p:spPr>
-          <a:xfrm>
-            <a:off x="457200" y="3730752"/>
-            <a:ext cx="411480" cy="475488"/>
-          </a:xfrm>
-          <a:prstGeom prst="rect">
-            <a:avLst/>
-          </a:prstGeom>
-          <a:solidFill>
-            <a:srgbClr val="E63946"/>
-          </a:solidFill>
-          <a:ln w="12700">
-            <a:solidFill>
-              <a:srgbClr val="E63946"/>
-            </a:solidFill>
-            <a:prstDash val="solid"/>
-          </a:ln>
-        </p:spPr>
-        <p:txBody>
-          <a:bodyPr/>
-          <a:lstStyle/>
-          <a:p>
-            <a:endParaRPr lang="de-AT"/>
-          </a:p>
-        </p:txBody>
-      </p:sp>
-      <p:sp>
-        <p:nvSpPr>
-          <p:cNvPr id="17" name="Text 15"/>
-          <p:cNvSpPr/>
-          <p:nvPr/>
-        </p:nvSpPr>
-        <p:spPr>
-          <a:xfrm>
-            <a:off x="457200" y="3730752"/>
-            <a:ext cx="411480" cy="475488"/>
-          </a:xfrm>
-          <a:prstGeom prst="rect">
-            <a:avLst/>
-          </a:prstGeom>
-          <a:noFill/>
-          <a:ln/>
-        </p:spPr>
-        <p:txBody>
-          <a:bodyPr wrap="square" lIns="0" tIns="0" rIns="0" bIns="0" rtlCol="0" anchor="ctr"/>
-          <a:lstStyle/>
-          <a:p>
-            <a:pPr marL="0" indent="0" algn="ctr">
-              <a:buNone/>
-            </a:pPr>
-            <a:r>
-              <a:rPr lang="en-US" sz="1800" b="1" dirty="0">
-                <a:solidFill>
-                  <a:srgbClr val="FFFFFF"/>
-                </a:solidFill>
-                <a:latin typeface="Calibri" pitchFamily="34" charset="0"/>
-                <a:ea typeface="Calibri" pitchFamily="34" charset="-122"/>
-                <a:cs typeface="Calibri" pitchFamily="34" charset="-120"/>
-              </a:rPr>
-              <a:t>✓</a:t>
-            </a:r>
-            <a:endParaRPr lang="en-US" sz="1800" dirty="0"/>
-          </a:p>
-        </p:txBody>
-      </p:sp>
-      <p:sp>
-        <p:nvSpPr>
-          <p:cNvPr id="18" name="Text 16"/>
-          <p:cNvSpPr/>
-          <p:nvPr/>
-        </p:nvSpPr>
-        <p:spPr>
-          <a:xfrm>
-            <a:off x="960120" y="3749040"/>
-            <a:ext cx="7315200" cy="438912"/>
-          </a:xfrm>
-          <a:prstGeom prst="rect">
-            <a:avLst/>
-          </a:prstGeom>
-          <a:noFill/>
-          <a:ln/>
-        </p:spPr>
-        <p:txBody>
-          <a:bodyPr wrap="square" lIns="0" tIns="0" rIns="0" bIns="0" rtlCol="0" anchor="ctr"/>
-          <a:lstStyle/>
-          <a:p>
-            <a:pPr marL="0" indent="0">
-              <a:buNone/>
-            </a:pPr>
-            <a:r>
-              <a:rPr lang="en-US" sz="1400" dirty="0">
-                <a:solidFill>
-                  <a:srgbClr val="C5D8EE"/>
-                </a:solidFill>
-                <a:latin typeface="Calibri" pitchFamily="34" charset="0"/>
-                <a:ea typeface="Calibri" pitchFamily="34" charset="-122"/>
-                <a:cs typeface="Calibri" pitchFamily="34" charset="-120"/>
-              </a:rPr>
-              <a:t>Test-Isolation durch Serial-Execution und Cookie-Seeding sichergestellt</a:t>
-            </a:r>
-            <a:endParaRPr lang="en-US" sz="1400" dirty="0"/>
-          </a:p>
-        </p:txBody>
-      </p:sp>
-      <p:sp>
-        <p:nvSpPr>
-          <p:cNvPr id="19" name="Text 17"/>
-          <p:cNvSpPr/>
-          <p:nvPr/>
-        </p:nvSpPr>
-        <p:spPr>
-          <a:xfrm>
-            <a:off x="457200" y="4434840"/>
-            <a:ext cx="7772400" cy="365760"/>
-          </a:xfrm>
-          <a:prstGeom prst="rect">
-            <a:avLst/>
-          </a:prstGeom>
-          <a:noFill/>
-          <a:ln/>
-        </p:spPr>
-        <p:txBody>
-          <a:bodyPr wrap="square" lIns="0" tIns="0" rIns="0" bIns="0" rtlCol="0" anchor="ctr"/>
-          <a:lstStyle/>
-          <a:p>
-            <a:pPr marL="0" indent="0">
-              <a:buNone/>
-            </a:pPr>
-            <a:r>
-              <a:rPr lang="en-US" sz="1000" i="1" dirty="0">
-                <a:solidFill>
-                  <a:srgbClr val="8BAFD4"/>
-                </a:solidFill>
-                <a:latin typeface="Calibri" pitchFamily="34" charset="0"/>
-                <a:ea typeface="Calibri" pitchFamily="34" charset="-122"/>
-                <a:cs typeface="Calibri" pitchFamily="34" charset="-120"/>
-              </a:rPr>
-              <a:t>KI-Werkzeuge: GitHub Copilot (Ideen &amp; Playwright-Konfiguration), Claude (Dokumentation &amp; Präsentation)</a:t>
-            </a:r>
-            <a:endParaRPr lang="en-US" sz="1000" dirty="0"/>
-          </a:p>
-        </p:txBody>
-      </p:sp>
-      <p:sp>
-        <p:nvSpPr>
-          <p:cNvPr id="21" name="Text 19"/>
-          <p:cNvSpPr/>
-          <p:nvPr/>
-        </p:nvSpPr>
-        <p:spPr>
-          <a:xfrm>
-            <a:off x="6217920" y="1371600"/>
-            <a:ext cx="2651760" cy="2560320"/>
-          </a:xfrm>
-          <a:prstGeom prst="rect">
-            <a:avLst/>
-          </a:prstGeom>
-          <a:noFill/>
-          <a:ln/>
-        </p:spPr>
-        <p:txBody>
-          <a:bodyPr wrap="square" lIns="0" tIns="0" rIns="0" bIns="0" rtlCol="0" anchor="ctr"/>
-          <a:lstStyle/>
-          <a:p>
-            <a:pPr marL="0" indent="0" algn="ctr">
-              <a:buNone/>
-            </a:pPr>
-            <a:r>
-              <a:rPr lang="en-US" sz="3600" b="1" dirty="0">
-                <a:solidFill>
-                  <a:srgbClr val="E63946"/>
-                </a:solidFill>
-                <a:latin typeface="Trebuchet MS" pitchFamily="34" charset="0"/>
-                <a:ea typeface="Trebuchet MS" pitchFamily="34" charset="-122"/>
-                <a:cs typeface="Trebuchet MS" pitchFamily="34" charset="-120"/>
-              </a:rPr>
-              <a:t>Fragen?</a:t>
-            </a:r>
-            <a:endParaRPr lang="en-US" sz="3600" dirty="0"/>
           </a:p>
         </p:txBody>
       </p:sp>
@@ -3985,7 +2777,7 @@
                 <a:ea typeface="Calibri" pitchFamily="34" charset="-122"/>
                 <a:cs typeface="Calibri" pitchFamily="34" charset="-120"/>
               </a:rPr>
-              <a:t>10×</a:t>
+              <a:t>40×</a:t>
             </a:r>
             <a:endParaRPr lang="en-US" sz="1500" dirty="0"/>
           </a:p>
@@ -4429,706 +3221,6 @@
 </file>
 
 <file path=ppt/slides/slide4.xml><?xml version="1.0" encoding="utf-8"?>
-<p:sld xmlns:a="http://schemas.openxmlformats.org/drawingml/2006/main" xmlns:r="http://schemas.openxmlformats.org/officeDocument/2006/relationships" xmlns:p="http://schemas.openxmlformats.org/presentationml/2006/main">
-  <p:cSld name="Slide 4">
-    <p:bg>
-      <p:bgPr>
-        <a:solidFill>
-          <a:srgbClr val="F8FAFC"/>
-        </a:solidFill>
-        <a:effectLst/>
-      </p:bgPr>
-    </p:bg>
-    <p:spTree>
-      <p:nvGrpSpPr>
-        <p:cNvPr id="1" name=""/>
-        <p:cNvGrpSpPr/>
-        <p:nvPr/>
-      </p:nvGrpSpPr>
-      <p:grpSpPr>
-        <a:xfrm>
-          <a:off x="0" y="0"/>
-          <a:ext cx="0" cy="0"/>
-          <a:chOff x="0" y="0"/>
-          <a:chExt cx="0" cy="0"/>
-        </a:xfrm>
-      </p:grpSpPr>
-      <p:sp>
-        <p:nvSpPr>
-          <p:cNvPr id="2" name="Text 0"/>
-          <p:cNvSpPr/>
-          <p:nvPr/>
-        </p:nvSpPr>
-        <p:spPr>
-          <a:xfrm>
-            <a:off x="457200" y="256032"/>
-            <a:ext cx="8229600" cy="548640"/>
-          </a:xfrm>
-          <a:prstGeom prst="rect">
-            <a:avLst/>
-          </a:prstGeom>
-          <a:noFill/>
-          <a:ln/>
-        </p:spPr>
-        <p:txBody>
-          <a:bodyPr wrap="square" lIns="0" tIns="0" rIns="0" bIns="0" rtlCol="0" anchor="ctr"/>
-          <a:lstStyle/>
-          <a:p>
-            <a:pPr marL="0" indent="0">
-              <a:buNone/>
-            </a:pPr>
-            <a:r>
-              <a:rPr lang="en-US" sz="3000" b="1" dirty="0">
-                <a:solidFill>
-                  <a:srgbClr val="1D3557"/>
-                </a:solidFill>
-                <a:latin typeface="Trebuchet MS" pitchFamily="34" charset="0"/>
-                <a:ea typeface="Trebuchet MS" pitchFamily="34" charset="-122"/>
-                <a:cs typeface="Trebuchet MS" pitchFamily="34" charset="-120"/>
-              </a:rPr>
-              <a:t>Test Setup &amp; Isolation</a:t>
-            </a:r>
-            <a:endParaRPr lang="en-US" sz="3000" dirty="0"/>
-          </a:p>
-        </p:txBody>
-      </p:sp>
-      <p:sp>
-        <p:nvSpPr>
-          <p:cNvPr id="3" name="Shape 1"/>
-          <p:cNvSpPr/>
-          <p:nvPr/>
-        </p:nvSpPr>
-        <p:spPr>
-          <a:xfrm>
-            <a:off x="457200" y="822960"/>
-            <a:ext cx="1097280" cy="45720"/>
-          </a:xfrm>
-          <a:prstGeom prst="rect">
-            <a:avLst/>
-          </a:prstGeom>
-          <a:solidFill>
-            <a:srgbClr val="E63946"/>
-          </a:solidFill>
-          <a:ln w="12700">
-            <a:solidFill>
-              <a:srgbClr val="E63946"/>
-            </a:solidFill>
-            <a:prstDash val="solid"/>
-          </a:ln>
-        </p:spPr>
-        <p:txBody>
-          <a:bodyPr/>
-          <a:lstStyle/>
-          <a:p>
-            <a:endParaRPr lang="de-AT"/>
-          </a:p>
-        </p:txBody>
-      </p:sp>
-      <p:sp>
-        <p:nvSpPr>
-          <p:cNvPr id="4" name="Shape 2"/>
-          <p:cNvSpPr/>
-          <p:nvPr/>
-        </p:nvSpPr>
-        <p:spPr>
-          <a:xfrm>
-            <a:off x="365760" y="1005840"/>
-            <a:ext cx="4114800" cy="1645920"/>
-          </a:xfrm>
-          <a:prstGeom prst="rect">
-            <a:avLst/>
-          </a:prstGeom>
-          <a:solidFill>
-            <a:srgbClr val="FFFFFF"/>
-          </a:solidFill>
-          <a:ln w="6350">
-            <a:solidFill>
-              <a:srgbClr val="E2EAF4"/>
-            </a:solidFill>
-            <a:prstDash val="solid"/>
-          </a:ln>
-          <a:effectLst>
-            <a:outerShdw blurRad="101600" dist="38100" dir="8100000" algn="bl" rotWithShape="0">
-              <a:srgbClr val="000000">
-                <a:alpha val="12000"/>
-              </a:srgbClr>
-            </a:outerShdw>
-          </a:effectLst>
-        </p:spPr>
-        <p:txBody>
-          <a:bodyPr/>
-          <a:lstStyle/>
-          <a:p>
-            <a:endParaRPr lang="de-AT"/>
-          </a:p>
-        </p:txBody>
-      </p:sp>
-      <p:sp>
-        <p:nvSpPr>
-          <p:cNvPr id="5" name="Shape 3"/>
-          <p:cNvSpPr/>
-          <p:nvPr/>
-        </p:nvSpPr>
-        <p:spPr>
-          <a:xfrm>
-            <a:off x="365760" y="1005840"/>
-            <a:ext cx="64008" cy="1645920"/>
-          </a:xfrm>
-          <a:prstGeom prst="rect">
-            <a:avLst/>
-          </a:prstGeom>
-          <a:solidFill>
-            <a:srgbClr val="E63946"/>
-          </a:solidFill>
-          <a:ln w="12700">
-            <a:solidFill>
-              <a:srgbClr val="E63946"/>
-            </a:solidFill>
-            <a:prstDash val="solid"/>
-          </a:ln>
-        </p:spPr>
-        <p:txBody>
-          <a:bodyPr/>
-          <a:lstStyle/>
-          <a:p>
-            <a:endParaRPr lang="de-AT"/>
-          </a:p>
-        </p:txBody>
-      </p:sp>
-      <p:sp>
-        <p:nvSpPr>
-          <p:cNvPr id="6" name="Text 4"/>
-          <p:cNvSpPr/>
-          <p:nvPr/>
-        </p:nvSpPr>
-        <p:spPr>
-          <a:xfrm>
-            <a:off x="530352" y="1115568"/>
-            <a:ext cx="3886200" cy="365760"/>
-          </a:xfrm>
-          <a:prstGeom prst="rect">
-            <a:avLst/>
-          </a:prstGeom>
-          <a:noFill/>
-          <a:ln/>
-        </p:spPr>
-        <p:txBody>
-          <a:bodyPr wrap="square" lIns="0" tIns="0" rIns="0" bIns="0" rtlCol="0" anchor="ctr"/>
-          <a:lstStyle/>
-          <a:p>
-            <a:pPr marL="0" indent="0">
-              <a:buNone/>
-            </a:pPr>
-            <a:r>
-              <a:rPr lang="en-US" sz="1400" b="1" dirty="0">
-                <a:solidFill>
-                  <a:srgbClr val="1D3557"/>
-                </a:solidFill>
-                <a:latin typeface="Trebuchet MS" pitchFamily="34" charset="0"/>
-                <a:ea typeface="Trebuchet MS" pitchFamily="34" charset="-122"/>
-                <a:cs typeface="Trebuchet MS" pitchFamily="34" charset="-120"/>
-              </a:rPr>
-              <a:t>Test Ausführung</a:t>
-            </a:r>
-            <a:endParaRPr lang="en-US" sz="1400" dirty="0"/>
-          </a:p>
-        </p:txBody>
-      </p:sp>
-      <p:sp>
-        <p:nvSpPr>
-          <p:cNvPr id="7" name="Text 5"/>
-          <p:cNvSpPr/>
-          <p:nvPr/>
-        </p:nvSpPr>
-        <p:spPr>
-          <a:xfrm>
-            <a:off x="530352" y="1527048"/>
-            <a:ext cx="3858768" cy="1005840"/>
-          </a:xfrm>
-          <a:prstGeom prst="rect">
-            <a:avLst/>
-          </a:prstGeom>
-          <a:noFill/>
-          <a:ln/>
-        </p:spPr>
-        <p:txBody>
-          <a:bodyPr wrap="square" lIns="0" tIns="0" rIns="0" bIns="0" rtlCol="0" anchor="ctr"/>
-          <a:lstStyle/>
-          <a:p>
-            <a:pPr marL="0" indent="0">
-              <a:buNone/>
-            </a:pPr>
-            <a:r>
-              <a:rPr lang="en-US" sz="1150" dirty="0">
-                <a:solidFill>
-                  <a:srgbClr val="1D3557"/>
-                </a:solidFill>
-                <a:latin typeface="Calibri" pitchFamily="34" charset="0"/>
-                <a:ea typeface="Calibri" pitchFamily="34" charset="-122"/>
-                <a:cs typeface="Calibri" pitchFamily="34" charset="-120"/>
-              </a:rPr>
-              <a:t>npx playwright test — führt alle Unit-, Integration- und E2E-Tests aus. npm run test:product-search:k6 startet den Load Test gegen eine laufende Instanz.</a:t>
-            </a:r>
-            <a:endParaRPr lang="en-US" sz="1150" dirty="0"/>
-          </a:p>
-        </p:txBody>
-      </p:sp>
-      <p:sp>
-        <p:nvSpPr>
-          <p:cNvPr id="8" name="Shape 6"/>
-          <p:cNvSpPr/>
-          <p:nvPr/>
-        </p:nvSpPr>
-        <p:spPr>
-          <a:xfrm>
-            <a:off x="4663440" y="1005840"/>
-            <a:ext cx="4114800" cy="1645920"/>
-          </a:xfrm>
-          <a:prstGeom prst="rect">
-            <a:avLst/>
-          </a:prstGeom>
-          <a:solidFill>
-            <a:srgbClr val="FFFFFF"/>
-          </a:solidFill>
-          <a:ln w="6350">
-            <a:solidFill>
-              <a:srgbClr val="E2EAF4"/>
-            </a:solidFill>
-            <a:prstDash val="solid"/>
-          </a:ln>
-          <a:effectLst>
-            <a:outerShdw blurRad="101600" dist="38100" dir="8100000" algn="bl" rotWithShape="0">
-              <a:srgbClr val="000000">
-                <a:alpha val="12000"/>
-              </a:srgbClr>
-            </a:outerShdw>
-          </a:effectLst>
-        </p:spPr>
-        <p:txBody>
-          <a:bodyPr/>
-          <a:lstStyle/>
-          <a:p>
-            <a:endParaRPr lang="de-AT"/>
-          </a:p>
-        </p:txBody>
-      </p:sp>
-      <p:sp>
-        <p:nvSpPr>
-          <p:cNvPr id="9" name="Shape 7"/>
-          <p:cNvSpPr/>
-          <p:nvPr/>
-        </p:nvSpPr>
-        <p:spPr>
-          <a:xfrm>
-            <a:off x="4663440" y="1005840"/>
-            <a:ext cx="64008" cy="1645920"/>
-          </a:xfrm>
-          <a:prstGeom prst="rect">
-            <a:avLst/>
-          </a:prstGeom>
-          <a:solidFill>
-            <a:srgbClr val="E63946"/>
-          </a:solidFill>
-          <a:ln w="12700">
-            <a:solidFill>
-              <a:srgbClr val="E63946"/>
-            </a:solidFill>
-            <a:prstDash val="solid"/>
-          </a:ln>
-        </p:spPr>
-        <p:txBody>
-          <a:bodyPr/>
-          <a:lstStyle/>
-          <a:p>
-            <a:endParaRPr lang="de-AT"/>
-          </a:p>
-        </p:txBody>
-      </p:sp>
-      <p:sp>
-        <p:nvSpPr>
-          <p:cNvPr id="10" name="Text 8"/>
-          <p:cNvSpPr/>
-          <p:nvPr/>
-        </p:nvSpPr>
-        <p:spPr>
-          <a:xfrm>
-            <a:off x="4828032" y="1115568"/>
-            <a:ext cx="3886200" cy="365760"/>
-          </a:xfrm>
-          <a:prstGeom prst="rect">
-            <a:avLst/>
-          </a:prstGeom>
-          <a:noFill/>
-          <a:ln/>
-        </p:spPr>
-        <p:txBody>
-          <a:bodyPr wrap="square" lIns="0" tIns="0" rIns="0" bIns="0" rtlCol="0" anchor="ctr"/>
-          <a:lstStyle/>
-          <a:p>
-            <a:pPr marL="0" indent="0">
-              <a:buNone/>
-            </a:pPr>
-            <a:r>
-              <a:rPr lang="en-US" sz="1400" b="1" dirty="0">
-                <a:solidFill>
-                  <a:srgbClr val="1D3557"/>
-                </a:solidFill>
-                <a:latin typeface="Trebuchet MS" pitchFamily="34" charset="0"/>
-                <a:ea typeface="Trebuchet MS" pitchFamily="34" charset="-122"/>
-                <a:cs typeface="Trebuchet MS" pitchFamily="34" charset="-120"/>
-              </a:rPr>
-              <a:t>Test Isolation</a:t>
-            </a:r>
-            <a:endParaRPr lang="en-US" sz="1400" dirty="0"/>
-          </a:p>
-        </p:txBody>
-      </p:sp>
-      <p:sp>
-        <p:nvSpPr>
-          <p:cNvPr id="11" name="Text 9"/>
-          <p:cNvSpPr/>
-          <p:nvPr/>
-        </p:nvSpPr>
-        <p:spPr>
-          <a:xfrm>
-            <a:off x="4828032" y="1527048"/>
-            <a:ext cx="3858768" cy="1005840"/>
-          </a:xfrm>
-          <a:prstGeom prst="rect">
-            <a:avLst/>
-          </a:prstGeom>
-          <a:noFill/>
-          <a:ln/>
-        </p:spPr>
-        <p:txBody>
-          <a:bodyPr wrap="square" lIns="0" tIns="0" rIns="0" bIns="0" rtlCol="0" anchor="ctr"/>
-          <a:lstStyle/>
-          <a:p>
-            <a:pPr marL="0" indent="0">
-              <a:buNone/>
-            </a:pPr>
-            <a:r>
-              <a:rPr lang="en-US" sz="1150" dirty="0">
-                <a:solidFill>
-                  <a:srgbClr val="1D3557"/>
-                </a:solidFill>
-                <a:latin typeface="Calibri" pitchFamily="34" charset="0"/>
-                <a:ea typeface="Calibri" pitchFamily="34" charset="-122"/>
-                <a:cs typeface="Calibri" pitchFamily="34" charset="-120"/>
-              </a:rPr>
-              <a:t>Jeder Test verwendet eigene Credentials (jim@juice-sh.op). Basket-Tests laufen serial (test.describe.serial), um Race Conditions zu vermeiden. UI-Tests setzen Cookies vor Navigation.</a:t>
-            </a:r>
-            <a:endParaRPr lang="en-US" sz="1150" dirty="0"/>
-          </a:p>
-        </p:txBody>
-      </p:sp>
-      <p:sp>
-        <p:nvSpPr>
-          <p:cNvPr id="12" name="Shape 10"/>
-          <p:cNvSpPr/>
-          <p:nvPr/>
-        </p:nvSpPr>
-        <p:spPr>
-          <a:xfrm>
-            <a:off x="365760" y="2834640"/>
-            <a:ext cx="4114800" cy="1645920"/>
-          </a:xfrm>
-          <a:prstGeom prst="rect">
-            <a:avLst/>
-          </a:prstGeom>
-          <a:solidFill>
-            <a:srgbClr val="FFFFFF"/>
-          </a:solidFill>
-          <a:ln w="6350">
-            <a:solidFill>
-              <a:srgbClr val="E2EAF4"/>
-            </a:solidFill>
-            <a:prstDash val="solid"/>
-          </a:ln>
-          <a:effectLst>
-            <a:outerShdw blurRad="101600" dist="38100" dir="8100000" algn="bl" rotWithShape="0">
-              <a:srgbClr val="000000">
-                <a:alpha val="12000"/>
-              </a:srgbClr>
-            </a:outerShdw>
-          </a:effectLst>
-        </p:spPr>
-        <p:txBody>
-          <a:bodyPr/>
-          <a:lstStyle/>
-          <a:p>
-            <a:endParaRPr lang="de-AT"/>
-          </a:p>
-        </p:txBody>
-      </p:sp>
-      <p:sp>
-        <p:nvSpPr>
-          <p:cNvPr id="13" name="Shape 11"/>
-          <p:cNvSpPr/>
-          <p:nvPr/>
-        </p:nvSpPr>
-        <p:spPr>
-          <a:xfrm>
-            <a:off x="365760" y="2834640"/>
-            <a:ext cx="64008" cy="1645920"/>
-          </a:xfrm>
-          <a:prstGeom prst="rect">
-            <a:avLst/>
-          </a:prstGeom>
-          <a:solidFill>
-            <a:srgbClr val="E63946"/>
-          </a:solidFill>
-          <a:ln w="12700">
-            <a:solidFill>
-              <a:srgbClr val="E63946"/>
-            </a:solidFill>
-            <a:prstDash val="solid"/>
-          </a:ln>
-        </p:spPr>
-        <p:txBody>
-          <a:bodyPr/>
-          <a:lstStyle/>
-          <a:p>
-            <a:endParaRPr lang="de-AT"/>
-          </a:p>
-        </p:txBody>
-      </p:sp>
-      <p:sp>
-        <p:nvSpPr>
-          <p:cNvPr id="14" name="Text 12"/>
-          <p:cNvSpPr/>
-          <p:nvPr/>
-        </p:nvSpPr>
-        <p:spPr>
-          <a:xfrm>
-            <a:off x="530352" y="2944368"/>
-            <a:ext cx="3886200" cy="365760"/>
-          </a:xfrm>
-          <a:prstGeom prst="rect">
-            <a:avLst/>
-          </a:prstGeom>
-          <a:noFill/>
-          <a:ln/>
-        </p:spPr>
-        <p:txBody>
-          <a:bodyPr wrap="square" lIns="0" tIns="0" rIns="0" bIns="0" rtlCol="0" anchor="ctr"/>
-          <a:lstStyle/>
-          <a:p>
-            <a:pPr marL="0" indent="0">
-              <a:buNone/>
-            </a:pPr>
-            <a:r>
-              <a:rPr lang="en-US" sz="1400" b="1" dirty="0">
-                <a:solidFill>
-                  <a:srgbClr val="1D3557"/>
-                </a:solidFill>
-                <a:latin typeface="Trebuchet MS" pitchFamily="34" charset="0"/>
-                <a:ea typeface="Trebuchet MS" pitchFamily="34" charset="-122"/>
-                <a:cs typeface="Trebuchet MS" pitchFamily="34" charset="-120"/>
-              </a:rPr>
-              <a:t>CI/CD Pipeline</a:t>
-            </a:r>
-            <a:endParaRPr lang="en-US" sz="1400" dirty="0"/>
-          </a:p>
-        </p:txBody>
-      </p:sp>
-      <p:sp>
-        <p:nvSpPr>
-          <p:cNvPr id="15" name="Text 13"/>
-          <p:cNvSpPr/>
-          <p:nvPr/>
-        </p:nvSpPr>
-        <p:spPr>
-          <a:xfrm>
-            <a:off x="530352" y="3355848"/>
-            <a:ext cx="3858768" cy="1005840"/>
-          </a:xfrm>
-          <a:prstGeom prst="rect">
-            <a:avLst/>
-          </a:prstGeom>
-          <a:noFill/>
-          <a:ln/>
-        </p:spPr>
-        <p:txBody>
-          <a:bodyPr wrap="square" lIns="0" tIns="0" rIns="0" bIns="0" rtlCol="0" anchor="ctr"/>
-          <a:lstStyle/>
-          <a:p>
-            <a:pPr marL="0" indent="0">
-              <a:buNone/>
-            </a:pPr>
-            <a:r>
-              <a:rPr lang="en-US" sz="1150" dirty="0">
-                <a:solidFill>
-                  <a:srgbClr val="1D3557"/>
-                </a:solidFill>
-                <a:latin typeface="Calibri" pitchFamily="34" charset="0"/>
-                <a:ea typeface="Calibri" pitchFamily="34" charset="-122"/>
-                <a:cs typeface="Calibri" pitchFamily="34" charset="-120"/>
-              </a:rPr>
-              <a:t>GitHub Actions (.github/workflows/playwright.yml) — trigger on push/PR to main. Installiert Dependencies, Playwright-Browser, führt Tests aus, lädt Reports als Artifacts hoch.</a:t>
-            </a:r>
-            <a:endParaRPr lang="en-US" sz="1150" dirty="0"/>
-          </a:p>
-        </p:txBody>
-      </p:sp>
-      <p:sp>
-        <p:nvSpPr>
-          <p:cNvPr id="16" name="Shape 14"/>
-          <p:cNvSpPr/>
-          <p:nvPr/>
-        </p:nvSpPr>
-        <p:spPr>
-          <a:xfrm>
-            <a:off x="4663440" y="2834640"/>
-            <a:ext cx="4114800" cy="1645920"/>
-          </a:xfrm>
-          <a:prstGeom prst="rect">
-            <a:avLst/>
-          </a:prstGeom>
-          <a:solidFill>
-            <a:srgbClr val="FFFFFF"/>
-          </a:solidFill>
-          <a:ln w="6350">
-            <a:solidFill>
-              <a:srgbClr val="E2EAF4"/>
-            </a:solidFill>
-            <a:prstDash val="solid"/>
-          </a:ln>
-          <a:effectLst>
-            <a:outerShdw blurRad="101600" dist="38100" dir="8100000" algn="bl" rotWithShape="0">
-              <a:srgbClr val="000000">
-                <a:alpha val="12000"/>
-              </a:srgbClr>
-            </a:outerShdw>
-          </a:effectLst>
-        </p:spPr>
-        <p:txBody>
-          <a:bodyPr/>
-          <a:lstStyle/>
-          <a:p>
-            <a:endParaRPr lang="de-AT"/>
-          </a:p>
-        </p:txBody>
-      </p:sp>
-      <p:sp>
-        <p:nvSpPr>
-          <p:cNvPr id="17" name="Shape 15"/>
-          <p:cNvSpPr/>
-          <p:nvPr/>
-        </p:nvSpPr>
-        <p:spPr>
-          <a:xfrm>
-            <a:off x="4663440" y="2834640"/>
-            <a:ext cx="64008" cy="1645920"/>
-          </a:xfrm>
-          <a:prstGeom prst="rect">
-            <a:avLst/>
-          </a:prstGeom>
-          <a:solidFill>
-            <a:srgbClr val="E63946"/>
-          </a:solidFill>
-          <a:ln w="12700">
-            <a:solidFill>
-              <a:srgbClr val="E63946"/>
-            </a:solidFill>
-            <a:prstDash val="solid"/>
-          </a:ln>
-        </p:spPr>
-        <p:txBody>
-          <a:bodyPr/>
-          <a:lstStyle/>
-          <a:p>
-            <a:endParaRPr lang="de-AT"/>
-          </a:p>
-        </p:txBody>
-      </p:sp>
-      <p:sp>
-        <p:nvSpPr>
-          <p:cNvPr id="18" name="Text 16"/>
-          <p:cNvSpPr/>
-          <p:nvPr/>
-        </p:nvSpPr>
-        <p:spPr>
-          <a:xfrm>
-            <a:off x="4828032" y="2944368"/>
-            <a:ext cx="3886200" cy="365760"/>
-          </a:xfrm>
-          <a:prstGeom prst="rect">
-            <a:avLst/>
-          </a:prstGeom>
-          <a:noFill/>
-          <a:ln/>
-        </p:spPr>
-        <p:txBody>
-          <a:bodyPr wrap="square" lIns="0" tIns="0" rIns="0" bIns="0" rtlCol="0" anchor="ctr"/>
-          <a:lstStyle/>
-          <a:p>
-            <a:pPr marL="0" indent="0">
-              <a:buNone/>
-            </a:pPr>
-            <a:r>
-              <a:rPr lang="en-US" sz="1400" b="1" dirty="0">
-                <a:solidFill>
-                  <a:srgbClr val="1D3557"/>
-                </a:solidFill>
-                <a:latin typeface="Trebuchet MS" pitchFamily="34" charset="0"/>
-                <a:ea typeface="Trebuchet MS" pitchFamily="34" charset="-122"/>
-                <a:cs typeface="Trebuchet MS" pitchFamily="34" charset="-120"/>
-              </a:rPr>
-              <a:t>Test Konfiguration</a:t>
-            </a:r>
-            <a:endParaRPr lang="en-US" sz="1400" dirty="0"/>
-          </a:p>
-        </p:txBody>
-      </p:sp>
-      <p:sp>
-        <p:nvSpPr>
-          <p:cNvPr id="19" name="Text 17"/>
-          <p:cNvSpPr/>
-          <p:nvPr/>
-        </p:nvSpPr>
-        <p:spPr>
-          <a:xfrm>
-            <a:off x="4828032" y="3355848"/>
-            <a:ext cx="3858768" cy="1005840"/>
-          </a:xfrm>
-          <a:prstGeom prst="rect">
-            <a:avLst/>
-          </a:prstGeom>
-          <a:noFill/>
-          <a:ln/>
-        </p:spPr>
-        <p:txBody>
-          <a:bodyPr wrap="square" lIns="0" tIns="0" rIns="0" bIns="0" rtlCol="0" anchor="ctr"/>
-          <a:lstStyle/>
-          <a:p>
-            <a:pPr marL="0" indent="0">
-              <a:buNone/>
-            </a:pPr>
-            <a:r>
-              <a:rPr lang="en-US" sz="1150" dirty="0">
-                <a:solidFill>
-                  <a:srgbClr val="1D3557"/>
-                </a:solidFill>
-                <a:latin typeface="Calibri" pitchFamily="34" charset="0"/>
-                <a:ea typeface="Calibri" pitchFamily="34" charset="-122"/>
-                <a:cs typeface="Calibri" pitchFamily="34" charset="-120"/>
-              </a:rPr>
-              <a:t>playwright.config.ts definiert baseURL (http://localhost:3000). Umgebungsvariable PLAYWRIGHT_BASE_URL überschreibbar für CI. k6 nutzt BASE_URL Environment-Variable.</a:t>
-            </a:r>
-            <a:endParaRPr lang="en-US" sz="1150" dirty="0"/>
-          </a:p>
-        </p:txBody>
-      </p:sp>
-    </p:spTree>
-  </p:cSld>
-  <p:clrMapOvr>
-    <a:masterClrMapping/>
-  </p:clrMapOvr>
-</p:sld>
-</file>
-
-<file path=ppt/slides/slide5.xml><?xml version="1.0" encoding="utf-8"?>
 <p:sld xmlns:a="http://schemas.openxmlformats.org/drawingml/2006/main" xmlns:r="http://schemas.openxmlformats.org/officeDocument/2006/relationships" xmlns:p="http://schemas.openxmlformats.org/presentationml/2006/main">
   <p:cSld name="Slide 5">
     <p:bg>
@@ -5186,7 +3278,7 @@
                 <a:ea typeface="Trebuchet MS" pitchFamily="34" charset="-122"/>
                 <a:cs typeface="Trebuchet MS" pitchFamily="34" charset="-120"/>
               </a:rPr>
-              <a:t>Unit Tests (5×) — lib/insecurity</a:t>
+              <a:t>Unit Tests (40×) — zwei Dateien</a:t>
             </a:r>
             <a:endParaRPr lang="en-US" sz="3000" dirty="0"/>
           </a:p>
@@ -5232,8 +3324,8 @@
         </p:nvSpPr>
         <p:spPr>
           <a:xfrm>
-            <a:off x="365760" y="1005840"/>
-            <a:ext cx="8412480" cy="640080"/>
+            <a:off x="365760" y="960120"/>
+            <a:ext cx="4160520" cy="4023360"/>
           </a:xfrm>
           <a:prstGeom prst="rect">
             <a:avLst/>
@@ -5265,53 +3357,14 @@
       </p:sp>
       <p:sp>
         <p:nvSpPr>
-          <p:cNvPr id="5" name="Text 3"/>
-          <p:cNvSpPr/>
-          <p:nvPr/>
-        </p:nvSpPr>
-        <p:spPr>
-          <a:xfrm>
-            <a:off x="548640" y="1078992"/>
-            <a:ext cx="8046720" cy="475488"/>
-          </a:xfrm>
-          <a:prstGeom prst="rect">
-            <a:avLst/>
-          </a:prstGeom>
-          <a:noFill/>
-          <a:ln/>
-        </p:spPr>
-        <p:txBody>
-          <a:bodyPr wrap="square" lIns="0" tIns="0" rIns="0" bIns="0" rtlCol="0" anchor="ctr"/>
-          <a:lstStyle/>
-          <a:p>
-            <a:pPr marL="0" indent="0">
-              <a:buNone/>
-            </a:pPr>
-            <a:r>
-              <a:rPr lang="en-US" sz="1200" dirty="0">
-                <a:solidFill>
-                  <a:srgbClr val="1D3557"/>
-                </a:solidFill>
-                <a:latin typeface="Calibri" pitchFamily="34" charset="0"/>
-                <a:ea typeface="Calibri" pitchFamily="34" charset="-122"/>
-                <a:cs typeface="Calibri" pitchFamily="34" charset="-120"/>
-              </a:rPr>
-              <a:t>Getestetes Modul: lib/insecurity.ts — Sicherheitshilfsfunktionen (Coupons, JWT, Sanitization). Framework: Playwright Test Runner (direkte TypeScript Imports, kein Browser nötig).</a:t>
-            </a:r>
-            <a:endParaRPr lang="en-US" sz="1200" dirty="0"/>
-          </a:p>
-        </p:txBody>
-      </p:sp>
-      <p:sp>
-        <p:nvSpPr>
-          <p:cNvPr id="6" name="Shape 4"/>
-          <p:cNvSpPr/>
-          <p:nvPr/>
-        </p:nvSpPr>
-        <p:spPr>
-          <a:xfrm>
-            <a:off x="365760" y="1828800"/>
-            <a:ext cx="457200" cy="475488"/>
+          <p:cNvPr id="5" name="Shape 3"/>
+          <p:cNvSpPr/>
+          <p:nvPr/>
+        </p:nvSpPr>
+        <p:spPr>
+          <a:xfrm>
+            <a:off x="365760" y="960120"/>
+            <a:ext cx="4160520" cy="411480"/>
           </a:xfrm>
           <a:prstGeom prst="rect">
             <a:avLst/>
@@ -5336,14 +3389,124 @@
       </p:sp>
       <p:sp>
         <p:nvSpPr>
+          <p:cNvPr id="6" name="Text 4"/>
+          <p:cNvSpPr/>
+          <p:nvPr/>
+        </p:nvSpPr>
+        <p:spPr>
+          <a:xfrm>
+            <a:off x="502920" y="960120"/>
+            <a:ext cx="3931920" cy="411480"/>
+          </a:xfrm>
+          <a:prstGeom prst="rect">
+            <a:avLst/>
+          </a:prstGeom>
+          <a:noFill/>
+          <a:ln/>
+        </p:spPr>
+        <p:txBody>
+          <a:bodyPr wrap="square" lIns="0" tIns="0" rIns="0" bIns="0" rtlCol="0" anchor="ctr"/>
+          <a:lstStyle/>
+          <a:p>
+            <a:pPr marL="0" indent="0">
+              <a:buNone/>
+            </a:pPr>
+            <a:r>
+              <a:rPr lang="en-US" sz="1200" b="1" dirty="0">
+                <a:solidFill>
+                  <a:srgbClr val="FFFFFF"/>
+                </a:solidFill>
+                <a:latin typeface="Calibri" pitchFamily="34" charset="0"/>
+                <a:ea typeface="Calibri" pitchFamily="34" charset="-122"/>
+                <a:cs typeface="Calibri" pitchFamily="34" charset="-120"/>
+              </a:rPr>
+              <a:t>security.spec.ts — 5 Tests</a:t>
+            </a:r>
+            <a:endParaRPr lang="en-US" sz="1200" dirty="0"/>
+          </a:p>
+        </p:txBody>
+      </p:sp>
+      <p:sp>
+        <p:nvSpPr>
           <p:cNvPr id="7" name="Text 5"/>
           <p:cNvSpPr/>
           <p:nvPr/>
         </p:nvSpPr>
         <p:spPr>
           <a:xfrm>
-            <a:off x="365760" y="1828800"/>
-            <a:ext cx="457200" cy="475488"/>
+            <a:off x="502920" y="1444752"/>
+            <a:ext cx="3840480" cy="274320"/>
+          </a:xfrm>
+          <a:prstGeom prst="rect">
+            <a:avLst/>
+          </a:prstGeom>
+          <a:noFill/>
+          <a:ln/>
+        </p:spPr>
+        <p:txBody>
+          <a:bodyPr wrap="square" lIns="0" tIns="0" rIns="0" bIns="0" rtlCol="0" anchor="ctr"/>
+          <a:lstStyle/>
+          <a:p>
+            <a:pPr marL="0" indent="0">
+              <a:buNone/>
+            </a:pPr>
+            <a:r>
+              <a:rPr lang="en-US" sz="1050" i="1" dirty="0">
+                <a:solidFill>
+                  <a:srgbClr val="5C7A9B"/>
+                </a:solidFill>
+                <a:latin typeface="Calibri" pitchFamily="34" charset="0"/>
+                <a:ea typeface="Calibri" pitchFamily="34" charset="-122"/>
+                <a:cs typeface="Calibri" pitchFamily="34" charset="-120"/>
+              </a:rPr>
+              <a:t>Modul: lib/insecurity.ts</a:t>
+            </a:r>
+            <a:endParaRPr lang="en-US" sz="1050" dirty="0"/>
+          </a:p>
+        </p:txBody>
+      </p:sp>
+      <p:sp>
+        <p:nvSpPr>
+          <p:cNvPr id="8" name="Shape 6"/>
+          <p:cNvSpPr/>
+          <p:nvPr/>
+        </p:nvSpPr>
+        <p:spPr>
+          <a:xfrm>
+            <a:off x="502920" y="1764792"/>
+            <a:ext cx="320040" cy="365760"/>
+          </a:xfrm>
+          <a:prstGeom prst="rect">
+            <a:avLst/>
+          </a:prstGeom>
+          <a:solidFill>
+            <a:srgbClr val="243560"/>
+          </a:solidFill>
+          <a:ln w="12700">
+            <a:solidFill>
+              <a:srgbClr val="243560"/>
+            </a:solidFill>
+            <a:prstDash val="solid"/>
+          </a:ln>
+        </p:spPr>
+        <p:txBody>
+          <a:bodyPr/>
+          <a:lstStyle/>
+          <a:p>
+            <a:endParaRPr lang="de-AT"/>
+          </a:p>
+        </p:txBody>
+      </p:sp>
+      <p:sp>
+        <p:nvSpPr>
+          <p:cNvPr id="9" name="Text 7"/>
+          <p:cNvSpPr/>
+          <p:nvPr/>
+        </p:nvSpPr>
+        <p:spPr>
+          <a:xfrm>
+            <a:off x="502920" y="1764792"/>
+            <a:ext cx="320040" cy="365760"/>
           </a:xfrm>
           <a:prstGeom prst="rect">
             <a:avLst/>
@@ -5359,7 +3522,7 @@
               <a:buNone/>
             </a:pPr>
             <a:r>
-              <a:rPr lang="en-US" sz="1300" b="1" dirty="0">
+              <a:rPr lang="en-US" sz="1100" b="1" dirty="0">
                 <a:solidFill>
                   <a:srgbClr val="FFFFFF"/>
                 </a:solidFill>
@@ -5367,22 +3530,501 @@
                 <a:ea typeface="Calibri" pitchFamily="34" charset="-122"/>
                 <a:cs typeface="Calibri" pitchFamily="34" charset="-120"/>
               </a:rPr>
-              <a:t>01</a:t>
-            </a:r>
-            <a:endParaRPr lang="en-US" sz="1300" dirty="0"/>
-          </a:p>
-        </p:txBody>
-      </p:sp>
-      <p:sp>
-        <p:nvSpPr>
-          <p:cNvPr id="8" name="Shape 6"/>
-          <p:cNvSpPr/>
-          <p:nvPr/>
-        </p:nvSpPr>
-        <p:spPr>
-          <a:xfrm>
-            <a:off x="914400" y="1828800"/>
-            <a:ext cx="7863840" cy="475488"/>
+              <a:t>1</a:t>
+            </a:r>
+            <a:endParaRPr lang="en-US" sz="1100" dirty="0"/>
+          </a:p>
+        </p:txBody>
+      </p:sp>
+      <p:sp>
+        <p:nvSpPr>
+          <p:cNvPr id="10" name="Text 8"/>
+          <p:cNvSpPr/>
+          <p:nvPr/>
+        </p:nvSpPr>
+        <p:spPr>
+          <a:xfrm>
+            <a:off x="896112" y="1792224"/>
+            <a:ext cx="3520440" cy="320040"/>
+          </a:xfrm>
+          <a:prstGeom prst="rect">
+            <a:avLst/>
+          </a:prstGeom>
+          <a:noFill/>
+          <a:ln/>
+        </p:spPr>
+        <p:txBody>
+          <a:bodyPr wrap="square" lIns="0" tIns="0" rIns="0" bIns="0" rtlCol="0" anchor="ctr"/>
+          <a:lstStyle/>
+          <a:p>
+            <a:pPr marL="0" indent="0">
+              <a:buNone/>
+            </a:pPr>
+            <a:r>
+              <a:rPr lang="en-US" sz="1150" dirty="0">
+                <a:solidFill>
+                  <a:srgbClr val="1D3557"/>
+                </a:solidFill>
+                <a:latin typeface="Calibri" pitchFamily="34" charset="0"/>
+                <a:ea typeface="Calibri" pitchFamily="34" charset="-122"/>
+                <a:cs typeface="Calibri" pitchFamily="34" charset="-120"/>
+              </a:rPr>
+              <a:t>Coupon Round-Trip (Encode/Decode)</a:t>
+            </a:r>
+            <a:endParaRPr lang="en-US" sz="1150" dirty="0"/>
+          </a:p>
+        </p:txBody>
+      </p:sp>
+      <p:sp>
+        <p:nvSpPr>
+          <p:cNvPr id="11" name="Shape 9"/>
+          <p:cNvSpPr/>
+          <p:nvPr/>
+        </p:nvSpPr>
+        <p:spPr>
+          <a:xfrm>
+            <a:off x="502920" y="2276856"/>
+            <a:ext cx="320040" cy="365760"/>
+          </a:xfrm>
+          <a:prstGeom prst="rect">
+            <a:avLst/>
+          </a:prstGeom>
+          <a:solidFill>
+            <a:srgbClr val="243560"/>
+          </a:solidFill>
+          <a:ln w="12700">
+            <a:solidFill>
+              <a:srgbClr val="243560"/>
+            </a:solidFill>
+            <a:prstDash val="solid"/>
+          </a:ln>
+        </p:spPr>
+        <p:txBody>
+          <a:bodyPr/>
+          <a:lstStyle/>
+          <a:p>
+            <a:endParaRPr lang="de-AT"/>
+          </a:p>
+        </p:txBody>
+      </p:sp>
+      <p:sp>
+        <p:nvSpPr>
+          <p:cNvPr id="12" name="Text 10"/>
+          <p:cNvSpPr/>
+          <p:nvPr/>
+        </p:nvSpPr>
+        <p:spPr>
+          <a:xfrm>
+            <a:off x="502920" y="2276856"/>
+            <a:ext cx="320040" cy="365760"/>
+          </a:xfrm>
+          <a:prstGeom prst="rect">
+            <a:avLst/>
+          </a:prstGeom>
+          <a:noFill/>
+          <a:ln/>
+        </p:spPr>
+        <p:txBody>
+          <a:bodyPr wrap="square" lIns="0" tIns="0" rIns="0" bIns="0" rtlCol="0" anchor="ctr"/>
+          <a:lstStyle/>
+          <a:p>
+            <a:pPr marL="0" indent="0" algn="ctr">
+              <a:buNone/>
+            </a:pPr>
+            <a:r>
+              <a:rPr lang="en-US" sz="1100" b="1" dirty="0">
+                <a:solidFill>
+                  <a:srgbClr val="FFFFFF"/>
+                </a:solidFill>
+                <a:latin typeface="Calibri" pitchFamily="34" charset="0"/>
+                <a:ea typeface="Calibri" pitchFamily="34" charset="-122"/>
+                <a:cs typeface="Calibri" pitchFamily="34" charset="-120"/>
+              </a:rPr>
+              <a:t>2</a:t>
+            </a:r>
+            <a:endParaRPr lang="en-US" sz="1100" dirty="0"/>
+          </a:p>
+        </p:txBody>
+      </p:sp>
+      <p:sp>
+        <p:nvSpPr>
+          <p:cNvPr id="13" name="Text 11"/>
+          <p:cNvSpPr/>
+          <p:nvPr/>
+        </p:nvSpPr>
+        <p:spPr>
+          <a:xfrm>
+            <a:off x="896112" y="2304288"/>
+            <a:ext cx="3520440" cy="320040"/>
+          </a:xfrm>
+          <a:prstGeom prst="rect">
+            <a:avLst/>
+          </a:prstGeom>
+          <a:noFill/>
+          <a:ln/>
+        </p:spPr>
+        <p:txBody>
+          <a:bodyPr wrap="square" lIns="0" tIns="0" rIns="0" bIns="0" rtlCol="0" anchor="ctr"/>
+          <a:lstStyle/>
+          <a:p>
+            <a:pPr marL="0" indent="0">
+              <a:buNone/>
+            </a:pPr>
+            <a:r>
+              <a:rPr lang="en-US" sz="1150" dirty="0">
+                <a:solidFill>
+                  <a:srgbClr val="1D3557"/>
+                </a:solidFill>
+                <a:latin typeface="Calibri" pitchFamily="34" charset="0"/>
+                <a:ea typeface="Calibri" pitchFamily="34" charset="-122"/>
+                <a:cs typeface="Calibri" pitchFamily="34" charset="-120"/>
+              </a:rPr>
+              <a:t>Abgelaufener Coupon → undefined</a:t>
+            </a:r>
+            <a:endParaRPr lang="en-US" sz="1150" dirty="0"/>
+          </a:p>
+        </p:txBody>
+      </p:sp>
+      <p:sp>
+        <p:nvSpPr>
+          <p:cNvPr id="14" name="Shape 12"/>
+          <p:cNvSpPr/>
+          <p:nvPr/>
+        </p:nvSpPr>
+        <p:spPr>
+          <a:xfrm>
+            <a:off x="502920" y="2788920"/>
+            <a:ext cx="320040" cy="365760"/>
+          </a:xfrm>
+          <a:prstGeom prst="rect">
+            <a:avLst/>
+          </a:prstGeom>
+          <a:solidFill>
+            <a:srgbClr val="243560"/>
+          </a:solidFill>
+          <a:ln w="12700">
+            <a:solidFill>
+              <a:srgbClr val="243560"/>
+            </a:solidFill>
+            <a:prstDash val="solid"/>
+          </a:ln>
+        </p:spPr>
+        <p:txBody>
+          <a:bodyPr/>
+          <a:lstStyle/>
+          <a:p>
+            <a:endParaRPr lang="de-AT"/>
+          </a:p>
+        </p:txBody>
+      </p:sp>
+      <p:sp>
+        <p:nvSpPr>
+          <p:cNvPr id="15" name="Text 13"/>
+          <p:cNvSpPr/>
+          <p:nvPr/>
+        </p:nvSpPr>
+        <p:spPr>
+          <a:xfrm>
+            <a:off x="502920" y="2788920"/>
+            <a:ext cx="320040" cy="365760"/>
+          </a:xfrm>
+          <a:prstGeom prst="rect">
+            <a:avLst/>
+          </a:prstGeom>
+          <a:noFill/>
+          <a:ln/>
+        </p:spPr>
+        <p:txBody>
+          <a:bodyPr wrap="square" lIns="0" tIns="0" rIns="0" bIns="0" rtlCol="0" anchor="ctr"/>
+          <a:lstStyle/>
+          <a:p>
+            <a:pPr marL="0" indent="0" algn="ctr">
+              <a:buNone/>
+            </a:pPr>
+            <a:r>
+              <a:rPr lang="en-US" sz="1100" b="1" dirty="0">
+                <a:solidFill>
+                  <a:srgbClr val="FFFFFF"/>
+                </a:solidFill>
+                <a:latin typeface="Calibri" pitchFamily="34" charset="0"/>
+                <a:ea typeface="Calibri" pitchFamily="34" charset="-122"/>
+                <a:cs typeface="Calibri" pitchFamily="34" charset="-120"/>
+              </a:rPr>
+              <a:t>3</a:t>
+            </a:r>
+            <a:endParaRPr lang="en-US" sz="1100" dirty="0"/>
+          </a:p>
+        </p:txBody>
+      </p:sp>
+      <p:sp>
+        <p:nvSpPr>
+          <p:cNvPr id="16" name="Text 14"/>
+          <p:cNvSpPr/>
+          <p:nvPr/>
+        </p:nvSpPr>
+        <p:spPr>
+          <a:xfrm>
+            <a:off x="896112" y="2816352"/>
+            <a:ext cx="3520440" cy="320040"/>
+          </a:xfrm>
+          <a:prstGeom prst="rect">
+            <a:avLst/>
+          </a:prstGeom>
+          <a:noFill/>
+          <a:ln/>
+        </p:spPr>
+        <p:txBody>
+          <a:bodyPr wrap="square" lIns="0" tIns="0" rIns="0" bIns="0" rtlCol="0" anchor="ctr"/>
+          <a:lstStyle/>
+          <a:p>
+            <a:pPr marL="0" indent="0">
+              <a:buNone/>
+            </a:pPr>
+            <a:r>
+              <a:rPr lang="en-US" sz="1150" dirty="0">
+                <a:solidFill>
+                  <a:srgbClr val="1D3557"/>
+                </a:solidFill>
+                <a:latin typeface="Calibri" pitchFamily="34" charset="0"/>
+                <a:ea typeface="Calibri" pitchFamily="34" charset="-122"/>
+                <a:cs typeface="Calibri" pitchFamily="34" charset="-120"/>
+              </a:rPr>
+              <a:t>JWT Signierung &amp; Verifikation</a:t>
+            </a:r>
+            <a:endParaRPr lang="en-US" sz="1150" dirty="0"/>
+          </a:p>
+        </p:txBody>
+      </p:sp>
+      <p:sp>
+        <p:nvSpPr>
+          <p:cNvPr id="17" name="Shape 15"/>
+          <p:cNvSpPr/>
+          <p:nvPr/>
+        </p:nvSpPr>
+        <p:spPr>
+          <a:xfrm>
+            <a:off x="502920" y="3300984"/>
+            <a:ext cx="320040" cy="365760"/>
+          </a:xfrm>
+          <a:prstGeom prst="rect">
+            <a:avLst/>
+          </a:prstGeom>
+          <a:solidFill>
+            <a:srgbClr val="243560"/>
+          </a:solidFill>
+          <a:ln w="12700">
+            <a:solidFill>
+              <a:srgbClr val="243560"/>
+            </a:solidFill>
+            <a:prstDash val="solid"/>
+          </a:ln>
+        </p:spPr>
+        <p:txBody>
+          <a:bodyPr/>
+          <a:lstStyle/>
+          <a:p>
+            <a:endParaRPr lang="de-AT"/>
+          </a:p>
+        </p:txBody>
+      </p:sp>
+      <p:sp>
+        <p:nvSpPr>
+          <p:cNvPr id="18" name="Text 16"/>
+          <p:cNvSpPr/>
+          <p:nvPr/>
+        </p:nvSpPr>
+        <p:spPr>
+          <a:xfrm>
+            <a:off x="502920" y="3300984"/>
+            <a:ext cx="320040" cy="365760"/>
+          </a:xfrm>
+          <a:prstGeom prst="rect">
+            <a:avLst/>
+          </a:prstGeom>
+          <a:noFill/>
+          <a:ln/>
+        </p:spPr>
+        <p:txBody>
+          <a:bodyPr wrap="square" lIns="0" tIns="0" rIns="0" bIns="0" rtlCol="0" anchor="ctr"/>
+          <a:lstStyle/>
+          <a:p>
+            <a:pPr marL="0" indent="0" algn="ctr">
+              <a:buNone/>
+            </a:pPr>
+            <a:r>
+              <a:rPr lang="en-US" sz="1100" b="1" dirty="0">
+                <a:solidFill>
+                  <a:srgbClr val="FFFFFF"/>
+                </a:solidFill>
+                <a:latin typeface="Calibri" pitchFamily="34" charset="0"/>
+                <a:ea typeface="Calibri" pitchFamily="34" charset="-122"/>
+                <a:cs typeface="Calibri" pitchFamily="34" charset="-120"/>
+              </a:rPr>
+              <a:t>4</a:t>
+            </a:r>
+            <a:endParaRPr lang="en-US" sz="1100" dirty="0"/>
+          </a:p>
+        </p:txBody>
+      </p:sp>
+      <p:sp>
+        <p:nvSpPr>
+          <p:cNvPr id="19" name="Text 17"/>
+          <p:cNvSpPr/>
+          <p:nvPr/>
+        </p:nvSpPr>
+        <p:spPr>
+          <a:xfrm>
+            <a:off x="896112" y="3328416"/>
+            <a:ext cx="3520440" cy="320040"/>
+          </a:xfrm>
+          <a:prstGeom prst="rect">
+            <a:avLst/>
+          </a:prstGeom>
+          <a:noFill/>
+          <a:ln/>
+        </p:spPr>
+        <p:txBody>
+          <a:bodyPr wrap="square" lIns="0" tIns="0" rIns="0" bIns="0" rtlCol="0" anchor="ctr"/>
+          <a:lstStyle/>
+          <a:p>
+            <a:pPr marL="0" indent="0">
+              <a:buNone/>
+            </a:pPr>
+            <a:r>
+              <a:rPr lang="en-US" sz="1150" dirty="0">
+                <a:solidFill>
+                  <a:srgbClr val="1D3557"/>
+                </a:solidFill>
+                <a:latin typeface="Calibri" pitchFamily="34" charset="0"/>
+                <a:ea typeface="Calibri" pitchFamily="34" charset="-122"/>
+                <a:cs typeface="Calibri" pitchFamily="34" charset="-120"/>
+              </a:rPr>
+              <a:t>Manipuliertes JWT → abgelehnt</a:t>
+            </a:r>
+            <a:endParaRPr lang="en-US" sz="1150" dirty="0"/>
+          </a:p>
+        </p:txBody>
+      </p:sp>
+      <p:sp>
+        <p:nvSpPr>
+          <p:cNvPr id="20" name="Shape 18"/>
+          <p:cNvSpPr/>
+          <p:nvPr/>
+        </p:nvSpPr>
+        <p:spPr>
+          <a:xfrm>
+            <a:off x="502920" y="3813048"/>
+            <a:ext cx="320040" cy="365760"/>
+          </a:xfrm>
+          <a:prstGeom prst="rect">
+            <a:avLst/>
+          </a:prstGeom>
+          <a:solidFill>
+            <a:srgbClr val="243560"/>
+          </a:solidFill>
+          <a:ln w="12700">
+            <a:solidFill>
+              <a:srgbClr val="243560"/>
+            </a:solidFill>
+            <a:prstDash val="solid"/>
+          </a:ln>
+        </p:spPr>
+        <p:txBody>
+          <a:bodyPr/>
+          <a:lstStyle/>
+          <a:p>
+            <a:endParaRPr lang="de-AT"/>
+          </a:p>
+        </p:txBody>
+      </p:sp>
+      <p:sp>
+        <p:nvSpPr>
+          <p:cNvPr id="21" name="Text 19"/>
+          <p:cNvSpPr/>
+          <p:nvPr/>
+        </p:nvSpPr>
+        <p:spPr>
+          <a:xfrm>
+            <a:off x="502920" y="3813048"/>
+            <a:ext cx="320040" cy="365760"/>
+          </a:xfrm>
+          <a:prstGeom prst="rect">
+            <a:avLst/>
+          </a:prstGeom>
+          <a:noFill/>
+          <a:ln/>
+        </p:spPr>
+        <p:txBody>
+          <a:bodyPr wrap="square" lIns="0" tIns="0" rIns="0" bIns="0" rtlCol="0" anchor="ctr"/>
+          <a:lstStyle/>
+          <a:p>
+            <a:pPr marL="0" indent="0" algn="ctr">
+              <a:buNone/>
+            </a:pPr>
+            <a:r>
+              <a:rPr lang="en-US" sz="1100" b="1" dirty="0">
+                <a:solidFill>
+                  <a:srgbClr val="FFFFFF"/>
+                </a:solidFill>
+                <a:latin typeface="Calibri" pitchFamily="34" charset="0"/>
+                <a:ea typeface="Calibri" pitchFamily="34" charset="-122"/>
+                <a:cs typeface="Calibri" pitchFamily="34" charset="-120"/>
+              </a:rPr>
+              <a:t>5</a:t>
+            </a:r>
+            <a:endParaRPr lang="en-US" sz="1100" dirty="0"/>
+          </a:p>
+        </p:txBody>
+      </p:sp>
+      <p:sp>
+        <p:nvSpPr>
+          <p:cNvPr id="22" name="Text 20"/>
+          <p:cNvSpPr/>
+          <p:nvPr/>
+        </p:nvSpPr>
+        <p:spPr>
+          <a:xfrm>
+            <a:off x="896112" y="3840480"/>
+            <a:ext cx="3520440" cy="320040"/>
+          </a:xfrm>
+          <a:prstGeom prst="rect">
+            <a:avLst/>
+          </a:prstGeom>
+          <a:noFill/>
+          <a:ln/>
+        </p:spPr>
+        <p:txBody>
+          <a:bodyPr wrap="square" lIns="0" tIns="0" rIns="0" bIns="0" rtlCol="0" anchor="ctr"/>
+          <a:lstStyle/>
+          <a:p>
+            <a:pPr marL="0" indent="0">
+              <a:buNone/>
+            </a:pPr>
+            <a:r>
+              <a:rPr lang="en-US" sz="1150" dirty="0">
+                <a:solidFill>
+                  <a:srgbClr val="1D3557"/>
+                </a:solidFill>
+                <a:latin typeface="Calibri" pitchFamily="34" charset="0"/>
+                <a:ea typeface="Calibri" pitchFamily="34" charset="-122"/>
+                <a:cs typeface="Calibri" pitchFamily="34" charset="-120"/>
+              </a:rPr>
+              <a:t>XSS Sanitization (Script-Tag)</a:t>
+            </a:r>
+            <a:endParaRPr lang="en-US" sz="1150" dirty="0"/>
+          </a:p>
+        </p:txBody>
+      </p:sp>
+      <p:sp>
+        <p:nvSpPr>
+          <p:cNvPr id="23" name="Shape 21"/>
+          <p:cNvSpPr/>
+          <p:nvPr/>
+        </p:nvSpPr>
+        <p:spPr>
+          <a:xfrm>
+            <a:off x="4709160" y="960120"/>
+            <a:ext cx="4069080" cy="4023360"/>
           </a:xfrm>
           <a:prstGeom prst="rect">
             <a:avLst/>
@@ -5392,10 +4034,17 @@
           </a:solidFill>
           <a:ln w="6350">
             <a:solidFill>
-              <a:srgbClr val="D0DFF0"/>
+              <a:srgbClr val="E2EAF4"/>
             </a:solidFill>
             <a:prstDash val="solid"/>
           </a:ln>
+          <a:effectLst>
+            <a:outerShdw blurRad="101600" dist="38100" dir="8100000" algn="bl" rotWithShape="0">
+              <a:srgbClr val="000000">
+                <a:alpha val="12000"/>
+              </a:srgbClr>
+            </a:outerShdw>
+          </a:effectLst>
         </p:spPr>
         <p:txBody>
           <a:bodyPr/>
@@ -5407,102 +4056,24 @@
       </p:sp>
       <p:sp>
         <p:nvSpPr>
-          <p:cNvPr id="9" name="Text 7"/>
-          <p:cNvSpPr/>
-          <p:nvPr/>
-        </p:nvSpPr>
-        <p:spPr>
-          <a:xfrm>
-            <a:off x="1005840" y="1865376"/>
-            <a:ext cx="2103120" cy="219456"/>
-          </a:xfrm>
-          <a:prstGeom prst="rect">
-            <a:avLst/>
-          </a:prstGeom>
-          <a:noFill/>
-          <a:ln/>
-        </p:spPr>
-        <p:txBody>
-          <a:bodyPr wrap="square" lIns="0" tIns="0" rIns="0" bIns="0" rtlCol="0" anchor="ctr"/>
-          <a:lstStyle/>
-          <a:p>
-            <a:pPr marL="0" indent="0">
-              <a:buNone/>
-            </a:pPr>
-            <a:r>
-              <a:rPr lang="en-US" sz="1200" b="1" dirty="0">
-                <a:solidFill>
-                  <a:srgbClr val="1D3557"/>
-                </a:solidFill>
-                <a:latin typeface="Calibri" pitchFamily="34" charset="0"/>
-                <a:ea typeface="Calibri" pitchFamily="34" charset="-122"/>
-                <a:cs typeface="Calibri" pitchFamily="34" charset="-120"/>
-              </a:rPr>
-              <a:t>Coupon Round-Trip</a:t>
-            </a:r>
-            <a:endParaRPr lang="en-US" sz="1200" dirty="0"/>
-          </a:p>
-        </p:txBody>
-      </p:sp>
-      <p:sp>
-        <p:nvSpPr>
-          <p:cNvPr id="10" name="Text 8"/>
-          <p:cNvSpPr/>
-          <p:nvPr/>
-        </p:nvSpPr>
-        <p:spPr>
-          <a:xfrm>
-            <a:off x="1005840" y="2075688"/>
-            <a:ext cx="7589520" cy="201168"/>
-          </a:xfrm>
-          <a:prstGeom prst="rect">
-            <a:avLst/>
-          </a:prstGeom>
-          <a:noFill/>
-          <a:ln/>
-        </p:spPr>
-        <p:txBody>
-          <a:bodyPr wrap="square" lIns="0" tIns="0" rIns="0" bIns="0" rtlCol="0" anchor="ctr"/>
-          <a:lstStyle/>
-          <a:p>
-            <a:pPr marL="0" indent="0">
-              <a:buNone/>
-            </a:pPr>
-            <a:r>
-              <a:rPr lang="en-US" sz="1050" i="1" dirty="0">
-                <a:solidFill>
-                  <a:srgbClr val="5C7A9B"/>
-                </a:solidFill>
-                <a:latin typeface="Calibri" pitchFamily="34" charset="0"/>
-                <a:ea typeface="Calibri" pitchFamily="34" charset="-122"/>
-                <a:cs typeface="Calibri" pitchFamily="34" charset="-120"/>
-              </a:rPr>
-              <a:t>Stellt sicher, dass ein generierter Coupon denselben Rabatt zurückliefert → korrekte Encode/Decode Logik.</a:t>
-            </a:r>
-            <a:endParaRPr lang="en-US" sz="1050" dirty="0"/>
-          </a:p>
-        </p:txBody>
-      </p:sp>
-      <p:sp>
-        <p:nvSpPr>
-          <p:cNvPr id="11" name="Shape 9"/>
-          <p:cNvSpPr/>
-          <p:nvPr/>
-        </p:nvSpPr>
-        <p:spPr>
-          <a:xfrm>
-            <a:off x="365760" y="2450592"/>
-            <a:ext cx="457200" cy="475488"/>
+          <p:cNvPr id="24" name="Shape 22"/>
+          <p:cNvSpPr/>
+          <p:nvPr/>
+        </p:nvSpPr>
+        <p:spPr>
+          <a:xfrm>
+            <a:off x="4709160" y="960120"/>
+            <a:ext cx="4069080" cy="411480"/>
           </a:xfrm>
           <a:prstGeom prst="rect">
             <a:avLst/>
           </a:prstGeom>
           <a:solidFill>
-            <a:srgbClr val="457B9D"/>
+            <a:srgbClr val="243560"/>
           </a:solidFill>
           <a:ln w="12700">
             <a:solidFill>
-              <a:srgbClr val="457B9D"/>
+              <a:srgbClr val="243560"/>
             </a:solidFill>
             <a:prstDash val="solid"/>
           </a:ln>
@@ -5517,30 +4088,30 @@
       </p:sp>
       <p:sp>
         <p:nvSpPr>
-          <p:cNvPr id="12" name="Text 10"/>
-          <p:cNvSpPr/>
-          <p:nvPr/>
-        </p:nvSpPr>
-        <p:spPr>
-          <a:xfrm>
-            <a:off x="365760" y="2450592"/>
-            <a:ext cx="457200" cy="475488"/>
-          </a:xfrm>
-          <a:prstGeom prst="rect">
-            <a:avLst/>
-          </a:prstGeom>
-          <a:noFill/>
-          <a:ln/>
-        </p:spPr>
-        <p:txBody>
-          <a:bodyPr wrap="square" lIns="0" tIns="0" rIns="0" bIns="0" rtlCol="0" anchor="ctr"/>
-          <a:lstStyle/>
-          <a:p>
-            <a:pPr marL="0" indent="0" algn="ctr">
-              <a:buNone/>
-            </a:pPr>
-            <a:r>
-              <a:rPr lang="en-US" sz="1300" b="1" dirty="0">
+          <p:cNvPr id="25" name="Text 23"/>
+          <p:cNvSpPr/>
+          <p:nvPr/>
+        </p:nvSpPr>
+        <p:spPr>
+          <a:xfrm>
+            <a:off x="4846320" y="960120"/>
+            <a:ext cx="3840480" cy="411480"/>
+          </a:xfrm>
+          <a:prstGeom prst="rect">
+            <a:avLst/>
+          </a:prstGeom>
+          <a:noFill/>
+          <a:ln/>
+        </p:spPr>
+        <p:txBody>
+          <a:bodyPr wrap="square" lIns="0" tIns="0" rIns="0" bIns="0" rtlCol="0" anchor="ctr"/>
+          <a:lstStyle/>
+          <a:p>
+            <a:pPr marL="0" indent="0">
+              <a:buNone/>
+            </a:pPr>
+            <a:r>
+              <a:rPr lang="en-US" sz="1200" b="1" dirty="0">
                 <a:solidFill>
                   <a:srgbClr val="FFFFFF"/>
                 </a:solidFill>
@@ -5548,32 +4119,71 @@
                 <a:ea typeface="Calibri" pitchFamily="34" charset="-122"/>
                 <a:cs typeface="Calibri" pitchFamily="34" charset="-120"/>
               </a:rPr>
-              <a:t>02</a:t>
-            </a:r>
-            <a:endParaRPr lang="en-US" sz="1300" dirty="0"/>
-          </a:p>
-        </p:txBody>
-      </p:sp>
-      <p:sp>
-        <p:nvSpPr>
-          <p:cNvPr id="13" name="Shape 11"/>
-          <p:cNvSpPr/>
-          <p:nvPr/>
-        </p:nvSpPr>
-        <p:spPr>
-          <a:xfrm>
-            <a:off x="914400" y="2450592"/>
-            <a:ext cx="7863840" cy="475488"/>
+              <a:t>utils.spec.ts — 35 Tests</a:t>
+            </a:r>
+            <a:endParaRPr lang="en-US" sz="1200" dirty="0"/>
+          </a:p>
+        </p:txBody>
+      </p:sp>
+      <p:sp>
+        <p:nvSpPr>
+          <p:cNvPr id="26" name="Text 24"/>
+          <p:cNvSpPr/>
+          <p:nvPr/>
+        </p:nvSpPr>
+        <p:spPr>
+          <a:xfrm>
+            <a:off x="4846320" y="1444752"/>
+            <a:ext cx="3749040" cy="274320"/>
+          </a:xfrm>
+          <a:prstGeom prst="rect">
+            <a:avLst/>
+          </a:prstGeom>
+          <a:noFill/>
+          <a:ln/>
+        </p:spPr>
+        <p:txBody>
+          <a:bodyPr wrap="square" lIns="0" tIns="0" rIns="0" bIns="0" rtlCol="0" anchor="ctr"/>
+          <a:lstStyle/>
+          <a:p>
+            <a:pPr marL="0" indent="0">
+              <a:buNone/>
+            </a:pPr>
+            <a:r>
+              <a:rPr lang="en-US" sz="1050" i="1" dirty="0">
+                <a:solidFill>
+                  <a:srgbClr val="5C7A9B"/>
+                </a:solidFill>
+                <a:latin typeface="Calibri" pitchFamily="34" charset="0"/>
+                <a:ea typeface="Calibri" pitchFamily="34" charset="-122"/>
+                <a:cs typeface="Calibri" pitchFamily="34" charset="-120"/>
+              </a:rPr>
+              <a:t>Modul: lib/utils.ts — Hilfsfunktionen</a:t>
+            </a:r>
+            <a:endParaRPr lang="en-US" sz="1050" dirty="0"/>
+          </a:p>
+        </p:txBody>
+      </p:sp>
+      <p:sp>
+        <p:nvSpPr>
+          <p:cNvPr id="27" name="Shape 25"/>
+          <p:cNvSpPr/>
+          <p:nvPr/>
+        </p:nvSpPr>
+        <p:spPr>
+          <a:xfrm>
+            <a:off x="4846320" y="1764792"/>
+            <a:ext cx="64008" cy="347472"/>
           </a:xfrm>
           <a:prstGeom prst="rect">
             <a:avLst/>
           </a:prstGeom>
           <a:solidFill>
-            <a:srgbClr val="EBF2FA"/>
+            <a:srgbClr val="E63946"/>
           </a:solidFill>
-          <a:ln w="6350">
+          <a:ln w="12700">
             <a:solidFill>
-              <a:srgbClr val="D0DFF0"/>
+              <a:srgbClr val="E63946"/>
             </a:solidFill>
             <a:prstDash val="solid"/>
           </a:ln>
@@ -5588,14 +4198,14 @@
       </p:sp>
       <p:sp>
         <p:nvSpPr>
-          <p:cNvPr id="14" name="Text 12"/>
-          <p:cNvSpPr/>
-          <p:nvPr/>
-        </p:nvSpPr>
-        <p:spPr>
-          <a:xfrm>
-            <a:off x="1005840" y="2487168"/>
-            <a:ext cx="2103120" cy="219456"/>
+          <p:cNvPr id="28" name="Text 26"/>
+          <p:cNvSpPr/>
+          <p:nvPr/>
+        </p:nvSpPr>
+        <p:spPr>
+          <a:xfrm>
+            <a:off x="4992624" y="1764792"/>
+            <a:ext cx="3611880" cy="201168"/>
           </a:xfrm>
           <a:prstGeom prst="rect">
             <a:avLst/>
@@ -5611,7 +4221,7 @@
               <a:buNone/>
             </a:pPr>
             <a:r>
-              <a:rPr lang="en-US" sz="1200" b="1" dirty="0">
+              <a:rPr lang="en-US" sz="1150" b="1" dirty="0">
                 <a:solidFill>
                   <a:srgbClr val="1D3557"/>
                 </a:solidFill>
@@ -5619,22 +4229,22 @@
                 <a:ea typeface="Calibri" pitchFamily="34" charset="-122"/>
                 <a:cs typeface="Calibri" pitchFamily="34" charset="-120"/>
               </a:rPr>
-              <a:t>Abgelaufener Coupon</a:t>
-            </a:r>
-            <a:endParaRPr lang="en-US" sz="1200" dirty="0"/>
-          </a:p>
-        </p:txBody>
-      </p:sp>
-      <p:sp>
-        <p:nvSpPr>
-          <p:cNvPr id="15" name="Text 13"/>
-          <p:cNvSpPr/>
-          <p:nvPr/>
-        </p:nvSpPr>
-        <p:spPr>
-          <a:xfrm>
-            <a:off x="1005840" y="2697480"/>
-            <a:ext cx="7589520" cy="201168"/>
+              <a:t>String Utils</a:t>
+            </a:r>
+            <a:endParaRPr lang="en-US" sz="1150" dirty="0"/>
+          </a:p>
+        </p:txBody>
+      </p:sp>
+      <p:sp>
+        <p:nvSpPr>
+          <p:cNvPr id="29" name="Text 27"/>
+          <p:cNvSpPr/>
+          <p:nvPr/>
+        </p:nvSpPr>
+        <p:spPr>
+          <a:xfrm>
+            <a:off x="4992624" y="1956816"/>
+            <a:ext cx="3611880" cy="182880"/>
           </a:xfrm>
           <a:prstGeom prst="rect">
             <a:avLst/>
@@ -5650,7 +4260,7 @@
               <a:buNone/>
             </a:pPr>
             <a:r>
-              <a:rPr lang="en-US" sz="1050" i="1" dirty="0">
+              <a:rPr lang="en-US" sz="1000" dirty="0">
                 <a:solidFill>
                   <a:srgbClr val="5C7A9B"/>
                 </a:solidFill>
@@ -5658,32 +4268,32 @@
                 <a:ea typeface="Calibri" pitchFamily="34" charset="-122"/>
                 <a:cs typeface="Calibri" pitchFamily="34" charset="-120"/>
               </a:rPr>
-              <a:t>Überprüft, dass ein Coupon aus der Vergangenheit (2001) als ungültig abgewiesen wird → zeitbasierte Validierung.</a:t>
-            </a:r>
-            <a:endParaRPr lang="en-US" sz="1050" dirty="0"/>
-          </a:p>
-        </p:txBody>
-      </p:sp>
-      <p:sp>
-        <p:nvSpPr>
-          <p:cNvPr id="16" name="Shape 14"/>
-          <p:cNvSpPr/>
-          <p:nvPr/>
-        </p:nvSpPr>
-        <p:spPr>
-          <a:xfrm>
-            <a:off x="365760" y="3072384"/>
-            <a:ext cx="457200" cy="475488"/>
+              <a:t>startsWith, endsWith, contains, unquote (12 Tests)</a:t>
+            </a:r>
+            <a:endParaRPr lang="en-US" sz="1000" dirty="0"/>
+          </a:p>
+        </p:txBody>
+      </p:sp>
+      <p:sp>
+        <p:nvSpPr>
+          <p:cNvPr id="30" name="Shape 28"/>
+          <p:cNvSpPr/>
+          <p:nvPr/>
+        </p:nvSpPr>
+        <p:spPr>
+          <a:xfrm>
+            <a:off x="4846320" y="2240280"/>
+            <a:ext cx="64008" cy="347472"/>
           </a:xfrm>
           <a:prstGeom prst="rect">
             <a:avLst/>
           </a:prstGeom>
           <a:solidFill>
-            <a:srgbClr val="457B9D"/>
+            <a:srgbClr val="E63946"/>
           </a:solidFill>
           <a:ln w="12700">
             <a:solidFill>
-              <a:srgbClr val="457B9D"/>
+              <a:srgbClr val="E63946"/>
             </a:solidFill>
             <a:prstDash val="solid"/>
           </a:ln>
@@ -5698,63 +4308,102 @@
       </p:sp>
       <p:sp>
         <p:nvSpPr>
-          <p:cNvPr id="17" name="Text 15"/>
-          <p:cNvSpPr/>
-          <p:nvPr/>
-        </p:nvSpPr>
-        <p:spPr>
-          <a:xfrm>
-            <a:off x="365760" y="3072384"/>
-            <a:ext cx="457200" cy="475488"/>
-          </a:xfrm>
-          <a:prstGeom prst="rect">
-            <a:avLst/>
-          </a:prstGeom>
-          <a:noFill/>
-          <a:ln/>
-        </p:spPr>
-        <p:txBody>
-          <a:bodyPr wrap="square" lIns="0" tIns="0" rIns="0" bIns="0" rtlCol="0" anchor="ctr"/>
-          <a:lstStyle/>
-          <a:p>
-            <a:pPr marL="0" indent="0" algn="ctr">
-              <a:buNone/>
-            </a:pPr>
-            <a:r>
-              <a:rPr lang="en-US" sz="1300" b="1" dirty="0">
-                <a:solidFill>
-                  <a:srgbClr val="FFFFFF"/>
-                </a:solidFill>
-                <a:latin typeface="Calibri" pitchFamily="34" charset="0"/>
-                <a:ea typeface="Calibri" pitchFamily="34" charset="-122"/>
-                <a:cs typeface="Calibri" pitchFamily="34" charset="-120"/>
-              </a:rPr>
-              <a:t>03</a:t>
-            </a:r>
-            <a:endParaRPr lang="en-US" sz="1300" dirty="0"/>
-          </a:p>
-        </p:txBody>
-      </p:sp>
-      <p:sp>
-        <p:nvSpPr>
-          <p:cNvPr id="18" name="Shape 16"/>
-          <p:cNvSpPr/>
-          <p:nvPr/>
-        </p:nvSpPr>
-        <p:spPr>
-          <a:xfrm>
-            <a:off x="914400" y="3072384"/>
-            <a:ext cx="7863840" cy="475488"/>
+          <p:cNvPr id="31" name="Text 29"/>
+          <p:cNvSpPr/>
+          <p:nvPr/>
+        </p:nvSpPr>
+        <p:spPr>
+          <a:xfrm>
+            <a:off x="4992624" y="2240280"/>
+            <a:ext cx="3611880" cy="201168"/>
+          </a:xfrm>
+          <a:prstGeom prst="rect">
+            <a:avLst/>
+          </a:prstGeom>
+          <a:noFill/>
+          <a:ln/>
+        </p:spPr>
+        <p:txBody>
+          <a:bodyPr wrap="square" lIns="0" tIns="0" rIns="0" bIns="0" rtlCol="0" anchor="ctr"/>
+          <a:lstStyle/>
+          <a:p>
+            <a:pPr marL="0" indent="0">
+              <a:buNone/>
+            </a:pPr>
+            <a:r>
+              <a:rPr lang="en-US" sz="1150" b="1" dirty="0">
+                <a:solidFill>
+                  <a:srgbClr val="1D3557"/>
+                </a:solidFill>
+                <a:latin typeface="Calibri" pitchFamily="34" charset="0"/>
+                <a:ea typeface="Calibri" pitchFamily="34" charset="-122"/>
+                <a:cs typeface="Calibri" pitchFamily="34" charset="-120"/>
+              </a:rPr>
+              <a:t>URL &amp; Truncation</a:t>
+            </a:r>
+            <a:endParaRPr lang="en-US" sz="1150" dirty="0"/>
+          </a:p>
+        </p:txBody>
+      </p:sp>
+      <p:sp>
+        <p:nvSpPr>
+          <p:cNvPr id="32" name="Text 30"/>
+          <p:cNvSpPr/>
+          <p:nvPr/>
+        </p:nvSpPr>
+        <p:spPr>
+          <a:xfrm>
+            <a:off x="4992624" y="2432304"/>
+            <a:ext cx="3611880" cy="182880"/>
+          </a:xfrm>
+          <a:prstGeom prst="rect">
+            <a:avLst/>
+          </a:prstGeom>
+          <a:noFill/>
+          <a:ln/>
+        </p:spPr>
+        <p:txBody>
+          <a:bodyPr wrap="square" lIns="0" tIns="0" rIns="0" bIns="0" rtlCol="0" anchor="ctr"/>
+          <a:lstStyle/>
+          <a:p>
+            <a:pPr marL="0" indent="0">
+              <a:buNone/>
+            </a:pPr>
+            <a:r>
+              <a:rPr lang="en-US" sz="1000" dirty="0">
+                <a:solidFill>
+                  <a:srgbClr val="5C7A9B"/>
+                </a:solidFill>
+                <a:latin typeface="Calibri" pitchFamily="34" charset="0"/>
+                <a:ea typeface="Calibri" pitchFamily="34" charset="-122"/>
+                <a:cs typeface="Calibri" pitchFamily="34" charset="-120"/>
+              </a:rPr>
+              <a:t>isUrl, trunc, extractFilename (8 Tests)</a:t>
+            </a:r>
+            <a:endParaRPr lang="en-US" sz="1000" dirty="0"/>
+          </a:p>
+        </p:txBody>
+      </p:sp>
+      <p:sp>
+        <p:nvSpPr>
+          <p:cNvPr id="33" name="Shape 31"/>
+          <p:cNvSpPr/>
+          <p:nvPr/>
+        </p:nvSpPr>
+        <p:spPr>
+          <a:xfrm>
+            <a:off x="4846320" y="2715768"/>
+            <a:ext cx="64008" cy="347472"/>
           </a:xfrm>
           <a:prstGeom prst="rect">
             <a:avLst/>
           </a:prstGeom>
           <a:solidFill>
-            <a:srgbClr val="FFFFFF"/>
+            <a:srgbClr val="E63946"/>
           </a:solidFill>
-          <a:ln w="6350">
+          <a:ln w="12700">
             <a:solidFill>
-              <a:srgbClr val="D0DFF0"/>
+              <a:srgbClr val="E63946"/>
             </a:solidFill>
             <a:prstDash val="solid"/>
           </a:ln>
@@ -5769,14 +4418,14 @@
       </p:sp>
       <p:sp>
         <p:nvSpPr>
-          <p:cNvPr id="19" name="Text 17"/>
-          <p:cNvSpPr/>
-          <p:nvPr/>
-        </p:nvSpPr>
-        <p:spPr>
-          <a:xfrm>
-            <a:off x="1005840" y="3108960"/>
-            <a:ext cx="2103120" cy="219456"/>
+          <p:cNvPr id="34" name="Text 32"/>
+          <p:cNvSpPr/>
+          <p:nvPr/>
+        </p:nvSpPr>
+        <p:spPr>
+          <a:xfrm>
+            <a:off x="4992624" y="2715768"/>
+            <a:ext cx="3611880" cy="201168"/>
           </a:xfrm>
           <a:prstGeom prst="rect">
             <a:avLst/>
@@ -5792,7 +4441,7 @@
               <a:buNone/>
             </a:pPr>
             <a:r>
-              <a:rPr lang="en-US" sz="1200" b="1" dirty="0">
+              <a:rPr lang="en-US" sz="1150" b="1" dirty="0">
                 <a:solidFill>
                   <a:srgbClr val="1D3557"/>
                 </a:solidFill>
@@ -5800,22 +4449,22 @@
                 <a:ea typeface="Calibri" pitchFamily="34" charset="-122"/>
                 <a:cs typeface="Calibri" pitchFamily="34" charset="-120"/>
               </a:rPr>
-              <a:t>JWT Signierung &amp; Verify</a:t>
-            </a:r>
-            <a:endParaRPr lang="en-US" sz="1200" dirty="0"/>
-          </a:p>
-        </p:txBody>
-      </p:sp>
-      <p:sp>
-        <p:nvSpPr>
-          <p:cNvPr id="20" name="Text 18"/>
-          <p:cNvSpPr/>
-          <p:nvPr/>
-        </p:nvSpPr>
-        <p:spPr>
-          <a:xfrm>
-            <a:off x="1005840" y="3319272"/>
-            <a:ext cx="7589520" cy="201168"/>
+              <a:t>Datumsformate</a:t>
+            </a:r>
+            <a:endParaRPr lang="en-US" sz="1150" dirty="0"/>
+          </a:p>
+        </p:txBody>
+      </p:sp>
+      <p:sp>
+        <p:nvSpPr>
+          <p:cNvPr id="35" name="Text 33"/>
+          <p:cNvSpPr/>
+          <p:nvPr/>
+        </p:nvSpPr>
+        <p:spPr>
+          <a:xfrm>
+            <a:off x="4992624" y="2907792"/>
+            <a:ext cx="3611880" cy="182880"/>
           </a:xfrm>
           <a:prstGeom prst="rect">
             <a:avLst/>
@@ -5831,7 +4480,7 @@
               <a:buNone/>
             </a:pPr>
             <a:r>
-              <a:rPr lang="en-US" sz="1050" i="1" dirty="0">
+              <a:rPr lang="en-US" sz="1000" dirty="0">
                 <a:solidFill>
                   <a:srgbClr val="5C7A9B"/>
                 </a:solidFill>
@@ -5839,32 +4488,32 @@
                 <a:ea typeface="Calibri" pitchFamily="34" charset="-122"/>
                 <a:cs typeface="Calibri" pitchFamily="34" charset="-120"/>
               </a:rPr>
-              <a:t>Frisch signiertes Token muss als valid gelten → Grundfunktion der Authentifizierung.</a:t>
-            </a:r>
-            <a:endParaRPr lang="en-US" sz="1050" dirty="0"/>
-          </a:p>
-        </p:txBody>
-      </p:sp>
-      <p:sp>
-        <p:nvSpPr>
-          <p:cNvPr id="21" name="Shape 19"/>
-          <p:cNvSpPr/>
-          <p:nvPr/>
-        </p:nvSpPr>
-        <p:spPr>
-          <a:xfrm>
-            <a:off x="365760" y="3694176"/>
-            <a:ext cx="457200" cy="475488"/>
+              <a:t>toISO8601, toMMMYY (4 Tests)</a:t>
+            </a:r>
+            <a:endParaRPr lang="en-US" sz="1000" dirty="0"/>
+          </a:p>
+        </p:txBody>
+      </p:sp>
+      <p:sp>
+        <p:nvSpPr>
+          <p:cNvPr id="36" name="Shape 34"/>
+          <p:cNvSpPr/>
+          <p:nvPr/>
+        </p:nvSpPr>
+        <p:spPr>
+          <a:xfrm>
+            <a:off x="4846320" y="3191256"/>
+            <a:ext cx="64008" cy="347472"/>
           </a:xfrm>
           <a:prstGeom prst="rect">
             <a:avLst/>
           </a:prstGeom>
           <a:solidFill>
-            <a:srgbClr val="457B9D"/>
+            <a:srgbClr val="E63946"/>
           </a:solidFill>
           <a:ln w="12700">
             <a:solidFill>
-              <a:srgbClr val="457B9D"/>
+              <a:srgbClr val="E63946"/>
             </a:solidFill>
             <a:prstDash val="solid"/>
           </a:ln>
@@ -5879,63 +4528,102 @@
       </p:sp>
       <p:sp>
         <p:nvSpPr>
-          <p:cNvPr id="22" name="Text 20"/>
-          <p:cNvSpPr/>
-          <p:nvPr/>
-        </p:nvSpPr>
-        <p:spPr>
-          <a:xfrm>
-            <a:off x="365760" y="3694176"/>
-            <a:ext cx="457200" cy="475488"/>
-          </a:xfrm>
-          <a:prstGeom prst="rect">
-            <a:avLst/>
-          </a:prstGeom>
-          <a:noFill/>
-          <a:ln/>
-        </p:spPr>
-        <p:txBody>
-          <a:bodyPr wrap="square" lIns="0" tIns="0" rIns="0" bIns="0" rtlCol="0" anchor="ctr"/>
-          <a:lstStyle/>
-          <a:p>
-            <a:pPr marL="0" indent="0" algn="ctr">
-              <a:buNone/>
-            </a:pPr>
-            <a:r>
-              <a:rPr lang="en-US" sz="1300" b="1" dirty="0">
-                <a:solidFill>
-                  <a:srgbClr val="FFFFFF"/>
-                </a:solidFill>
-                <a:latin typeface="Calibri" pitchFamily="34" charset="0"/>
-                <a:ea typeface="Calibri" pitchFamily="34" charset="-122"/>
-                <a:cs typeface="Calibri" pitchFamily="34" charset="-120"/>
-              </a:rPr>
-              <a:t>04</a:t>
-            </a:r>
-            <a:endParaRPr lang="en-US" sz="1300" dirty="0"/>
-          </a:p>
-        </p:txBody>
-      </p:sp>
-      <p:sp>
-        <p:nvSpPr>
-          <p:cNvPr id="23" name="Shape 21"/>
-          <p:cNvSpPr/>
-          <p:nvPr/>
-        </p:nvSpPr>
-        <p:spPr>
-          <a:xfrm>
-            <a:off x="914400" y="3694176"/>
-            <a:ext cx="7863840" cy="475488"/>
+          <p:cNvPr id="37" name="Text 35"/>
+          <p:cNvSpPr/>
+          <p:nvPr/>
+        </p:nvSpPr>
+        <p:spPr>
+          <a:xfrm>
+            <a:off x="4992624" y="3191256"/>
+            <a:ext cx="3611880" cy="201168"/>
+          </a:xfrm>
+          <a:prstGeom prst="rect">
+            <a:avLst/>
+          </a:prstGeom>
+          <a:noFill/>
+          <a:ln/>
+        </p:spPr>
+        <p:txBody>
+          <a:bodyPr wrap="square" lIns="0" tIns="0" rIns="0" bIns="0" rtlCol="0" anchor="ctr"/>
+          <a:lstStyle/>
+          <a:p>
+            <a:pPr marL="0" indent="0">
+              <a:buNone/>
+            </a:pPr>
+            <a:r>
+              <a:rPr lang="en-US" sz="1150" b="1" dirty="0">
+                <a:solidFill>
+                  <a:srgbClr val="1D3557"/>
+                </a:solidFill>
+                <a:latin typeface="Calibri" pitchFamily="34" charset="0"/>
+                <a:ea typeface="Calibri" pitchFamily="34" charset="-122"/>
+                <a:cs typeface="Calibri" pitchFamily="34" charset="-120"/>
+              </a:rPr>
+              <a:t>Networking</a:t>
+            </a:r>
+            <a:endParaRPr lang="en-US" sz="1150" dirty="0"/>
+          </a:p>
+        </p:txBody>
+      </p:sp>
+      <p:sp>
+        <p:nvSpPr>
+          <p:cNvPr id="38" name="Text 36"/>
+          <p:cNvSpPr/>
+          <p:nvPr/>
+        </p:nvSpPr>
+        <p:spPr>
+          <a:xfrm>
+            <a:off x="4992624" y="3383280"/>
+            <a:ext cx="3611880" cy="182880"/>
+          </a:xfrm>
+          <a:prstGeom prst="rect">
+            <a:avLst/>
+          </a:prstGeom>
+          <a:noFill/>
+          <a:ln/>
+        </p:spPr>
+        <p:txBody>
+          <a:bodyPr wrap="square" lIns="0" tIns="0" rIns="0" bIns="0" rtlCol="0" anchor="ctr"/>
+          <a:lstStyle/>
+          <a:p>
+            <a:pPr marL="0" indent="0">
+              <a:buNone/>
+            </a:pPr>
+            <a:r>
+              <a:rPr lang="en-US" sz="1000" dirty="0">
+                <a:solidFill>
+                  <a:srgbClr val="5C7A9B"/>
+                </a:solidFill>
+                <a:latin typeface="Calibri" pitchFamily="34" charset="0"/>
+                <a:ea typeface="Calibri" pitchFamily="34" charset="-122"/>
+                <a:cs typeface="Calibri" pitchFamily="34" charset="-120"/>
+              </a:rPr>
+              <a:t>toSimpleIpAddress — IPv6→IPv4 (3 Tests)</a:t>
+            </a:r>
+            <a:endParaRPr lang="en-US" sz="1000" dirty="0"/>
+          </a:p>
+        </p:txBody>
+      </p:sp>
+      <p:sp>
+        <p:nvSpPr>
+          <p:cNvPr id="39" name="Shape 37"/>
+          <p:cNvSpPr/>
+          <p:nvPr/>
+        </p:nvSpPr>
+        <p:spPr>
+          <a:xfrm>
+            <a:off x="4846320" y="3666744"/>
+            <a:ext cx="64008" cy="347472"/>
           </a:xfrm>
           <a:prstGeom prst="rect">
             <a:avLst/>
           </a:prstGeom>
           <a:solidFill>
-            <a:srgbClr val="EBF2FA"/>
+            <a:srgbClr val="E63946"/>
           </a:solidFill>
-          <a:ln w="6350">
+          <a:ln w="12700">
             <a:solidFill>
-              <a:srgbClr val="D0DFF0"/>
+              <a:srgbClr val="E63946"/>
             </a:solidFill>
             <a:prstDash val="solid"/>
           </a:ln>
@@ -5950,14 +4638,14 @@
       </p:sp>
       <p:sp>
         <p:nvSpPr>
-          <p:cNvPr id="24" name="Text 22"/>
-          <p:cNvSpPr/>
-          <p:nvPr/>
-        </p:nvSpPr>
-        <p:spPr>
-          <a:xfrm>
-            <a:off x="1005840" y="3730752"/>
-            <a:ext cx="2103120" cy="219456"/>
+          <p:cNvPr id="40" name="Text 38"/>
+          <p:cNvSpPr/>
+          <p:nvPr/>
+        </p:nvSpPr>
+        <p:spPr>
+          <a:xfrm>
+            <a:off x="4992624" y="3666744"/>
+            <a:ext cx="3611880" cy="201168"/>
           </a:xfrm>
           <a:prstGeom prst="rect">
             <a:avLst/>
@@ -5973,7 +4661,7 @@
               <a:buNone/>
             </a:pPr>
             <a:r>
-              <a:rPr lang="en-US" sz="1200" b="1" dirty="0">
+              <a:rPr lang="en-US" sz="1150" b="1" dirty="0">
                 <a:solidFill>
                   <a:srgbClr val="1D3557"/>
                 </a:solidFill>
@@ -5981,22 +4669,22 @@
                 <a:ea typeface="Calibri" pitchFamily="34" charset="-122"/>
                 <a:cs typeface="Calibri" pitchFamily="34" charset="-120"/>
               </a:rPr>
-              <a:t>Manipuliertes JWT</a:t>
-            </a:r>
-            <a:endParaRPr lang="en-US" sz="1200" dirty="0"/>
-          </a:p>
-        </p:txBody>
-      </p:sp>
-      <p:sp>
-        <p:nvSpPr>
-          <p:cNvPr id="25" name="Text 23"/>
-          <p:cNvSpPr/>
-          <p:nvPr/>
-        </p:nvSpPr>
-        <p:spPr>
-          <a:xfrm>
-            <a:off x="1005840" y="3941064"/>
-            <a:ext cx="7589520" cy="201168"/>
+              <a:t>Error &amp; Query</a:t>
+            </a:r>
+            <a:endParaRPr lang="en-US" sz="1150" dirty="0"/>
+          </a:p>
+        </p:txBody>
+      </p:sp>
+      <p:sp>
+        <p:nvSpPr>
+          <p:cNvPr id="41" name="Text 39"/>
+          <p:cNvSpPr/>
+          <p:nvPr/>
+        </p:nvSpPr>
+        <p:spPr>
+          <a:xfrm>
+            <a:off x="4992624" y="3858768"/>
+            <a:ext cx="3611880" cy="182880"/>
           </a:xfrm>
           <a:prstGeom prst="rect">
             <a:avLst/>
@@ -6012,7 +4700,7 @@
               <a:buNone/>
             </a:pPr>
             <a:r>
-              <a:rPr lang="en-US" sz="1050" i="1" dirty="0">
+              <a:rPr lang="en-US" sz="1000" dirty="0">
                 <a:solidFill>
                   <a:srgbClr val="5C7A9B"/>
                 </a:solidFill>
@@ -6020,32 +4708,32 @@
                 <a:ea typeface="Calibri" pitchFamily="34" charset="-122"/>
                 <a:cs typeface="Calibri" pitchFamily="34" charset="-120"/>
               </a:rPr>
-              <a:t>Ein verändertes Token (letztes Zeichen geändert) muss abgelehnt werden → Tamper-Detection.</a:t>
-            </a:r>
-            <a:endParaRPr lang="en-US" sz="1050" dirty="0"/>
-          </a:p>
-        </p:txBody>
-      </p:sp>
-      <p:sp>
-        <p:nvSpPr>
-          <p:cNvPr id="26" name="Shape 24"/>
-          <p:cNvSpPr/>
-          <p:nvPr/>
-        </p:nvSpPr>
-        <p:spPr>
-          <a:xfrm>
-            <a:off x="365760" y="4315968"/>
-            <a:ext cx="457200" cy="475488"/>
+              <a:t>getErrorMessage, queryResultToJson (4 Tests)</a:t>
+            </a:r>
+            <a:endParaRPr lang="en-US" sz="1000" dirty="0"/>
+          </a:p>
+        </p:txBody>
+      </p:sp>
+      <p:sp>
+        <p:nvSpPr>
+          <p:cNvPr id="42" name="Shape 40"/>
+          <p:cNvSpPr/>
+          <p:nvPr/>
+        </p:nvSpPr>
+        <p:spPr>
+          <a:xfrm>
+            <a:off x="4846320" y="4142232"/>
+            <a:ext cx="64008" cy="347472"/>
           </a:xfrm>
           <a:prstGeom prst="rect">
             <a:avLst/>
           </a:prstGeom>
           <a:solidFill>
-            <a:srgbClr val="457B9D"/>
+            <a:srgbClr val="E63946"/>
           </a:solidFill>
           <a:ln w="12700">
             <a:solidFill>
-              <a:srgbClr val="457B9D"/>
+              <a:srgbClr val="E63946"/>
             </a:solidFill>
             <a:prstDash val="solid"/>
           </a:ln>
@@ -6060,85 +4748,14 @@
       </p:sp>
       <p:sp>
         <p:nvSpPr>
-          <p:cNvPr id="27" name="Text 25"/>
-          <p:cNvSpPr/>
-          <p:nvPr/>
-        </p:nvSpPr>
-        <p:spPr>
-          <a:xfrm>
-            <a:off x="365760" y="4315968"/>
-            <a:ext cx="457200" cy="475488"/>
-          </a:xfrm>
-          <a:prstGeom prst="rect">
-            <a:avLst/>
-          </a:prstGeom>
-          <a:noFill/>
-          <a:ln/>
-        </p:spPr>
-        <p:txBody>
-          <a:bodyPr wrap="square" lIns="0" tIns="0" rIns="0" bIns="0" rtlCol="0" anchor="ctr"/>
-          <a:lstStyle/>
-          <a:p>
-            <a:pPr marL="0" indent="0" algn="ctr">
-              <a:buNone/>
-            </a:pPr>
-            <a:r>
-              <a:rPr lang="en-US" sz="1300" b="1" dirty="0">
-                <a:solidFill>
-                  <a:srgbClr val="FFFFFF"/>
-                </a:solidFill>
-                <a:latin typeface="Calibri" pitchFamily="34" charset="0"/>
-                <a:ea typeface="Calibri" pitchFamily="34" charset="-122"/>
-                <a:cs typeface="Calibri" pitchFamily="34" charset="-120"/>
-              </a:rPr>
-              <a:t>05</a:t>
-            </a:r>
-            <a:endParaRPr lang="en-US" sz="1300" dirty="0"/>
-          </a:p>
-        </p:txBody>
-      </p:sp>
-      <p:sp>
-        <p:nvSpPr>
-          <p:cNvPr id="28" name="Shape 26"/>
-          <p:cNvSpPr/>
-          <p:nvPr/>
-        </p:nvSpPr>
-        <p:spPr>
-          <a:xfrm>
-            <a:off x="914400" y="4315968"/>
-            <a:ext cx="7863840" cy="475488"/>
-          </a:xfrm>
-          <a:prstGeom prst="rect">
-            <a:avLst/>
-          </a:prstGeom>
-          <a:solidFill>
-            <a:srgbClr val="FFFFFF"/>
-          </a:solidFill>
-          <a:ln w="6350">
-            <a:solidFill>
-              <a:srgbClr val="D0DFF0"/>
-            </a:solidFill>
-            <a:prstDash val="solid"/>
-          </a:ln>
-        </p:spPr>
-        <p:txBody>
-          <a:bodyPr/>
-          <a:lstStyle/>
-          <a:p>
-            <a:endParaRPr lang="de-AT"/>
-          </a:p>
-        </p:txBody>
-      </p:sp>
-      <p:sp>
-        <p:nvSpPr>
-          <p:cNvPr id="29" name="Text 27"/>
-          <p:cNvSpPr/>
-          <p:nvPr/>
-        </p:nvSpPr>
-        <p:spPr>
-          <a:xfrm>
-            <a:off x="1005840" y="4352544"/>
-            <a:ext cx="2103120" cy="219456"/>
+          <p:cNvPr id="43" name="Text 41"/>
+          <p:cNvSpPr/>
+          <p:nvPr/>
+        </p:nvSpPr>
+        <p:spPr>
+          <a:xfrm>
+            <a:off x="4992624" y="4142232"/>
+            <a:ext cx="3611880" cy="201168"/>
           </a:xfrm>
           <a:prstGeom prst="rect">
             <a:avLst/>
@@ -6154,7 +4771,7 @@
               <a:buNone/>
             </a:pPr>
             <a:r>
-              <a:rPr lang="en-US" sz="1200" b="1" dirty="0">
+              <a:rPr lang="en-US" sz="1150" b="1" dirty="0">
                 <a:solidFill>
                   <a:srgbClr val="1D3557"/>
                 </a:solidFill>
@@ -6162,22 +4779,22 @@
                 <a:ea typeface="Calibri" pitchFamily="34" charset="-122"/>
                 <a:cs typeface="Calibri" pitchFamily="34" charset="-120"/>
               </a:rPr>
-              <a:t>XSS Sanitization</a:t>
-            </a:r>
-            <a:endParaRPr lang="en-US" sz="1200" dirty="0"/>
-          </a:p>
-        </p:txBody>
-      </p:sp>
-      <p:sp>
-        <p:nvSpPr>
-          <p:cNvPr id="30" name="Text 28"/>
-          <p:cNvSpPr/>
-          <p:nvPr/>
-        </p:nvSpPr>
-        <p:spPr>
-          <a:xfrm>
-            <a:off x="1005840" y="4562856"/>
-            <a:ext cx="7589520" cy="201168"/>
+              <a:t>File Patterns</a:t>
+            </a:r>
+            <a:endParaRPr lang="en-US" sz="1150" dirty="0"/>
+          </a:p>
+        </p:txBody>
+      </p:sp>
+      <p:sp>
+        <p:nvSpPr>
+          <p:cNvPr id="44" name="Text 42"/>
+          <p:cNvSpPr/>
+          <p:nvPr/>
+        </p:nvSpPr>
+        <p:spPr>
+          <a:xfrm>
+            <a:off x="4992624" y="4334256"/>
+            <a:ext cx="3611880" cy="182880"/>
           </a:xfrm>
           <a:prstGeom prst="rect">
             <a:avLst/>
@@ -6193,7 +4810,7 @@
               <a:buNone/>
             </a:pPr>
             <a:r>
-              <a:rPr lang="en-US" sz="1050" i="1" dirty="0">
+              <a:rPr lang="en-US" sz="1000" dirty="0">
                 <a:solidFill>
                   <a:srgbClr val="5C7A9B"/>
                 </a:solidFill>
@@ -6201,9 +4818,9 @@
                 <a:ea typeface="Calibri" pitchFamily="34" charset="-122"/>
                 <a:cs typeface="Calibri" pitchFamily="34" charset="-120"/>
               </a:rPr>
-              <a:t>Script-Tags werden entfernt, sicherer HTML-Content bleibt erhalten → Schutz vor Cross-Site-Scripting.</a:t>
-            </a:r>
-            <a:endParaRPr lang="en-US" sz="1050" dirty="0"/>
+              <a:t>matchesSystemIni, matchesEtcPasswd (4 Tests)</a:t>
+            </a:r>
+            <a:endParaRPr lang="en-US" sz="1000" dirty="0"/>
           </a:p>
         </p:txBody>
       </p:sp>
@@ -6215,7 +4832,7 @@
 </p:sld>
 </file>
 
-<file path=ppt/slides/slide6.xml><?xml version="1.0" encoding="utf-8"?>
+<file path=ppt/slides/slide5.xml><?xml version="1.0" encoding="utf-8"?>
 <p:sld xmlns:a="http://schemas.openxmlformats.org/drawingml/2006/main" xmlns:r="http://schemas.openxmlformats.org/officeDocument/2006/relationships" xmlns:p="http://schemas.openxmlformats.org/presentationml/2006/main">
   <p:cSld name="Slide 6">
     <p:bg>
@@ -6273,7 +4890,7 @@
                 <a:ea typeface="Trebuchet MS" pitchFamily="34" charset="-122"/>
                 <a:cs typeface="Trebuchet MS" pitchFamily="34" charset="-120"/>
               </a:rPr>
-              <a:t>Integration Tests (3×) — Basket API</a:t>
+              <a:t>Integration Tests (6×) — API</a:t>
             </a:r>
             <a:endParaRPr lang="en-US" sz="3000" dirty="0"/>
           </a:p>
@@ -6319,8 +4936,8 @@
         </p:nvSpPr>
         <p:spPr>
           <a:xfrm>
-            <a:off x="365760" y="1005840"/>
-            <a:ext cx="8412480" cy="640080"/>
+            <a:off x="365760" y="960120"/>
+            <a:ext cx="4160520" cy="4023360"/>
           </a:xfrm>
           <a:prstGeom prst="rect">
             <a:avLst/>
@@ -6352,14 +4969,46 @@
       </p:sp>
       <p:sp>
         <p:nvSpPr>
-          <p:cNvPr id="5" name="Text 3"/>
-          <p:cNvSpPr/>
-          <p:nvPr/>
-        </p:nvSpPr>
-        <p:spPr>
-          <a:xfrm>
-            <a:off x="548640" y="1078992"/>
-            <a:ext cx="8046720" cy="475488"/>
+          <p:cNvPr id="5" name="Shape 3"/>
+          <p:cNvSpPr/>
+          <p:nvPr/>
+        </p:nvSpPr>
+        <p:spPr>
+          <a:xfrm>
+            <a:off x="365760" y="960120"/>
+            <a:ext cx="4160520" cy="411480"/>
+          </a:xfrm>
+          <a:prstGeom prst="rect">
+            <a:avLst/>
+          </a:prstGeom>
+          <a:solidFill>
+            <a:srgbClr val="243560"/>
+          </a:solidFill>
+          <a:ln w="12700">
+            <a:solidFill>
+              <a:srgbClr val="243560"/>
+            </a:solidFill>
+            <a:prstDash val="solid"/>
+          </a:ln>
+        </p:spPr>
+        <p:txBody>
+          <a:bodyPr/>
+          <a:lstStyle/>
+          <a:p>
+            <a:endParaRPr lang="de-AT"/>
+          </a:p>
+        </p:txBody>
+      </p:sp>
+      <p:sp>
+        <p:nvSpPr>
+          <p:cNvPr id="6" name="Text 4"/>
+          <p:cNvSpPr/>
+          <p:nvPr/>
+        </p:nvSpPr>
+        <p:spPr>
+          <a:xfrm>
+            <a:off x="502920" y="960120"/>
+            <a:ext cx="3931920" cy="411480"/>
           </a:xfrm>
           <a:prstGeom prst="rect">
             <a:avLst/>
@@ -6375,15 +5024,15 @@
               <a:buNone/>
             </a:pPr>
             <a:r>
-              <a:rPr lang="en-US" sz="1200" dirty="0">
-                <a:solidFill>
-                  <a:srgbClr val="1D3557"/>
-                </a:solidFill>
-                <a:latin typeface="Calibri" pitchFamily="34" charset="0"/>
-                <a:ea typeface="Calibri" pitchFamily="34" charset="-122"/>
-                <a:cs typeface="Calibri" pitchFamily="34" charset="-120"/>
-              </a:rPr>
-              <a:t>Getesteter Endpunkt: /api/BasketItems — HTTP-Requests via Playwright APIRequestContext. Login als jim@juice-sh.op, dann CRUD-Operationen auf echtem Backend (SQLite).</a:t>
+              <a:rPr lang="en-US" sz="1200" b="1" dirty="0">
+                <a:solidFill>
+                  <a:srgbClr val="FFFFFF"/>
+                </a:solidFill>
+                <a:latin typeface="Calibri" pitchFamily="34" charset="0"/>
+                <a:ea typeface="Calibri" pitchFamily="34" charset="-122"/>
+                <a:cs typeface="Calibri" pitchFamily="34" charset="-120"/>
+              </a:rPr>
+              <a:t>basket-items.spec.ts — 3 Tests</a:t>
             </a:r>
             <a:endParaRPr lang="en-US" sz="1200" dirty="0"/>
           </a:p>
@@ -6391,14 +5040,53 @@
       </p:sp>
       <p:sp>
         <p:nvSpPr>
-          <p:cNvPr id="6" name="Shape 4"/>
-          <p:cNvSpPr/>
-          <p:nvPr/>
-        </p:nvSpPr>
-        <p:spPr>
-          <a:xfrm>
-            <a:off x="365760" y="1828800"/>
-            <a:ext cx="8412480" cy="914400"/>
+          <p:cNvPr id="7" name="Text 5"/>
+          <p:cNvSpPr/>
+          <p:nvPr/>
+        </p:nvSpPr>
+        <p:spPr>
+          <a:xfrm>
+            <a:off x="502920" y="1444752"/>
+            <a:ext cx="3840480" cy="256032"/>
+          </a:xfrm>
+          <a:prstGeom prst="rect">
+            <a:avLst/>
+          </a:prstGeom>
+          <a:noFill/>
+          <a:ln/>
+        </p:spPr>
+        <p:txBody>
+          <a:bodyPr wrap="square" lIns="0" tIns="0" rIns="0" bIns="0" rtlCol="0" anchor="ctr"/>
+          <a:lstStyle/>
+          <a:p>
+            <a:pPr marL="0" indent="0">
+              <a:buNone/>
+            </a:pPr>
+            <a:r>
+              <a:rPr lang="en-US" sz="1050" i="1" dirty="0">
+                <a:solidFill>
+                  <a:srgbClr val="5C7A9B"/>
+                </a:solidFill>
+                <a:latin typeface="Calibri" pitchFamily="34" charset="0"/>
+                <a:ea typeface="Calibri" pitchFamily="34" charset="-122"/>
+                <a:cs typeface="Calibri" pitchFamily="34" charset="-120"/>
+              </a:rPr>
+              <a:t>Endpunkt: /api/BasketItems</a:t>
+            </a:r>
+            <a:endParaRPr lang="en-US" sz="1050" dirty="0"/>
+          </a:p>
+        </p:txBody>
+      </p:sp>
+      <p:sp>
+        <p:nvSpPr>
+          <p:cNvPr id="8" name="Shape 6"/>
+          <p:cNvSpPr/>
+          <p:nvPr/>
+        </p:nvSpPr>
+        <p:spPr>
+          <a:xfrm>
+            <a:off x="502920" y="1783080"/>
+            <a:ext cx="3886200" cy="868680"/>
           </a:xfrm>
           <a:prstGeom prst="rect">
             <a:avLst/>
@@ -6430,24 +5118,24 @@
       </p:sp>
       <p:sp>
         <p:nvSpPr>
-          <p:cNvPr id="7" name="Shape 5"/>
-          <p:cNvSpPr/>
-          <p:nvPr/>
-        </p:nvSpPr>
-        <p:spPr>
-          <a:xfrm>
-            <a:off x="365760" y="1828800"/>
-            <a:ext cx="64008" cy="914400"/>
+          <p:cNvPr id="9" name="Shape 7"/>
+          <p:cNvSpPr/>
+          <p:nvPr/>
+        </p:nvSpPr>
+        <p:spPr>
+          <a:xfrm>
+            <a:off x="502920" y="1783080"/>
+            <a:ext cx="384048" cy="868680"/>
           </a:xfrm>
           <a:prstGeom prst="rect">
             <a:avLst/>
           </a:prstGeom>
           <a:solidFill>
-            <a:srgbClr val="243560"/>
+            <a:srgbClr val="457B9D"/>
           </a:solidFill>
           <a:ln w="12700">
             <a:solidFill>
-              <a:srgbClr val="243560"/>
+              <a:srgbClr val="457B9D"/>
             </a:solidFill>
             <a:prstDash val="solid"/>
           </a:ln>
@@ -6462,46 +5150,14 @@
       </p:sp>
       <p:sp>
         <p:nvSpPr>
-          <p:cNvPr id="8" name="Shape 6"/>
-          <p:cNvSpPr/>
-          <p:nvPr/>
-        </p:nvSpPr>
-        <p:spPr>
-          <a:xfrm>
-            <a:off x="502920" y="1874520"/>
-            <a:ext cx="438912" cy="384048"/>
-          </a:xfrm>
-          <a:prstGeom prst="rect">
-            <a:avLst/>
-          </a:prstGeom>
-          <a:solidFill>
-            <a:srgbClr val="243560"/>
-          </a:solidFill>
-          <a:ln w="12700">
-            <a:solidFill>
-              <a:srgbClr val="243560"/>
-            </a:solidFill>
-            <a:prstDash val="solid"/>
-          </a:ln>
-        </p:spPr>
-        <p:txBody>
-          <a:bodyPr/>
-          <a:lstStyle/>
-          <a:p>
-            <a:endParaRPr lang="de-AT"/>
-          </a:p>
-        </p:txBody>
-      </p:sp>
-      <p:sp>
-        <p:nvSpPr>
-          <p:cNvPr id="9" name="Text 7"/>
-          <p:cNvSpPr/>
-          <p:nvPr/>
-        </p:nvSpPr>
-        <p:spPr>
-          <a:xfrm>
-            <a:off x="502920" y="1874520"/>
-            <a:ext cx="438912" cy="384048"/>
+          <p:cNvPr id="10" name="Text 8"/>
+          <p:cNvSpPr/>
+          <p:nvPr/>
+        </p:nvSpPr>
+        <p:spPr>
+          <a:xfrm>
+            <a:off x="502920" y="1783080"/>
+            <a:ext cx="384048" cy="868680"/>
           </a:xfrm>
           <a:prstGeom prst="rect">
             <a:avLst/>
@@ -6517,7 +5173,7 @@
               <a:buNone/>
             </a:pPr>
             <a:r>
-              <a:rPr lang="en-US" sz="1300" b="1" dirty="0">
+              <a:rPr lang="en-US" sz="1200" b="1" dirty="0">
                 <a:solidFill>
                   <a:srgbClr val="FFFFFF"/>
                 </a:solidFill>
@@ -6527,20 +5183,20 @@
               </a:rPr>
               <a:t>01</a:t>
             </a:r>
-            <a:endParaRPr lang="en-US" sz="1300" dirty="0"/>
-          </a:p>
-        </p:txBody>
-      </p:sp>
-      <p:sp>
-        <p:nvSpPr>
-          <p:cNvPr id="10" name="Text 8"/>
-          <p:cNvSpPr/>
-          <p:nvPr/>
-        </p:nvSpPr>
-        <p:spPr>
-          <a:xfrm>
-            <a:off x="1051560" y="1901952"/>
-            <a:ext cx="7498080" cy="274320"/>
+            <a:endParaRPr lang="en-US" sz="1200" dirty="0"/>
+          </a:p>
+        </p:txBody>
+      </p:sp>
+      <p:sp>
+        <p:nvSpPr>
+          <p:cNvPr id="11" name="Text 9"/>
+          <p:cNvSpPr/>
+          <p:nvPr/>
+        </p:nvSpPr>
+        <p:spPr>
+          <a:xfrm>
+            <a:off x="969264" y="1874520"/>
+            <a:ext cx="3291840" cy="292608"/>
           </a:xfrm>
           <a:prstGeom prst="rect">
             <a:avLst/>
@@ -6556,30 +5212,30 @@
               <a:buNone/>
             </a:pPr>
             <a:r>
-              <a:rPr lang="en-US" sz="1400" b="1" dirty="0">
+              <a:rPr lang="en-US" sz="1200" b="1" dirty="0">
                 <a:solidFill>
                   <a:srgbClr val="1D3557"/>
                 </a:solidFill>
-                <a:latin typeface="Trebuchet MS" pitchFamily="34" charset="0"/>
-                <a:ea typeface="Trebuchet MS" pitchFamily="34" charset="-122"/>
-                <a:cs typeface="Trebuchet MS" pitchFamily="34" charset="-120"/>
-              </a:rPr>
-              <a:t>Produkt zum Warenkorb hinzufügen</a:t>
-            </a:r>
-            <a:endParaRPr lang="en-US" sz="1400" dirty="0"/>
-          </a:p>
-        </p:txBody>
-      </p:sp>
-      <p:sp>
-        <p:nvSpPr>
-          <p:cNvPr id="11" name="Text 9"/>
-          <p:cNvSpPr/>
-          <p:nvPr/>
-        </p:nvSpPr>
-        <p:spPr>
-          <a:xfrm>
-            <a:off x="1051560" y="2212848"/>
-            <a:ext cx="7498080" cy="256032"/>
+                <a:latin typeface="Calibri" pitchFamily="34" charset="0"/>
+                <a:ea typeface="Calibri" pitchFamily="34" charset="-122"/>
+                <a:cs typeface="Calibri" pitchFamily="34" charset="-120"/>
+              </a:rPr>
+              <a:t>Artikel hinzufügen</a:t>
+            </a:r>
+            <a:endParaRPr lang="en-US" sz="1200" dirty="0"/>
+          </a:p>
+        </p:txBody>
+      </p:sp>
+      <p:sp>
+        <p:nvSpPr>
+          <p:cNvPr id="12" name="Text 10"/>
+          <p:cNvSpPr/>
+          <p:nvPr/>
+        </p:nvSpPr>
+        <p:spPr>
+          <a:xfrm>
+            <a:off x="969264" y="2203704"/>
+            <a:ext cx="3291840" cy="347472"/>
           </a:xfrm>
           <a:prstGeom prst="rect">
             <a:avLst/>
@@ -6597,13 +5253,13 @@
             <a:r>
               <a:rPr lang="en-US" sz="1100" dirty="0">
                 <a:solidFill>
-                  <a:srgbClr val="1D3557"/>
-                </a:solidFill>
-                <a:latin typeface="Calibri" pitchFamily="34" charset="0"/>
-                <a:ea typeface="Calibri" pitchFamily="34" charset="-122"/>
-                <a:cs typeface="Calibri" pitchFamily="34" charset="-120"/>
-              </a:rPr>
-              <a:t>Was: POST /api/BasketItems → HTTP 200, korrektes BasketId &amp; ProductId in Response + GET /rest/basket/:id bestätigt Eintrag.</a:t>
+                  <a:srgbClr val="5C7A9B"/>
+                </a:solidFill>
+                <a:latin typeface="Calibri" pitchFamily="34" charset="0"/>
+                <a:ea typeface="Calibri" pitchFamily="34" charset="-122"/>
+                <a:cs typeface="Calibri" pitchFamily="34" charset="-120"/>
+              </a:rPr>
+              <a:t>POST → 200, GET bestätigt Eintrag</a:t>
             </a:r>
             <a:endParaRPr lang="en-US" sz="1100" dirty="0"/>
           </a:p>
@@ -6611,53 +5267,14 @@
       </p:sp>
       <p:sp>
         <p:nvSpPr>
-          <p:cNvPr id="12" name="Text 10"/>
-          <p:cNvSpPr/>
-          <p:nvPr/>
-        </p:nvSpPr>
-        <p:spPr>
-          <a:xfrm>
-            <a:off x="1051560" y="2450592"/>
-            <a:ext cx="7498080" cy="228600"/>
-          </a:xfrm>
-          <a:prstGeom prst="rect">
-            <a:avLst/>
-          </a:prstGeom>
-          <a:noFill/>
-          <a:ln/>
-        </p:spPr>
-        <p:txBody>
-          <a:bodyPr wrap="square" lIns="0" tIns="0" rIns="0" bIns="0" rtlCol="0" anchor="ctr"/>
-          <a:lstStyle/>
-          <a:p>
-            <a:pPr marL="0" indent="0">
-              <a:buNone/>
-            </a:pPr>
-            <a:r>
-              <a:rPr lang="en-US" sz="1050" i="1" dirty="0">
-                <a:solidFill>
-                  <a:srgbClr val="5C7A9B"/>
-                </a:solidFill>
-                <a:latin typeface="Calibri" pitchFamily="34" charset="0"/>
-                <a:ea typeface="Calibri" pitchFamily="34" charset="-122"/>
-                <a:cs typeface="Calibri" pitchFamily="34" charset="-120"/>
-              </a:rPr>
-              <a:t>Warum: Kernanforderung: Artikel müssen im Backend persistiert werden.</a:t>
-            </a:r>
-            <a:endParaRPr lang="en-US" sz="1050" dirty="0"/>
-          </a:p>
-        </p:txBody>
-      </p:sp>
-      <p:sp>
-        <p:nvSpPr>
           <p:cNvPr id="13" name="Shape 11"/>
           <p:cNvSpPr/>
           <p:nvPr/>
         </p:nvSpPr>
         <p:spPr>
           <a:xfrm>
-            <a:off x="365760" y="2852928"/>
-            <a:ext cx="8412480" cy="914400"/>
+            <a:off x="502920" y="2788920"/>
+            <a:ext cx="3886200" cy="868680"/>
           </a:xfrm>
           <a:prstGeom prst="rect">
             <a:avLst/>
@@ -6695,18 +5312,18 @@
         </p:nvSpPr>
         <p:spPr>
           <a:xfrm>
-            <a:off x="365760" y="2852928"/>
-            <a:ext cx="64008" cy="914400"/>
+            <a:off x="502920" y="2788920"/>
+            <a:ext cx="384048" cy="868680"/>
           </a:xfrm>
           <a:prstGeom prst="rect">
             <a:avLst/>
           </a:prstGeom>
           <a:solidFill>
-            <a:srgbClr val="243560"/>
+            <a:srgbClr val="457B9D"/>
           </a:solidFill>
           <a:ln w="12700">
             <a:solidFill>
-              <a:srgbClr val="243560"/>
+              <a:srgbClr val="457B9D"/>
             </a:solidFill>
             <a:prstDash val="solid"/>
           </a:ln>
@@ -6721,33 +5338,40 @@
       </p:sp>
       <p:sp>
         <p:nvSpPr>
-          <p:cNvPr id="15" name="Shape 13"/>
-          <p:cNvSpPr/>
-          <p:nvPr/>
-        </p:nvSpPr>
-        <p:spPr>
-          <a:xfrm>
-            <a:off x="502920" y="2898648"/>
-            <a:ext cx="438912" cy="384048"/>
-          </a:xfrm>
-          <a:prstGeom prst="rect">
-            <a:avLst/>
-          </a:prstGeom>
-          <a:solidFill>
-            <a:srgbClr val="243560"/>
-          </a:solidFill>
-          <a:ln w="12700">
-            <a:solidFill>
-              <a:srgbClr val="243560"/>
-            </a:solidFill>
-            <a:prstDash val="solid"/>
-          </a:ln>
-        </p:spPr>
-        <p:txBody>
-          <a:bodyPr/>
-          <a:lstStyle/>
-          <a:p>
-            <a:endParaRPr lang="de-AT"/>
+          <p:cNvPr id="15" name="Text 13"/>
+          <p:cNvSpPr/>
+          <p:nvPr/>
+        </p:nvSpPr>
+        <p:spPr>
+          <a:xfrm>
+            <a:off x="502920" y="2788920"/>
+            <a:ext cx="384048" cy="868680"/>
+          </a:xfrm>
+          <a:prstGeom prst="rect">
+            <a:avLst/>
+          </a:prstGeom>
+          <a:noFill/>
+          <a:ln/>
+        </p:spPr>
+        <p:txBody>
+          <a:bodyPr wrap="square" lIns="0" tIns="0" rIns="0" bIns="0" rtlCol="0" anchor="ctr"/>
+          <a:lstStyle/>
+          <a:p>
+            <a:pPr marL="0" indent="0" algn="ctr">
+              <a:buNone/>
+            </a:pPr>
+            <a:r>
+              <a:rPr lang="en-US" sz="1200" b="1" dirty="0">
+                <a:solidFill>
+                  <a:srgbClr val="FFFFFF"/>
+                </a:solidFill>
+                <a:latin typeface="Calibri" pitchFamily="34" charset="0"/>
+                <a:ea typeface="Calibri" pitchFamily="34" charset="-122"/>
+                <a:cs typeface="Calibri" pitchFamily="34" charset="-120"/>
+              </a:rPr>
+              <a:t>02</a:t>
+            </a:r>
+            <a:endParaRPr lang="en-US" sz="1200" dirty="0"/>
           </a:p>
         </p:txBody>
       </p:sp>
@@ -6759,34 +5383,34 @@
         </p:nvSpPr>
         <p:spPr>
           <a:xfrm>
-            <a:off x="502920" y="2898648"/>
-            <a:ext cx="438912" cy="384048"/>
-          </a:xfrm>
-          <a:prstGeom prst="rect">
-            <a:avLst/>
-          </a:prstGeom>
-          <a:noFill/>
-          <a:ln/>
-        </p:spPr>
-        <p:txBody>
-          <a:bodyPr wrap="square" lIns="0" tIns="0" rIns="0" bIns="0" rtlCol="0" anchor="ctr"/>
-          <a:lstStyle/>
-          <a:p>
-            <a:pPr marL="0" indent="0" algn="ctr">
-              <a:buNone/>
-            </a:pPr>
-            <a:r>
-              <a:rPr lang="en-US" sz="1300" b="1" dirty="0">
-                <a:solidFill>
-                  <a:srgbClr val="FFFFFF"/>
-                </a:solidFill>
-                <a:latin typeface="Calibri" pitchFamily="34" charset="0"/>
-                <a:ea typeface="Calibri" pitchFamily="34" charset="-122"/>
-                <a:cs typeface="Calibri" pitchFamily="34" charset="-120"/>
-              </a:rPr>
-              <a:t>02</a:t>
-            </a:r>
-            <a:endParaRPr lang="en-US" sz="1300" dirty="0"/>
+            <a:off x="969264" y="2880360"/>
+            <a:ext cx="3291840" cy="292608"/>
+          </a:xfrm>
+          <a:prstGeom prst="rect">
+            <a:avLst/>
+          </a:prstGeom>
+          <a:noFill/>
+          <a:ln/>
+        </p:spPr>
+        <p:txBody>
+          <a:bodyPr wrap="square" lIns="0" tIns="0" rIns="0" bIns="0" rtlCol="0" anchor="ctr"/>
+          <a:lstStyle/>
+          <a:p>
+            <a:pPr marL="0" indent="0">
+              <a:buNone/>
+            </a:pPr>
+            <a:r>
+              <a:rPr lang="en-US" sz="1200" b="1" dirty="0">
+                <a:solidFill>
+                  <a:srgbClr val="1D3557"/>
+                </a:solidFill>
+                <a:latin typeface="Calibri" pitchFamily="34" charset="0"/>
+                <a:ea typeface="Calibri" pitchFamily="34" charset="-122"/>
+                <a:cs typeface="Calibri" pitchFamily="34" charset="-120"/>
+              </a:rPr>
+              <a:t>Artikel entfernen</a:t>
+            </a:r>
+            <a:endParaRPr lang="en-US" sz="1200" dirty="0"/>
           </a:p>
         </p:txBody>
       </p:sp>
@@ -6798,8 +5422,8 @@
         </p:nvSpPr>
         <p:spPr>
           <a:xfrm>
-            <a:off x="1051560" y="2926080"/>
-            <a:ext cx="7498080" cy="274320"/>
+            <a:off x="969264" y="3209544"/>
+            <a:ext cx="3291840" cy="347472"/>
           </a:xfrm>
           <a:prstGeom prst="rect">
             <a:avLst/>
@@ -6815,54 +5439,15 @@
               <a:buNone/>
             </a:pPr>
             <a:r>
-              <a:rPr lang="en-US" sz="1400" b="1" dirty="0">
-                <a:solidFill>
-                  <a:srgbClr val="1D3557"/>
-                </a:solidFill>
-                <a:latin typeface="Trebuchet MS" pitchFamily="34" charset="0"/>
-                <a:ea typeface="Trebuchet MS" pitchFamily="34" charset="-122"/>
-                <a:cs typeface="Trebuchet MS" pitchFamily="34" charset="-120"/>
-              </a:rPr>
-              <a:t>Artikel aus Warenkorb entfernen</a:t>
-            </a:r>
-            <a:endParaRPr lang="en-US" sz="1400" dirty="0"/>
-          </a:p>
-        </p:txBody>
-      </p:sp>
-      <p:sp>
-        <p:nvSpPr>
-          <p:cNvPr id="18" name="Text 16"/>
-          <p:cNvSpPr/>
-          <p:nvPr/>
-        </p:nvSpPr>
-        <p:spPr>
-          <a:xfrm>
-            <a:off x="1051560" y="3236976"/>
-            <a:ext cx="7498080" cy="256032"/>
-          </a:xfrm>
-          <a:prstGeom prst="rect">
-            <a:avLst/>
-          </a:prstGeom>
-          <a:noFill/>
-          <a:ln/>
-        </p:spPr>
-        <p:txBody>
-          <a:bodyPr wrap="square" lIns="0" tIns="0" rIns="0" bIns="0" rtlCol="0" anchor="ctr"/>
-          <a:lstStyle/>
-          <a:p>
-            <a:pPr marL="0" indent="0">
-              <a:buNone/>
-            </a:pPr>
-            <a:r>
               <a:rPr lang="en-US" sz="1100" dirty="0">
                 <a:solidFill>
-                  <a:srgbClr val="1D3557"/>
-                </a:solidFill>
-                <a:latin typeface="Calibri" pitchFamily="34" charset="0"/>
-                <a:ea typeface="Calibri" pitchFamily="34" charset="-122"/>
-                <a:cs typeface="Calibri" pitchFamily="34" charset="-120"/>
-              </a:rPr>
-              <a:t>Was: POST zum Anlegen, dann DELETE /api/BasketItems/:id → HTTP 200. Anschließend GET → HTTP 404.</a:t>
+                  <a:srgbClr val="5C7A9B"/>
+                </a:solidFill>
+                <a:latin typeface="Calibri" pitchFamily="34" charset="0"/>
+                <a:ea typeface="Calibri" pitchFamily="34" charset="-122"/>
+                <a:cs typeface="Calibri" pitchFamily="34" charset="-120"/>
+              </a:rPr>
+              <a:t>DELETE → 200, GET danach → 404</a:t>
             </a:r>
             <a:endParaRPr lang="en-US" sz="1100" dirty="0"/>
           </a:p>
@@ -6870,53 +5455,14 @@
       </p:sp>
       <p:sp>
         <p:nvSpPr>
-          <p:cNvPr id="19" name="Text 17"/>
-          <p:cNvSpPr/>
-          <p:nvPr/>
-        </p:nvSpPr>
-        <p:spPr>
-          <a:xfrm>
-            <a:off x="1051560" y="3474720"/>
-            <a:ext cx="7498080" cy="228600"/>
-          </a:xfrm>
-          <a:prstGeom prst="rect">
-            <a:avLst/>
-          </a:prstGeom>
-          <a:noFill/>
-          <a:ln/>
-        </p:spPr>
-        <p:txBody>
-          <a:bodyPr wrap="square" lIns="0" tIns="0" rIns="0" bIns="0" rtlCol="0" anchor="ctr"/>
-          <a:lstStyle/>
-          <a:p>
-            <a:pPr marL="0" indent="0">
-              <a:buNone/>
-            </a:pPr>
-            <a:r>
-              <a:rPr lang="en-US" sz="1050" i="1" dirty="0">
-                <a:solidFill>
-                  <a:srgbClr val="5C7A9B"/>
-                </a:solidFill>
-                <a:latin typeface="Calibri" pitchFamily="34" charset="0"/>
-                <a:ea typeface="Calibri" pitchFamily="34" charset="-122"/>
-                <a:cs typeface="Calibri" pitchFamily="34" charset="-120"/>
-              </a:rPr>
-              <a:t>Warum: Löschen darf keine Zombie-Einträge hinterlassen.</a:t>
-            </a:r>
-            <a:endParaRPr lang="en-US" sz="1050" dirty="0"/>
-          </a:p>
-        </p:txBody>
-      </p:sp>
-      <p:sp>
-        <p:nvSpPr>
-          <p:cNvPr id="20" name="Shape 18"/>
-          <p:cNvSpPr/>
-          <p:nvPr/>
-        </p:nvSpPr>
-        <p:spPr>
-          <a:xfrm>
-            <a:off x="365760" y="3877056"/>
-            <a:ext cx="8412480" cy="914400"/>
+          <p:cNvPr id="18" name="Shape 16"/>
+          <p:cNvSpPr/>
+          <p:nvPr/>
+        </p:nvSpPr>
+        <p:spPr>
+          <a:xfrm>
+            <a:off x="502920" y="3794760"/>
+            <a:ext cx="3886200" cy="868680"/>
           </a:xfrm>
           <a:prstGeom prst="rect">
             <a:avLst/>
@@ -6948,24 +5494,24 @@
       </p:sp>
       <p:sp>
         <p:nvSpPr>
-          <p:cNvPr id="21" name="Shape 19"/>
-          <p:cNvSpPr/>
-          <p:nvPr/>
-        </p:nvSpPr>
-        <p:spPr>
-          <a:xfrm>
-            <a:off x="365760" y="3877056"/>
-            <a:ext cx="64008" cy="914400"/>
+          <p:cNvPr id="19" name="Shape 17"/>
+          <p:cNvSpPr/>
+          <p:nvPr/>
+        </p:nvSpPr>
+        <p:spPr>
+          <a:xfrm>
+            <a:off x="502920" y="3794760"/>
+            <a:ext cx="384048" cy="868680"/>
           </a:xfrm>
           <a:prstGeom prst="rect">
             <a:avLst/>
           </a:prstGeom>
           <a:solidFill>
-            <a:srgbClr val="243560"/>
+            <a:srgbClr val="457B9D"/>
           </a:solidFill>
           <a:ln w="12700">
             <a:solidFill>
-              <a:srgbClr val="243560"/>
+              <a:srgbClr val="457B9D"/>
             </a:solidFill>
             <a:prstDash val="solid"/>
           </a:ln>
@@ -6980,24 +5526,180 @@
       </p:sp>
       <p:sp>
         <p:nvSpPr>
-          <p:cNvPr id="22" name="Shape 20"/>
-          <p:cNvSpPr/>
-          <p:nvPr/>
-        </p:nvSpPr>
-        <p:spPr>
-          <a:xfrm>
-            <a:off x="502920" y="3922776"/>
-            <a:ext cx="438912" cy="384048"/>
+          <p:cNvPr id="20" name="Text 18"/>
+          <p:cNvSpPr/>
+          <p:nvPr/>
+        </p:nvSpPr>
+        <p:spPr>
+          <a:xfrm>
+            <a:off x="502920" y="3794760"/>
+            <a:ext cx="384048" cy="868680"/>
+          </a:xfrm>
+          <a:prstGeom prst="rect">
+            <a:avLst/>
+          </a:prstGeom>
+          <a:noFill/>
+          <a:ln/>
+        </p:spPr>
+        <p:txBody>
+          <a:bodyPr wrap="square" lIns="0" tIns="0" rIns="0" bIns="0" rtlCol="0" anchor="ctr"/>
+          <a:lstStyle/>
+          <a:p>
+            <a:pPr marL="0" indent="0" algn="ctr">
+              <a:buNone/>
+            </a:pPr>
+            <a:r>
+              <a:rPr lang="en-US" sz="1200" b="1" dirty="0">
+                <a:solidFill>
+                  <a:srgbClr val="FFFFFF"/>
+                </a:solidFill>
+                <a:latin typeface="Calibri" pitchFamily="34" charset="0"/>
+                <a:ea typeface="Calibri" pitchFamily="34" charset="-122"/>
+                <a:cs typeface="Calibri" pitchFamily="34" charset="-120"/>
+              </a:rPr>
+              <a:t>03</a:t>
+            </a:r>
+            <a:endParaRPr lang="en-US" sz="1200" dirty="0"/>
+          </a:p>
+        </p:txBody>
+      </p:sp>
+      <p:sp>
+        <p:nvSpPr>
+          <p:cNvPr id="21" name="Text 19"/>
+          <p:cNvSpPr/>
+          <p:nvPr/>
+        </p:nvSpPr>
+        <p:spPr>
+          <a:xfrm>
+            <a:off x="969264" y="3886200"/>
+            <a:ext cx="3291840" cy="292608"/>
+          </a:xfrm>
+          <a:prstGeom prst="rect">
+            <a:avLst/>
+          </a:prstGeom>
+          <a:noFill/>
+          <a:ln/>
+        </p:spPr>
+        <p:txBody>
+          <a:bodyPr wrap="square" lIns="0" tIns="0" rIns="0" bIns="0" rtlCol="0" anchor="ctr"/>
+          <a:lstStyle/>
+          <a:p>
+            <a:pPr marL="0" indent="0">
+              <a:buNone/>
+            </a:pPr>
+            <a:r>
+              <a:rPr lang="en-US" sz="1200" b="1" dirty="0">
+                <a:solidFill>
+                  <a:srgbClr val="1D3557"/>
+                </a:solidFill>
+                <a:latin typeface="Calibri" pitchFamily="34" charset="0"/>
+                <a:ea typeface="Calibri" pitchFamily="34" charset="-122"/>
+                <a:cs typeface="Calibri" pitchFamily="34" charset="-120"/>
+              </a:rPr>
+              <a:t>Menge aktualisieren</a:t>
+            </a:r>
+            <a:endParaRPr lang="en-US" sz="1200" dirty="0"/>
+          </a:p>
+        </p:txBody>
+      </p:sp>
+      <p:sp>
+        <p:nvSpPr>
+          <p:cNvPr id="22" name="Text 20"/>
+          <p:cNvSpPr/>
+          <p:nvPr/>
+        </p:nvSpPr>
+        <p:spPr>
+          <a:xfrm>
+            <a:off x="969264" y="4215384"/>
+            <a:ext cx="3291840" cy="347472"/>
+          </a:xfrm>
+          <a:prstGeom prst="rect">
+            <a:avLst/>
+          </a:prstGeom>
+          <a:noFill/>
+          <a:ln/>
+        </p:spPr>
+        <p:txBody>
+          <a:bodyPr wrap="square" lIns="0" tIns="0" rIns="0" bIns="0" rtlCol="0" anchor="ctr"/>
+          <a:lstStyle/>
+          <a:p>
+            <a:pPr marL="0" indent="0">
+              <a:buNone/>
+            </a:pPr>
+            <a:r>
+              <a:rPr lang="en-US" sz="1100" dirty="0">
+                <a:solidFill>
+                  <a:srgbClr val="5C7A9B"/>
+                </a:solidFill>
+                <a:latin typeface="Calibri" pitchFamily="34" charset="0"/>
+                <a:ea typeface="Calibri" pitchFamily="34" charset="-122"/>
+                <a:cs typeface="Calibri" pitchFamily="34" charset="-120"/>
+              </a:rPr>
+              <a:t>PUT mit quantity:5 → Response enthält neuen Wert</a:t>
+            </a:r>
+            <a:endParaRPr lang="en-US" sz="1100" dirty="0"/>
+          </a:p>
+        </p:txBody>
+      </p:sp>
+      <p:sp>
+        <p:nvSpPr>
+          <p:cNvPr id="23" name="Shape 21"/>
+          <p:cNvSpPr/>
+          <p:nvPr/>
+        </p:nvSpPr>
+        <p:spPr>
+          <a:xfrm>
+            <a:off x="4709160" y="960120"/>
+            <a:ext cx="4069080" cy="4023360"/>
           </a:xfrm>
           <a:prstGeom prst="rect">
             <a:avLst/>
           </a:prstGeom>
           <a:solidFill>
-            <a:srgbClr val="243560"/>
+            <a:srgbClr val="FFFFFF"/>
+          </a:solidFill>
+          <a:ln w="6350">
+            <a:solidFill>
+              <a:srgbClr val="E2EAF4"/>
+            </a:solidFill>
+            <a:prstDash val="solid"/>
+          </a:ln>
+          <a:effectLst>
+            <a:outerShdw blurRad="101600" dist="38100" dir="8100000" algn="bl" rotWithShape="0">
+              <a:srgbClr val="000000">
+                <a:alpha val="12000"/>
+              </a:srgbClr>
+            </a:outerShdw>
+          </a:effectLst>
+        </p:spPr>
+        <p:txBody>
+          <a:bodyPr/>
+          <a:lstStyle/>
+          <a:p>
+            <a:endParaRPr lang="de-AT"/>
+          </a:p>
+        </p:txBody>
+      </p:sp>
+      <p:sp>
+        <p:nvSpPr>
+          <p:cNvPr id="24" name="Shape 22"/>
+          <p:cNvSpPr/>
+          <p:nvPr/>
+        </p:nvSpPr>
+        <p:spPr>
+          <a:xfrm>
+            <a:off x="4709160" y="960120"/>
+            <a:ext cx="4069080" cy="411480"/>
+          </a:xfrm>
+          <a:prstGeom prst="rect">
+            <a:avLst/>
+          </a:prstGeom>
+          <a:solidFill>
+            <a:srgbClr val="E63946"/>
           </a:solidFill>
           <a:ln w="12700">
             <a:solidFill>
-              <a:srgbClr val="243560"/>
+              <a:srgbClr val="E63946"/>
             </a:solidFill>
             <a:prstDash val="solid"/>
           </a:ln>
@@ -7012,14 +5714,163 @@
       </p:sp>
       <p:sp>
         <p:nvSpPr>
-          <p:cNvPr id="23" name="Text 21"/>
-          <p:cNvSpPr/>
-          <p:nvPr/>
-        </p:nvSpPr>
-        <p:spPr>
-          <a:xfrm>
-            <a:off x="502920" y="3922776"/>
-            <a:ext cx="438912" cy="384048"/>
+          <p:cNvPr id="25" name="Text 23"/>
+          <p:cNvSpPr/>
+          <p:nvPr/>
+        </p:nvSpPr>
+        <p:spPr>
+          <a:xfrm>
+            <a:off x="4846320" y="960120"/>
+            <a:ext cx="3840480" cy="411480"/>
+          </a:xfrm>
+          <a:prstGeom prst="rect">
+            <a:avLst/>
+          </a:prstGeom>
+          <a:noFill/>
+          <a:ln/>
+        </p:spPr>
+        <p:txBody>
+          <a:bodyPr wrap="square" lIns="0" tIns="0" rIns="0" bIns="0" rtlCol="0" anchor="ctr"/>
+          <a:lstStyle/>
+          <a:p>
+            <a:pPr marL="0" indent="0">
+              <a:buNone/>
+            </a:pPr>
+            <a:r>
+              <a:rPr lang="en-US" sz="1200" b="1" dirty="0">
+                <a:solidFill>
+                  <a:srgbClr val="FFFFFF"/>
+                </a:solidFill>
+                <a:latin typeface="Calibri" pitchFamily="34" charset="0"/>
+                <a:ea typeface="Calibri" pitchFamily="34" charset="-122"/>
+                <a:cs typeface="Calibri" pitchFamily="34" charset="-120"/>
+              </a:rPr>
+              <a:t>product-reviews.spec.ts — 3 Tests</a:t>
+            </a:r>
+            <a:endParaRPr lang="en-US" sz="1200" dirty="0"/>
+          </a:p>
+        </p:txBody>
+      </p:sp>
+      <p:sp>
+        <p:nvSpPr>
+          <p:cNvPr id="26" name="Text 24"/>
+          <p:cNvSpPr/>
+          <p:nvPr/>
+        </p:nvSpPr>
+        <p:spPr>
+          <a:xfrm>
+            <a:off x="4846320" y="1444752"/>
+            <a:ext cx="3749040" cy="256032"/>
+          </a:xfrm>
+          <a:prstGeom prst="rect">
+            <a:avLst/>
+          </a:prstGeom>
+          <a:noFill/>
+          <a:ln/>
+        </p:spPr>
+        <p:txBody>
+          <a:bodyPr wrap="square" lIns="0" tIns="0" rIns="0" bIns="0" rtlCol="0" anchor="ctr"/>
+          <a:lstStyle/>
+          <a:p>
+            <a:pPr marL="0" indent="0">
+              <a:buNone/>
+            </a:pPr>
+            <a:r>
+              <a:rPr lang="en-US" sz="1050" i="1" dirty="0">
+                <a:solidFill>
+                  <a:srgbClr val="5C7A9B"/>
+                </a:solidFill>
+                <a:latin typeface="Calibri" pitchFamily="34" charset="0"/>
+                <a:ea typeface="Calibri" pitchFamily="34" charset="-122"/>
+                <a:cs typeface="Calibri" pitchFamily="34" charset="-120"/>
+              </a:rPr>
+              <a:t>Endpunkt: /rest/products/:id/reviews</a:t>
+            </a:r>
+            <a:endParaRPr lang="en-US" sz="1050" dirty="0"/>
+          </a:p>
+        </p:txBody>
+      </p:sp>
+      <p:sp>
+        <p:nvSpPr>
+          <p:cNvPr id="27" name="Shape 25"/>
+          <p:cNvSpPr/>
+          <p:nvPr/>
+        </p:nvSpPr>
+        <p:spPr>
+          <a:xfrm>
+            <a:off x="4846320" y="1783080"/>
+            <a:ext cx="3794760" cy="868680"/>
+          </a:xfrm>
+          <a:prstGeom prst="rect">
+            <a:avLst/>
+          </a:prstGeom>
+          <a:solidFill>
+            <a:srgbClr val="FFFFFF"/>
+          </a:solidFill>
+          <a:ln w="6350">
+            <a:solidFill>
+              <a:srgbClr val="E2EAF4"/>
+            </a:solidFill>
+            <a:prstDash val="solid"/>
+          </a:ln>
+          <a:effectLst>
+            <a:outerShdw blurRad="101600" dist="38100" dir="8100000" algn="bl" rotWithShape="0">
+              <a:srgbClr val="000000">
+                <a:alpha val="12000"/>
+              </a:srgbClr>
+            </a:outerShdw>
+          </a:effectLst>
+        </p:spPr>
+        <p:txBody>
+          <a:bodyPr/>
+          <a:lstStyle/>
+          <a:p>
+            <a:endParaRPr lang="de-AT"/>
+          </a:p>
+        </p:txBody>
+      </p:sp>
+      <p:sp>
+        <p:nvSpPr>
+          <p:cNvPr id="28" name="Shape 26"/>
+          <p:cNvSpPr/>
+          <p:nvPr/>
+        </p:nvSpPr>
+        <p:spPr>
+          <a:xfrm>
+            <a:off x="4846320" y="1783080"/>
+            <a:ext cx="384048" cy="868680"/>
+          </a:xfrm>
+          <a:prstGeom prst="rect">
+            <a:avLst/>
+          </a:prstGeom>
+          <a:solidFill>
+            <a:srgbClr val="E63946"/>
+          </a:solidFill>
+          <a:ln w="12700">
+            <a:solidFill>
+              <a:srgbClr val="E63946"/>
+            </a:solidFill>
+            <a:prstDash val="solid"/>
+          </a:ln>
+        </p:spPr>
+        <p:txBody>
+          <a:bodyPr/>
+          <a:lstStyle/>
+          <a:p>
+            <a:endParaRPr lang="de-AT"/>
+          </a:p>
+        </p:txBody>
+      </p:sp>
+      <p:sp>
+        <p:nvSpPr>
+          <p:cNvPr id="29" name="Text 27"/>
+          <p:cNvSpPr/>
+          <p:nvPr/>
+        </p:nvSpPr>
+        <p:spPr>
+          <a:xfrm>
+            <a:off x="4846320" y="1783080"/>
+            <a:ext cx="384048" cy="868680"/>
           </a:xfrm>
           <a:prstGeom prst="rect">
             <a:avLst/>
@@ -7035,7 +5886,7 @@
               <a:buNone/>
             </a:pPr>
             <a:r>
-              <a:rPr lang="en-US" sz="1300" b="1" dirty="0">
+              <a:rPr lang="en-US" sz="1200" b="1" dirty="0">
                 <a:solidFill>
                   <a:srgbClr val="FFFFFF"/>
                 </a:solidFill>
@@ -7043,22 +5894,22 @@
                 <a:ea typeface="Calibri" pitchFamily="34" charset="-122"/>
                 <a:cs typeface="Calibri" pitchFamily="34" charset="-120"/>
               </a:rPr>
-              <a:t>03</a:t>
-            </a:r>
-            <a:endParaRPr lang="en-US" sz="1300" dirty="0"/>
-          </a:p>
-        </p:txBody>
-      </p:sp>
-      <p:sp>
-        <p:nvSpPr>
-          <p:cNvPr id="24" name="Text 22"/>
-          <p:cNvSpPr/>
-          <p:nvPr/>
-        </p:nvSpPr>
-        <p:spPr>
-          <a:xfrm>
-            <a:off x="1051560" y="3950208"/>
-            <a:ext cx="7498080" cy="274320"/>
+              <a:t>04</a:t>
+            </a:r>
+            <a:endParaRPr lang="en-US" sz="1200" dirty="0"/>
+          </a:p>
+        </p:txBody>
+      </p:sp>
+      <p:sp>
+        <p:nvSpPr>
+          <p:cNvPr id="30" name="Text 28"/>
+          <p:cNvSpPr/>
+          <p:nvPr/>
+        </p:nvSpPr>
+        <p:spPr>
+          <a:xfrm>
+            <a:off x="5312664" y="1874520"/>
+            <a:ext cx="3200400" cy="292608"/>
           </a:xfrm>
           <a:prstGeom prst="rect">
             <a:avLst/>
@@ -7074,30 +5925,30 @@
               <a:buNone/>
             </a:pPr>
             <a:r>
-              <a:rPr lang="en-US" sz="1400" b="1" dirty="0">
+              <a:rPr lang="en-US" sz="1200" b="1" dirty="0">
                 <a:solidFill>
                   <a:srgbClr val="1D3557"/>
                 </a:solidFill>
-                <a:latin typeface="Trebuchet MS" pitchFamily="34" charset="0"/>
-                <a:ea typeface="Trebuchet MS" pitchFamily="34" charset="-122"/>
-                <a:cs typeface="Trebuchet MS" pitchFamily="34" charset="-120"/>
-              </a:rPr>
-              <a:t>Menge eines Artikels aktualisieren</a:t>
-            </a:r>
-            <a:endParaRPr lang="en-US" sz="1400" dirty="0"/>
-          </a:p>
-        </p:txBody>
-      </p:sp>
-      <p:sp>
-        <p:nvSpPr>
-          <p:cNvPr id="25" name="Text 23"/>
-          <p:cNvSpPr/>
-          <p:nvPr/>
-        </p:nvSpPr>
-        <p:spPr>
-          <a:xfrm>
-            <a:off x="1051560" y="4261104"/>
-            <a:ext cx="7498080" cy="256032"/>
+                <a:latin typeface="Calibri" pitchFamily="34" charset="0"/>
+                <a:ea typeface="Calibri" pitchFamily="34" charset="-122"/>
+                <a:cs typeface="Calibri" pitchFamily="34" charset="-120"/>
+              </a:rPr>
+              <a:t>Review einreichen</a:t>
+            </a:r>
+            <a:endParaRPr lang="en-US" sz="1200" dirty="0"/>
+          </a:p>
+        </p:txBody>
+      </p:sp>
+      <p:sp>
+        <p:nvSpPr>
+          <p:cNvPr id="31" name="Text 29"/>
+          <p:cNvSpPr/>
+          <p:nvPr/>
+        </p:nvSpPr>
+        <p:spPr>
+          <a:xfrm>
+            <a:off x="5312664" y="2203704"/>
+            <a:ext cx="3200400" cy="347472"/>
           </a:xfrm>
           <a:prstGeom prst="rect">
             <a:avLst/>
@@ -7115,13 +5966,201 @@
             <a:r>
               <a:rPr lang="en-US" sz="1100" dirty="0">
                 <a:solidFill>
+                  <a:srgbClr val="5C7A9B"/>
+                </a:solidFill>
+                <a:latin typeface="Calibri" pitchFamily="34" charset="0"/>
+                <a:ea typeface="Calibri" pitchFamily="34" charset="-122"/>
+                <a:cs typeface="Calibri" pitchFamily="34" charset="-120"/>
+              </a:rPr>
+              <a:t>PUT → 201, GET bestätigt Review in der Liste</a:t>
+            </a:r>
+            <a:endParaRPr lang="en-US" sz="1100" dirty="0"/>
+          </a:p>
+        </p:txBody>
+      </p:sp>
+      <p:sp>
+        <p:nvSpPr>
+          <p:cNvPr id="32" name="Shape 30"/>
+          <p:cNvSpPr/>
+          <p:nvPr/>
+        </p:nvSpPr>
+        <p:spPr>
+          <a:xfrm>
+            <a:off x="4846320" y="2788920"/>
+            <a:ext cx="3794760" cy="868680"/>
+          </a:xfrm>
+          <a:prstGeom prst="rect">
+            <a:avLst/>
+          </a:prstGeom>
+          <a:solidFill>
+            <a:srgbClr val="FFFFFF"/>
+          </a:solidFill>
+          <a:ln w="6350">
+            <a:solidFill>
+              <a:srgbClr val="E2EAF4"/>
+            </a:solidFill>
+            <a:prstDash val="solid"/>
+          </a:ln>
+          <a:effectLst>
+            <a:outerShdw blurRad="101600" dist="38100" dir="8100000" algn="bl" rotWithShape="0">
+              <a:srgbClr val="000000">
+                <a:alpha val="12000"/>
+              </a:srgbClr>
+            </a:outerShdw>
+          </a:effectLst>
+        </p:spPr>
+        <p:txBody>
+          <a:bodyPr/>
+          <a:lstStyle/>
+          <a:p>
+            <a:endParaRPr lang="de-AT"/>
+          </a:p>
+        </p:txBody>
+      </p:sp>
+      <p:sp>
+        <p:nvSpPr>
+          <p:cNvPr id="33" name="Shape 31"/>
+          <p:cNvSpPr/>
+          <p:nvPr/>
+        </p:nvSpPr>
+        <p:spPr>
+          <a:xfrm>
+            <a:off x="4846320" y="2788920"/>
+            <a:ext cx="384048" cy="868680"/>
+          </a:xfrm>
+          <a:prstGeom prst="rect">
+            <a:avLst/>
+          </a:prstGeom>
+          <a:solidFill>
+            <a:srgbClr val="E63946"/>
+          </a:solidFill>
+          <a:ln w="12700">
+            <a:solidFill>
+              <a:srgbClr val="E63946"/>
+            </a:solidFill>
+            <a:prstDash val="solid"/>
+          </a:ln>
+        </p:spPr>
+        <p:txBody>
+          <a:bodyPr/>
+          <a:lstStyle/>
+          <a:p>
+            <a:endParaRPr lang="de-AT"/>
+          </a:p>
+        </p:txBody>
+      </p:sp>
+      <p:sp>
+        <p:nvSpPr>
+          <p:cNvPr id="34" name="Text 32"/>
+          <p:cNvSpPr/>
+          <p:nvPr/>
+        </p:nvSpPr>
+        <p:spPr>
+          <a:xfrm>
+            <a:off x="4846320" y="2788920"/>
+            <a:ext cx="384048" cy="868680"/>
+          </a:xfrm>
+          <a:prstGeom prst="rect">
+            <a:avLst/>
+          </a:prstGeom>
+          <a:noFill/>
+          <a:ln/>
+        </p:spPr>
+        <p:txBody>
+          <a:bodyPr wrap="square" lIns="0" tIns="0" rIns="0" bIns="0" rtlCol="0" anchor="ctr"/>
+          <a:lstStyle/>
+          <a:p>
+            <a:pPr marL="0" indent="0" algn="ctr">
+              <a:buNone/>
+            </a:pPr>
+            <a:r>
+              <a:rPr lang="en-US" sz="1200" b="1" dirty="0">
+                <a:solidFill>
+                  <a:srgbClr val="FFFFFF"/>
+                </a:solidFill>
+                <a:latin typeface="Calibri" pitchFamily="34" charset="0"/>
+                <a:ea typeface="Calibri" pitchFamily="34" charset="-122"/>
+                <a:cs typeface="Calibri" pitchFamily="34" charset="-120"/>
+              </a:rPr>
+              <a:t>05</a:t>
+            </a:r>
+            <a:endParaRPr lang="en-US" sz="1200" dirty="0"/>
+          </a:p>
+        </p:txBody>
+      </p:sp>
+      <p:sp>
+        <p:nvSpPr>
+          <p:cNvPr id="35" name="Text 33"/>
+          <p:cNvSpPr/>
+          <p:nvPr/>
+        </p:nvSpPr>
+        <p:spPr>
+          <a:xfrm>
+            <a:off x="5312664" y="2880360"/>
+            <a:ext cx="3200400" cy="292608"/>
+          </a:xfrm>
+          <a:prstGeom prst="rect">
+            <a:avLst/>
+          </a:prstGeom>
+          <a:noFill/>
+          <a:ln/>
+        </p:spPr>
+        <p:txBody>
+          <a:bodyPr wrap="square" lIns="0" tIns="0" rIns="0" bIns="0" rtlCol="0" anchor="ctr"/>
+          <a:lstStyle/>
+          <a:p>
+            <a:pPr marL="0" indent="0">
+              <a:buNone/>
+            </a:pPr>
+            <a:r>
+              <a:rPr lang="en-US" sz="1200" b="1" dirty="0">
+                <a:solidFill>
                   <a:srgbClr val="1D3557"/>
                 </a:solidFill>
                 <a:latin typeface="Calibri" pitchFamily="34" charset="0"/>
                 <a:ea typeface="Calibri" pitchFamily="34" charset="-122"/>
                 <a:cs typeface="Calibri" pitchFamily="34" charset="-120"/>
               </a:rPr>
-              <a:t>Was: Artikel anlegen (quantity: 2), dann PUT /api/BasketItems/:id mit quantity: 5 → Response enthält aktualisierte Menge.</a:t>
+              <a:t>Review bearbeiten (Auth)</a:t>
+            </a:r>
+            <a:endParaRPr lang="en-US" sz="1200" dirty="0"/>
+          </a:p>
+        </p:txBody>
+      </p:sp>
+      <p:sp>
+        <p:nvSpPr>
+          <p:cNvPr id="36" name="Text 34"/>
+          <p:cNvSpPr/>
+          <p:nvPr/>
+        </p:nvSpPr>
+        <p:spPr>
+          <a:xfrm>
+            <a:off x="5312664" y="3209544"/>
+            <a:ext cx="3200400" cy="347472"/>
+          </a:xfrm>
+          <a:prstGeom prst="rect">
+            <a:avLst/>
+          </a:prstGeom>
+          <a:noFill/>
+          <a:ln/>
+        </p:spPr>
+        <p:txBody>
+          <a:bodyPr wrap="square" lIns="0" tIns="0" rIns="0" bIns="0" rtlCol="0" anchor="ctr"/>
+          <a:lstStyle/>
+          <a:p>
+            <a:pPr marL="0" indent="0">
+              <a:buNone/>
+            </a:pPr>
+            <a:r>
+              <a:rPr lang="en-US" sz="1100" dirty="0">
+                <a:solidFill>
+                  <a:srgbClr val="5C7A9B"/>
+                </a:solidFill>
+                <a:latin typeface="Calibri" pitchFamily="34" charset="0"/>
+                <a:ea typeface="Calibri" pitchFamily="34" charset="-122"/>
+                <a:cs typeface="Calibri" pitchFamily="34" charset="-120"/>
+              </a:rPr>
+              <a:t>PATCH mit Token → 200, aktualisierter Text in Response</a:t>
             </a:r>
             <a:endParaRPr lang="en-US" sz="1100" dirty="0"/>
           </a:p>
@@ -7129,14 +6168,124 @@
       </p:sp>
       <p:sp>
         <p:nvSpPr>
-          <p:cNvPr id="26" name="Text 24"/>
-          <p:cNvSpPr/>
-          <p:nvPr/>
-        </p:nvSpPr>
-        <p:spPr>
-          <a:xfrm>
-            <a:off x="1051560" y="4498848"/>
-            <a:ext cx="7498080" cy="228600"/>
+          <p:cNvPr id="37" name="Shape 35"/>
+          <p:cNvSpPr/>
+          <p:nvPr/>
+        </p:nvSpPr>
+        <p:spPr>
+          <a:xfrm>
+            <a:off x="4846320" y="3794760"/>
+            <a:ext cx="3794760" cy="868680"/>
+          </a:xfrm>
+          <a:prstGeom prst="rect">
+            <a:avLst/>
+          </a:prstGeom>
+          <a:solidFill>
+            <a:srgbClr val="FFFFFF"/>
+          </a:solidFill>
+          <a:ln w="6350">
+            <a:solidFill>
+              <a:srgbClr val="E2EAF4"/>
+            </a:solidFill>
+            <a:prstDash val="solid"/>
+          </a:ln>
+          <a:effectLst>
+            <a:outerShdw blurRad="101600" dist="38100" dir="8100000" algn="bl" rotWithShape="0">
+              <a:srgbClr val="000000">
+                <a:alpha val="12000"/>
+              </a:srgbClr>
+            </a:outerShdw>
+          </a:effectLst>
+        </p:spPr>
+        <p:txBody>
+          <a:bodyPr/>
+          <a:lstStyle/>
+          <a:p>
+            <a:endParaRPr lang="de-AT"/>
+          </a:p>
+        </p:txBody>
+      </p:sp>
+      <p:sp>
+        <p:nvSpPr>
+          <p:cNvPr id="38" name="Shape 36"/>
+          <p:cNvSpPr/>
+          <p:nvPr/>
+        </p:nvSpPr>
+        <p:spPr>
+          <a:xfrm>
+            <a:off x="4846320" y="3794760"/>
+            <a:ext cx="384048" cy="868680"/>
+          </a:xfrm>
+          <a:prstGeom prst="rect">
+            <a:avLst/>
+          </a:prstGeom>
+          <a:solidFill>
+            <a:srgbClr val="E63946"/>
+          </a:solidFill>
+          <a:ln w="12700">
+            <a:solidFill>
+              <a:srgbClr val="E63946"/>
+            </a:solidFill>
+            <a:prstDash val="solid"/>
+          </a:ln>
+        </p:spPr>
+        <p:txBody>
+          <a:bodyPr/>
+          <a:lstStyle/>
+          <a:p>
+            <a:endParaRPr lang="de-AT"/>
+          </a:p>
+        </p:txBody>
+      </p:sp>
+      <p:sp>
+        <p:nvSpPr>
+          <p:cNvPr id="39" name="Text 37"/>
+          <p:cNvSpPr/>
+          <p:nvPr/>
+        </p:nvSpPr>
+        <p:spPr>
+          <a:xfrm>
+            <a:off x="4846320" y="3794760"/>
+            <a:ext cx="384048" cy="868680"/>
+          </a:xfrm>
+          <a:prstGeom prst="rect">
+            <a:avLst/>
+          </a:prstGeom>
+          <a:noFill/>
+          <a:ln/>
+        </p:spPr>
+        <p:txBody>
+          <a:bodyPr wrap="square" lIns="0" tIns="0" rIns="0" bIns="0" rtlCol="0" anchor="ctr"/>
+          <a:lstStyle/>
+          <a:p>
+            <a:pPr marL="0" indent="0" algn="ctr">
+              <a:buNone/>
+            </a:pPr>
+            <a:r>
+              <a:rPr lang="en-US" sz="1200" b="1" dirty="0">
+                <a:solidFill>
+                  <a:srgbClr val="FFFFFF"/>
+                </a:solidFill>
+                <a:latin typeface="Calibri" pitchFamily="34" charset="0"/>
+                <a:ea typeface="Calibri" pitchFamily="34" charset="-122"/>
+                <a:cs typeface="Calibri" pitchFamily="34" charset="-120"/>
+              </a:rPr>
+              <a:t>06</a:t>
+            </a:r>
+            <a:endParaRPr lang="en-US" sz="1200" dirty="0"/>
+          </a:p>
+        </p:txBody>
+      </p:sp>
+      <p:sp>
+        <p:nvSpPr>
+          <p:cNvPr id="40" name="Text 38"/>
+          <p:cNvSpPr/>
+          <p:nvPr/>
+        </p:nvSpPr>
+        <p:spPr>
+          <a:xfrm>
+            <a:off x="5312664" y="3886200"/>
+            <a:ext cx="3200400" cy="292608"/>
           </a:xfrm>
           <a:prstGeom prst="rect">
             <a:avLst/>
@@ -7152,7 +6301,46 @@
               <a:buNone/>
             </a:pPr>
             <a:r>
-              <a:rPr lang="en-US" sz="1050" i="1" dirty="0">
+              <a:rPr lang="en-US" sz="1200" b="1" dirty="0">
+                <a:solidFill>
+                  <a:srgbClr val="1D3557"/>
+                </a:solidFill>
+                <a:latin typeface="Calibri" pitchFamily="34" charset="0"/>
+                <a:ea typeface="Calibri" pitchFamily="34" charset="-122"/>
+                <a:cs typeface="Calibri" pitchFamily="34" charset="-120"/>
+              </a:rPr>
+              <a:t>Review bearbeiten (kein Auth)</a:t>
+            </a:r>
+            <a:endParaRPr lang="en-US" sz="1200" dirty="0"/>
+          </a:p>
+        </p:txBody>
+      </p:sp>
+      <p:sp>
+        <p:nvSpPr>
+          <p:cNvPr id="41" name="Text 39"/>
+          <p:cNvSpPr/>
+          <p:nvPr/>
+        </p:nvSpPr>
+        <p:spPr>
+          <a:xfrm>
+            <a:off x="5312664" y="4215384"/>
+            <a:ext cx="3200400" cy="347472"/>
+          </a:xfrm>
+          <a:prstGeom prst="rect">
+            <a:avLst/>
+          </a:prstGeom>
+          <a:noFill/>
+          <a:ln/>
+        </p:spPr>
+        <p:txBody>
+          <a:bodyPr wrap="square" lIns="0" tIns="0" rIns="0" bIns="0" rtlCol="0" anchor="ctr"/>
+          <a:lstStyle/>
+          <a:p>
+            <a:pPr marL="0" indent="0">
+              <a:buNone/>
+            </a:pPr>
+            <a:r>
+              <a:rPr lang="en-US" sz="1100" dirty="0">
                 <a:solidFill>
                   <a:srgbClr val="5C7A9B"/>
                 </a:solidFill>
@@ -7160,9 +6348,9 @@
                 <a:ea typeface="Calibri" pitchFamily="34" charset="-122"/>
                 <a:cs typeface="Calibri" pitchFamily="34" charset="-120"/>
               </a:rPr>
-              <a:t>Warum: Mengenänderung ist kritischer Business-Flow vor dem Checkout.</a:t>
-            </a:r>
-            <a:endParaRPr lang="en-US" sz="1050" dirty="0"/>
+              <a:t>PATCH ohne Token → HTTP 401 erwartet</a:t>
+            </a:r>
+            <a:endParaRPr lang="en-US" sz="1100" dirty="0"/>
           </a:p>
         </p:txBody>
       </p:sp>
@@ -7174,7 +6362,7 @@
 </p:sld>
 </file>
 
-<file path=ppt/slides/slide7.xml><?xml version="1.0" encoding="utf-8"?>
+<file path=ppt/slides/slide6.xml><?xml version="1.0" encoding="utf-8"?>
 <p:sld xmlns:a="http://schemas.openxmlformats.org/drawingml/2006/main" xmlns:r="http://schemas.openxmlformats.org/officeDocument/2006/relationships" xmlns:p="http://schemas.openxmlformats.org/presentationml/2006/main">
   <p:cSld name="Slide 7">
     <p:bg>
@@ -7232,7 +6420,7 @@
                 <a:ea typeface="Trebuchet MS" pitchFamily="34" charset="-122"/>
                 <a:cs typeface="Trebuchet MS" pitchFamily="34" charset="-120"/>
               </a:rPr>
-              <a:t>E2E Tests (2×) — Shopping Cart</a:t>
+              <a:t>E2E Tests (4×) — Cart &amp; Login</a:t>
             </a:r>
             <a:endParaRPr lang="en-US" sz="3000" dirty="0"/>
           </a:p>
@@ -7278,8 +6466,8 @@
         </p:nvSpPr>
         <p:spPr>
           <a:xfrm>
-            <a:off x="365760" y="1005840"/>
-            <a:ext cx="8412480" cy="594360"/>
+            <a:off x="365760" y="960120"/>
+            <a:ext cx="8412480" cy="502920"/>
           </a:xfrm>
           <a:prstGeom prst="rect">
             <a:avLst/>
@@ -7317,8 +6505,8 @@
         </p:nvSpPr>
         <p:spPr>
           <a:xfrm>
-            <a:off x="548640" y="1060704"/>
-            <a:ext cx="8046720" cy="438912"/>
+            <a:off x="548640" y="1005840"/>
+            <a:ext cx="8046720" cy="384048"/>
           </a:xfrm>
           <a:prstGeom prst="rect">
             <a:avLst/>
@@ -7342,7 +6530,7 @@
                 <a:ea typeface="Calibri" pitchFamily="34" charset="-122"/>
                 <a:cs typeface="Calibri" pitchFamily="34" charset="-120"/>
               </a:rPr>
-              <a:t>Browser: Firefox (Playwright). Cookie-Seeding deaktiviert Consent-Dialoge vor jedem Test — kein manueller Klick nötig.</a:t>
+              <a:t>Browser: Firefox (Playwright). Cookie-Seeding deaktiviert Consent-Dialoge vor jedem Test.</a:t>
             </a:r>
             <a:endParaRPr lang="en-US" sz="1200" dirty="0"/>
           </a:p>
@@ -7356,8 +6544,8 @@
         </p:nvSpPr>
         <p:spPr>
           <a:xfrm>
-            <a:off x="365760" y="1783080"/>
-            <a:ext cx="4206240" cy="3200400"/>
+            <a:off x="365760" y="1627632"/>
+            <a:ext cx="4160520" cy="3401568"/>
           </a:xfrm>
           <a:prstGeom prst="rect">
             <a:avLst/>
@@ -7395,8 +6583,8 @@
         </p:nvSpPr>
         <p:spPr>
           <a:xfrm>
-            <a:off x="365760" y="1783080"/>
-            <a:ext cx="4206240" cy="438912"/>
+            <a:off x="365760" y="1627632"/>
+            <a:ext cx="4160520" cy="384048"/>
           </a:xfrm>
           <a:prstGeom prst="rect">
             <a:avLst/>
@@ -7427,8 +6615,8 @@
         </p:nvSpPr>
         <p:spPr>
           <a:xfrm>
-            <a:off x="502920" y="1783080"/>
-            <a:ext cx="3931920" cy="438912"/>
+            <a:off x="502920" y="1627632"/>
+            <a:ext cx="3931920" cy="384048"/>
           </a:xfrm>
           <a:prstGeom prst="rect">
             <a:avLst/>
@@ -7452,7 +6640,7 @@
                 <a:ea typeface="Calibri" pitchFamily="34" charset="-122"/>
                 <a:cs typeface="Calibri" pitchFamily="34" charset="-120"/>
               </a:rPr>
-              <a:t>Test 1 — Artikel hinzufügen &amp; Basket prüfen</a:t>
+              <a:t>cart.spec.ts — 2 Tests</a:t>
             </a:r>
             <a:endParaRPr lang="en-US" sz="1200" dirty="0"/>
           </a:p>
@@ -7466,8 +6654,8 @@
         </p:nvSpPr>
         <p:spPr>
           <a:xfrm>
-            <a:off x="502920" y="2359152"/>
-            <a:ext cx="347472" cy="457200"/>
+            <a:off x="502920" y="2103120"/>
+            <a:ext cx="347472" cy="822960"/>
           </a:xfrm>
           <a:prstGeom prst="rect">
             <a:avLst/>
@@ -7498,8 +6686,8 @@
         </p:nvSpPr>
         <p:spPr>
           <a:xfrm>
-            <a:off x="502920" y="2359152"/>
-            <a:ext cx="347472" cy="457200"/>
+            <a:off x="502920" y="2103120"/>
+            <a:ext cx="347472" cy="822960"/>
           </a:xfrm>
           <a:prstGeom prst="rect">
             <a:avLst/>
@@ -7515,15 +6703,54 @@
               <a:buNone/>
             </a:pPr>
             <a:r>
+              <a:rPr lang="en-US" sz="1300" b="1" dirty="0">
+                <a:solidFill>
+                  <a:srgbClr val="FFFFFF"/>
+                </a:solidFill>
+                <a:latin typeface="Calibri" pitchFamily="34" charset="0"/>
+                <a:ea typeface="Calibri" pitchFamily="34" charset="-122"/>
+                <a:cs typeface="Calibri" pitchFamily="34" charset="-120"/>
+              </a:rPr>
+              <a:t>1</a:t>
+            </a:r>
+            <a:endParaRPr lang="en-US" sz="1300" dirty="0"/>
+          </a:p>
+        </p:txBody>
+      </p:sp>
+      <p:sp>
+        <p:nvSpPr>
+          <p:cNvPr id="11" name="Text 9"/>
+          <p:cNvSpPr/>
+          <p:nvPr/>
+        </p:nvSpPr>
+        <p:spPr>
+          <a:xfrm>
+            <a:off x="932688" y="2157984"/>
+            <a:ext cx="3474720" cy="274320"/>
+          </a:xfrm>
+          <a:prstGeom prst="rect">
+            <a:avLst/>
+          </a:prstGeom>
+          <a:noFill/>
+          <a:ln/>
+        </p:spPr>
+        <p:txBody>
+          <a:bodyPr wrap="square" lIns="0" tIns="0" rIns="0" bIns="0" rtlCol="0" anchor="ctr"/>
+          <a:lstStyle/>
+          <a:p>
+            <a:pPr marL="0" indent="0">
+              <a:buNone/>
+            </a:pPr>
+            <a:r>
               <a:rPr lang="en-US" sz="1200" b="1" dirty="0">
                 <a:solidFill>
-                  <a:srgbClr val="FFFFFF"/>
-                </a:solidFill>
-                <a:latin typeface="Calibri" pitchFamily="34" charset="0"/>
-                <a:ea typeface="Calibri" pitchFamily="34" charset="-122"/>
-                <a:cs typeface="Calibri" pitchFamily="34" charset="-120"/>
-              </a:rPr>
-              <a:t>1</a:t>
+                  <a:srgbClr val="1D3557"/>
+                </a:solidFill>
+                <a:latin typeface="Calibri" pitchFamily="34" charset="0"/>
+                <a:ea typeface="Calibri" pitchFamily="34" charset="-122"/>
+                <a:cs typeface="Calibri" pitchFamily="34" charset="-120"/>
+              </a:rPr>
+              <a:t>Artikel hinzufügen &amp; prüfen</a:t>
             </a:r>
             <a:endParaRPr lang="en-US" sz="1200" dirty="0"/>
           </a:p>
@@ -7531,14 +6758,14 @@
       </p:sp>
       <p:sp>
         <p:nvSpPr>
-          <p:cNvPr id="11" name="Text 9"/>
-          <p:cNvSpPr/>
-          <p:nvPr/>
-        </p:nvSpPr>
-        <p:spPr>
-          <a:xfrm>
-            <a:off x="932688" y="2404872"/>
-            <a:ext cx="3474720" cy="384048"/>
+          <p:cNvPr id="12" name="Text 10"/>
+          <p:cNvSpPr/>
+          <p:nvPr/>
+        </p:nvSpPr>
+        <p:spPr>
+          <a:xfrm>
+            <a:off x="932688" y="2450592"/>
+            <a:ext cx="3474720" cy="402336"/>
           </a:xfrm>
           <a:prstGeom prst="rect">
             <a:avLst/>
@@ -7554,30 +6781,30 @@
               <a:buNone/>
             </a:pPr>
             <a:r>
-              <a:rPr lang="en-US" sz="1200" dirty="0">
-                <a:solidFill>
-                  <a:srgbClr val="1D3557"/>
-                </a:solidFill>
-                <a:latin typeface="Calibri" pitchFamily="34" charset="0"/>
-                <a:ea typeface="Calibri" pitchFamily="34" charset="-122"/>
-                <a:cs typeface="Calibri" pitchFamily="34" charset="-120"/>
-              </a:rPr>
-              <a:t>Suche nach "Apple Juice"</a:t>
-            </a:r>
-            <a:endParaRPr lang="en-US" sz="1200" dirty="0"/>
-          </a:p>
-        </p:txBody>
-      </p:sp>
-      <p:sp>
-        <p:nvSpPr>
-          <p:cNvPr id="12" name="Shape 10"/>
-          <p:cNvSpPr/>
-          <p:nvPr/>
-        </p:nvSpPr>
-        <p:spPr>
-          <a:xfrm>
-            <a:off x="502920" y="3017520"/>
-            <a:ext cx="347472" cy="457200"/>
+              <a:rPr lang="en-US" sz="1100" dirty="0">
+                <a:solidFill>
+                  <a:srgbClr val="5C7A9B"/>
+                </a:solidFill>
+                <a:latin typeface="Calibri" pitchFamily="34" charset="0"/>
+                <a:ea typeface="Calibri" pitchFamily="34" charset="-122"/>
+                <a:cs typeface="Calibri" pitchFamily="34" charset="-120"/>
+              </a:rPr>
+              <a:t>Suche → 2× add → Badge "2" → Basket: Inhalt, Menge, Preis vorhanden</a:t>
+            </a:r>
+            <a:endParaRPr lang="en-US" sz="1100" dirty="0"/>
+          </a:p>
+        </p:txBody>
+      </p:sp>
+      <p:sp>
+        <p:nvSpPr>
+          <p:cNvPr id="13" name="Shape 11"/>
+          <p:cNvSpPr/>
+          <p:nvPr/>
+        </p:nvSpPr>
+        <p:spPr>
+          <a:xfrm>
+            <a:off x="502920" y="3127248"/>
+            <a:ext cx="347472" cy="822960"/>
           </a:xfrm>
           <a:prstGeom prst="rect">
             <a:avLst/>
@@ -7602,14 +6829,14 @@
       </p:sp>
       <p:sp>
         <p:nvSpPr>
-          <p:cNvPr id="13" name="Text 11"/>
-          <p:cNvSpPr/>
-          <p:nvPr/>
-        </p:nvSpPr>
-        <p:spPr>
-          <a:xfrm>
-            <a:off x="502920" y="3017520"/>
-            <a:ext cx="347472" cy="457200"/>
+          <p:cNvPr id="14" name="Text 12"/>
+          <p:cNvSpPr/>
+          <p:nvPr/>
+        </p:nvSpPr>
+        <p:spPr>
+          <a:xfrm>
+            <a:off x="502920" y="3127248"/>
+            <a:ext cx="347472" cy="822960"/>
           </a:xfrm>
           <a:prstGeom prst="rect">
             <a:avLst/>
@@ -7625,15 +6852,54 @@
               <a:buNone/>
             </a:pPr>
             <a:r>
+              <a:rPr lang="en-US" sz="1300" b="1" dirty="0">
+                <a:solidFill>
+                  <a:srgbClr val="FFFFFF"/>
+                </a:solidFill>
+                <a:latin typeface="Calibri" pitchFamily="34" charset="0"/>
+                <a:ea typeface="Calibri" pitchFamily="34" charset="-122"/>
+                <a:cs typeface="Calibri" pitchFamily="34" charset="-120"/>
+              </a:rPr>
+              <a:t>2</a:t>
+            </a:r>
+            <a:endParaRPr lang="en-US" sz="1300" dirty="0"/>
+          </a:p>
+        </p:txBody>
+      </p:sp>
+      <p:sp>
+        <p:nvSpPr>
+          <p:cNvPr id="15" name="Text 13"/>
+          <p:cNvSpPr/>
+          <p:nvPr/>
+        </p:nvSpPr>
+        <p:spPr>
+          <a:xfrm>
+            <a:off x="932688" y="3182112"/>
+            <a:ext cx="3474720" cy="274320"/>
+          </a:xfrm>
+          <a:prstGeom prst="rect">
+            <a:avLst/>
+          </a:prstGeom>
+          <a:noFill/>
+          <a:ln/>
+        </p:spPr>
+        <p:txBody>
+          <a:bodyPr wrap="square" lIns="0" tIns="0" rIns="0" bIns="0" rtlCol="0" anchor="ctr"/>
+          <a:lstStyle/>
+          <a:p>
+            <a:pPr marL="0" indent="0">
+              <a:buNone/>
+            </a:pPr>
+            <a:r>
               <a:rPr lang="en-US" sz="1200" b="1" dirty="0">
                 <a:solidFill>
-                  <a:srgbClr val="FFFFFF"/>
-                </a:solidFill>
-                <a:latin typeface="Calibri" pitchFamily="34" charset="0"/>
-                <a:ea typeface="Calibri" pitchFamily="34" charset="-122"/>
-                <a:cs typeface="Calibri" pitchFamily="34" charset="-120"/>
-              </a:rPr>
-              <a:t>2</a:t>
+                  <a:srgbClr val="1D3557"/>
+                </a:solidFill>
+                <a:latin typeface="Calibri" pitchFamily="34" charset="0"/>
+                <a:ea typeface="Calibri" pitchFamily="34" charset="-122"/>
+                <a:cs typeface="Calibri" pitchFamily="34" charset="-120"/>
+              </a:rPr>
+              <a:t>Artikel entfernen</a:t>
             </a:r>
             <a:endParaRPr lang="en-US" sz="1200" dirty="0"/>
           </a:p>
@@ -7641,14 +6907,14 @@
       </p:sp>
       <p:sp>
         <p:nvSpPr>
-          <p:cNvPr id="14" name="Text 12"/>
-          <p:cNvSpPr/>
-          <p:nvPr/>
-        </p:nvSpPr>
-        <p:spPr>
-          <a:xfrm>
-            <a:off x="932688" y="3063240"/>
-            <a:ext cx="3474720" cy="384048"/>
+          <p:cNvPr id="16" name="Text 14"/>
+          <p:cNvSpPr/>
+          <p:nvPr/>
+        </p:nvSpPr>
+        <p:spPr>
+          <a:xfrm>
+            <a:off x="932688" y="3474720"/>
+            <a:ext cx="3474720" cy="402336"/>
           </a:xfrm>
           <a:prstGeom prst="rect">
             <a:avLst/>
@@ -7664,250 +6930,30 @@
               <a:buNone/>
             </a:pPr>
             <a:r>
-              <a:rPr lang="en-US" sz="1200" dirty="0">
-                <a:solidFill>
-                  <a:srgbClr val="1D3557"/>
-                </a:solidFill>
-                <a:latin typeface="Calibri" pitchFamily="34" charset="0"/>
-                <a:ea typeface="Calibri" pitchFamily="34" charset="-122"/>
-                <a:cs typeface="Calibri" pitchFamily="34" charset="-120"/>
-              </a:rPr>
-              <a:t>Add-Button 2× klicken</a:t>
-            </a:r>
-            <a:endParaRPr lang="en-US" sz="1200" dirty="0"/>
-          </a:p>
-        </p:txBody>
-      </p:sp>
-      <p:sp>
-        <p:nvSpPr>
-          <p:cNvPr id="15" name="Shape 13"/>
-          <p:cNvSpPr/>
-          <p:nvPr/>
-        </p:nvSpPr>
-        <p:spPr>
-          <a:xfrm>
-            <a:off x="502920" y="3675888"/>
-            <a:ext cx="347472" cy="457200"/>
-          </a:xfrm>
-          <a:prstGeom prst="rect">
-            <a:avLst/>
-          </a:prstGeom>
-          <a:solidFill>
-            <a:srgbClr val="243560"/>
-          </a:solidFill>
-          <a:ln w="12700">
-            <a:solidFill>
-              <a:srgbClr val="243560"/>
-            </a:solidFill>
-            <a:prstDash val="solid"/>
-          </a:ln>
-        </p:spPr>
-        <p:txBody>
-          <a:bodyPr/>
-          <a:lstStyle/>
-          <a:p>
-            <a:endParaRPr lang="de-AT"/>
-          </a:p>
-        </p:txBody>
-      </p:sp>
-      <p:sp>
-        <p:nvSpPr>
-          <p:cNvPr id="16" name="Text 14"/>
-          <p:cNvSpPr/>
-          <p:nvPr/>
-        </p:nvSpPr>
-        <p:spPr>
-          <a:xfrm>
-            <a:off x="502920" y="3675888"/>
-            <a:ext cx="347472" cy="457200"/>
-          </a:xfrm>
-          <a:prstGeom prst="rect">
-            <a:avLst/>
-          </a:prstGeom>
-          <a:noFill/>
-          <a:ln/>
-        </p:spPr>
-        <p:txBody>
-          <a:bodyPr wrap="square" lIns="0" tIns="0" rIns="0" bIns="0" rtlCol="0" anchor="ctr"/>
-          <a:lstStyle/>
-          <a:p>
-            <a:pPr marL="0" indent="0" algn="ctr">
-              <a:buNone/>
-            </a:pPr>
-            <a:r>
-              <a:rPr lang="en-US" sz="1200" b="1" dirty="0">
-                <a:solidFill>
-                  <a:srgbClr val="FFFFFF"/>
-                </a:solidFill>
-                <a:latin typeface="Calibri" pitchFamily="34" charset="0"/>
-                <a:ea typeface="Calibri" pitchFamily="34" charset="-122"/>
-                <a:cs typeface="Calibri" pitchFamily="34" charset="-120"/>
-              </a:rPr>
-              <a:t>3</a:t>
-            </a:r>
-            <a:endParaRPr lang="en-US" sz="1200" dirty="0"/>
-          </a:p>
-        </p:txBody>
-      </p:sp>
-      <p:sp>
-        <p:nvSpPr>
-          <p:cNvPr id="17" name="Text 15"/>
-          <p:cNvSpPr/>
-          <p:nvPr/>
-        </p:nvSpPr>
-        <p:spPr>
-          <a:xfrm>
-            <a:off x="932688" y="3721608"/>
-            <a:ext cx="3474720" cy="384048"/>
-          </a:xfrm>
-          <a:prstGeom prst="rect">
-            <a:avLst/>
-          </a:prstGeom>
-          <a:noFill/>
-          <a:ln/>
-        </p:spPr>
-        <p:txBody>
-          <a:bodyPr wrap="square" lIns="0" tIns="0" rIns="0" bIns="0" rtlCol="0" anchor="ctr"/>
-          <a:lstStyle/>
-          <a:p>
-            <a:pPr marL="0" indent="0">
-              <a:buNone/>
-            </a:pPr>
-            <a:r>
-              <a:rPr lang="en-US" sz="1200" dirty="0">
-                <a:solidFill>
-                  <a:srgbClr val="1D3557"/>
-                </a:solidFill>
-                <a:latin typeface="Calibri" pitchFamily="34" charset="0"/>
-                <a:ea typeface="Calibri" pitchFamily="34" charset="-122"/>
-                <a:cs typeface="Calibri" pitchFamily="34" charset="-120"/>
-              </a:rPr>
-              <a:t>Badge zeigt "2" → State korrekt</a:t>
-            </a:r>
-            <a:endParaRPr lang="en-US" sz="1200" dirty="0"/>
-          </a:p>
-        </p:txBody>
-      </p:sp>
-      <p:sp>
-        <p:nvSpPr>
-          <p:cNvPr id="18" name="Shape 16"/>
-          <p:cNvSpPr/>
-          <p:nvPr/>
-        </p:nvSpPr>
-        <p:spPr>
-          <a:xfrm>
-            <a:off x="502920" y="4334256"/>
-            <a:ext cx="347472" cy="457200"/>
-          </a:xfrm>
-          <a:prstGeom prst="rect">
-            <a:avLst/>
-          </a:prstGeom>
-          <a:solidFill>
-            <a:srgbClr val="243560"/>
-          </a:solidFill>
-          <a:ln w="12700">
-            <a:solidFill>
-              <a:srgbClr val="243560"/>
-            </a:solidFill>
-            <a:prstDash val="solid"/>
-          </a:ln>
-        </p:spPr>
-        <p:txBody>
-          <a:bodyPr/>
-          <a:lstStyle/>
-          <a:p>
-            <a:endParaRPr lang="de-AT"/>
-          </a:p>
-        </p:txBody>
-      </p:sp>
-      <p:sp>
-        <p:nvSpPr>
-          <p:cNvPr id="19" name="Text 17"/>
-          <p:cNvSpPr/>
-          <p:nvPr/>
-        </p:nvSpPr>
-        <p:spPr>
-          <a:xfrm>
-            <a:off x="502920" y="4334256"/>
-            <a:ext cx="347472" cy="457200"/>
-          </a:xfrm>
-          <a:prstGeom prst="rect">
-            <a:avLst/>
-          </a:prstGeom>
-          <a:noFill/>
-          <a:ln/>
-        </p:spPr>
-        <p:txBody>
-          <a:bodyPr wrap="square" lIns="0" tIns="0" rIns="0" bIns="0" rtlCol="0" anchor="ctr"/>
-          <a:lstStyle/>
-          <a:p>
-            <a:pPr marL="0" indent="0" algn="ctr">
-              <a:buNone/>
-            </a:pPr>
-            <a:r>
-              <a:rPr lang="en-US" sz="1200" b="1" dirty="0">
-                <a:solidFill>
-                  <a:srgbClr val="FFFFFF"/>
-                </a:solidFill>
-                <a:latin typeface="Calibri" pitchFamily="34" charset="0"/>
-                <a:ea typeface="Calibri" pitchFamily="34" charset="-122"/>
-                <a:cs typeface="Calibri" pitchFamily="34" charset="-120"/>
-              </a:rPr>
-              <a:t>4</a:t>
-            </a:r>
-            <a:endParaRPr lang="en-US" sz="1200" dirty="0"/>
-          </a:p>
-        </p:txBody>
-      </p:sp>
-      <p:sp>
-        <p:nvSpPr>
-          <p:cNvPr id="20" name="Text 18"/>
-          <p:cNvSpPr/>
-          <p:nvPr/>
-        </p:nvSpPr>
-        <p:spPr>
-          <a:xfrm>
-            <a:off x="932688" y="4379976"/>
-            <a:ext cx="3474720" cy="384048"/>
-          </a:xfrm>
-          <a:prstGeom prst="rect">
-            <a:avLst/>
-          </a:prstGeom>
-          <a:noFill/>
-          <a:ln/>
-        </p:spPr>
-        <p:txBody>
-          <a:bodyPr wrap="square" lIns="0" tIns="0" rIns="0" bIns="0" rtlCol="0" anchor="ctr"/>
-          <a:lstStyle/>
-          <a:p>
-            <a:pPr marL="0" indent="0">
-              <a:buNone/>
-            </a:pPr>
-            <a:r>
-              <a:rPr lang="en-US" sz="1200" dirty="0">
-                <a:solidFill>
-                  <a:srgbClr val="1D3557"/>
-                </a:solidFill>
-                <a:latin typeface="Calibri" pitchFamily="34" charset="0"/>
-                <a:ea typeface="Calibri" pitchFamily="34" charset="-122"/>
-                <a:cs typeface="Calibri" pitchFamily="34" charset="-120"/>
-              </a:rPr>
-              <a:t>Basket öffnen → Produkt &amp; Menge &amp; Preis sichtbar</a:t>
-            </a:r>
-            <a:endParaRPr lang="en-US" sz="1200" dirty="0"/>
-          </a:p>
-        </p:txBody>
-      </p:sp>
-      <p:sp>
-        <p:nvSpPr>
-          <p:cNvPr id="21" name="Shape 19"/>
-          <p:cNvSpPr/>
-          <p:nvPr/>
-        </p:nvSpPr>
-        <p:spPr>
-          <a:xfrm>
-            <a:off x="4754880" y="1783080"/>
-            <a:ext cx="4206240" cy="3200400"/>
+              <a:rPr lang="en-US" sz="1100" dirty="0">
+                <a:solidFill>
+                  <a:srgbClr val="5C7A9B"/>
+                </a:solidFill>
+                <a:latin typeface="Calibri" pitchFamily="34" charset="0"/>
+                <a:ea typeface="Calibri" pitchFamily="34" charset="-122"/>
+                <a:cs typeface="Calibri" pitchFamily="34" charset="-120"/>
+              </a:rPr>
+              <a:t>Add → Basket → Löschen → Tabellenzeile weg, Badge "0"</a:t>
+            </a:r>
+            <a:endParaRPr lang="en-US" sz="1100" dirty="0"/>
+          </a:p>
+        </p:txBody>
+      </p:sp>
+      <p:sp>
+        <p:nvSpPr>
+          <p:cNvPr id="17" name="Shape 15"/>
+          <p:cNvSpPr/>
+          <p:nvPr/>
+        </p:nvSpPr>
+        <p:spPr>
+          <a:xfrm>
+            <a:off x="4709160" y="1627632"/>
+            <a:ext cx="4069080" cy="3401568"/>
           </a:xfrm>
           <a:prstGeom prst="rect">
             <a:avLst/>
@@ -7939,14 +6985,14 @@
       </p:sp>
       <p:sp>
         <p:nvSpPr>
-          <p:cNvPr id="22" name="Shape 20"/>
-          <p:cNvSpPr/>
-          <p:nvPr/>
-        </p:nvSpPr>
-        <p:spPr>
-          <a:xfrm>
-            <a:off x="4754880" y="1783080"/>
-            <a:ext cx="4206240" cy="438912"/>
+          <p:cNvPr id="18" name="Shape 16"/>
+          <p:cNvSpPr/>
+          <p:nvPr/>
+        </p:nvSpPr>
+        <p:spPr>
+          <a:xfrm>
+            <a:off x="4709160" y="1627632"/>
+            <a:ext cx="4069080" cy="384048"/>
           </a:xfrm>
           <a:prstGeom prst="rect">
             <a:avLst/>
@@ -7971,14 +7017,14 @@
       </p:sp>
       <p:sp>
         <p:nvSpPr>
-          <p:cNvPr id="23" name="Text 21"/>
-          <p:cNvSpPr/>
-          <p:nvPr/>
-        </p:nvSpPr>
-        <p:spPr>
-          <a:xfrm>
-            <a:off x="4892040" y="1783080"/>
-            <a:ext cx="3931920" cy="438912"/>
+          <p:cNvPr id="19" name="Text 17"/>
+          <p:cNvSpPr/>
+          <p:nvPr/>
+        </p:nvSpPr>
+        <p:spPr>
+          <a:xfrm>
+            <a:off x="4846320" y="1627632"/>
+            <a:ext cx="3840480" cy="384048"/>
           </a:xfrm>
           <a:prstGeom prst="rect">
             <a:avLst/>
@@ -8002,7 +7048,7 @@
                 <a:ea typeface="Calibri" pitchFamily="34" charset="-122"/>
                 <a:cs typeface="Calibri" pitchFamily="34" charset="-120"/>
               </a:rPr>
-              <a:t>Test 2 — Artikel entfernen &amp; Badge zurücksetzen</a:t>
+              <a:t>login.spec.ts — 2 Tests</a:t>
             </a:r>
             <a:endParaRPr lang="en-US" sz="1200" dirty="0"/>
           </a:p>
@@ -8010,14 +7056,14 @@
       </p:sp>
       <p:sp>
         <p:nvSpPr>
-          <p:cNvPr id="24" name="Shape 22"/>
-          <p:cNvSpPr/>
-          <p:nvPr/>
-        </p:nvSpPr>
-        <p:spPr>
-          <a:xfrm>
-            <a:off x="4892040" y="2359152"/>
-            <a:ext cx="347472" cy="457200"/>
+          <p:cNvPr id="20" name="Shape 18"/>
+          <p:cNvSpPr/>
+          <p:nvPr/>
+        </p:nvSpPr>
+        <p:spPr>
+          <a:xfrm>
+            <a:off x="4846320" y="2103120"/>
+            <a:ext cx="347472" cy="822960"/>
           </a:xfrm>
           <a:prstGeom prst="rect">
             <a:avLst/>
@@ -8042,14 +7088,14 @@
       </p:sp>
       <p:sp>
         <p:nvSpPr>
-          <p:cNvPr id="25" name="Text 23"/>
-          <p:cNvSpPr/>
-          <p:nvPr/>
-        </p:nvSpPr>
-        <p:spPr>
-          <a:xfrm>
-            <a:off x="4892040" y="2359152"/>
-            <a:ext cx="347472" cy="457200"/>
+          <p:cNvPr id="21" name="Text 19"/>
+          <p:cNvSpPr/>
+          <p:nvPr/>
+        </p:nvSpPr>
+        <p:spPr>
+          <a:xfrm>
+            <a:off x="4846320" y="2103120"/>
+            <a:ext cx="347472" cy="822960"/>
           </a:xfrm>
           <a:prstGeom prst="rect">
             <a:avLst/>
@@ -8065,15 +7111,54 @@
               <a:buNone/>
             </a:pPr>
             <a:r>
+              <a:rPr lang="en-US" sz="1300" b="1" dirty="0">
+                <a:solidFill>
+                  <a:srgbClr val="FFFFFF"/>
+                </a:solidFill>
+                <a:latin typeface="Calibri" pitchFamily="34" charset="0"/>
+                <a:ea typeface="Calibri" pitchFamily="34" charset="-122"/>
+                <a:cs typeface="Calibri" pitchFamily="34" charset="-120"/>
+              </a:rPr>
+              <a:t>3</a:t>
+            </a:r>
+            <a:endParaRPr lang="en-US" sz="1300" dirty="0"/>
+          </a:p>
+        </p:txBody>
+      </p:sp>
+      <p:sp>
+        <p:nvSpPr>
+          <p:cNvPr id="22" name="Text 20"/>
+          <p:cNvSpPr/>
+          <p:nvPr/>
+        </p:nvSpPr>
+        <p:spPr>
+          <a:xfrm>
+            <a:off x="5276088" y="2157984"/>
+            <a:ext cx="3383280" cy="274320"/>
+          </a:xfrm>
+          <a:prstGeom prst="rect">
+            <a:avLst/>
+          </a:prstGeom>
+          <a:noFill/>
+          <a:ln/>
+        </p:spPr>
+        <p:txBody>
+          <a:bodyPr wrap="square" lIns="0" tIns="0" rIns="0" bIns="0" rtlCol="0" anchor="ctr"/>
+          <a:lstStyle/>
+          <a:p>
+            <a:pPr marL="0" indent="0">
+              <a:buNone/>
+            </a:pPr>
+            <a:r>
               <a:rPr lang="en-US" sz="1200" b="1" dirty="0">
                 <a:solidFill>
-                  <a:srgbClr val="FFFFFF"/>
-                </a:solidFill>
-                <a:latin typeface="Calibri" pitchFamily="34" charset="0"/>
-                <a:ea typeface="Calibri" pitchFamily="34" charset="-122"/>
-                <a:cs typeface="Calibri" pitchFamily="34" charset="-120"/>
-              </a:rPr>
-              <a:t>1</a:t>
+                  <a:srgbClr val="1D3557"/>
+                </a:solidFill>
+                <a:latin typeface="Calibri" pitchFamily="34" charset="0"/>
+                <a:ea typeface="Calibri" pitchFamily="34" charset="-122"/>
+                <a:cs typeface="Calibri" pitchFamily="34" charset="-120"/>
+              </a:rPr>
+              <a:t>Login mit gültigen Credentials</a:t>
             </a:r>
             <a:endParaRPr lang="en-US" sz="1200" dirty="0"/>
           </a:p>
@@ -8081,14 +7166,14 @@
       </p:sp>
       <p:sp>
         <p:nvSpPr>
-          <p:cNvPr id="26" name="Text 24"/>
-          <p:cNvSpPr/>
-          <p:nvPr/>
-        </p:nvSpPr>
-        <p:spPr>
-          <a:xfrm>
-            <a:off x="5321808" y="2404872"/>
-            <a:ext cx="3474720" cy="384048"/>
+          <p:cNvPr id="23" name="Text 21"/>
+          <p:cNvSpPr/>
+          <p:nvPr/>
+        </p:nvSpPr>
+        <p:spPr>
+          <a:xfrm>
+            <a:off x="5276088" y="2450592"/>
+            <a:ext cx="3383280" cy="402336"/>
           </a:xfrm>
           <a:prstGeom prst="rect">
             <a:avLst/>
@@ -8104,30 +7189,30 @@
               <a:buNone/>
             </a:pPr>
             <a:r>
-              <a:rPr lang="en-US" sz="1200" dirty="0">
-                <a:solidFill>
-                  <a:srgbClr val="1D3557"/>
-                </a:solidFill>
-                <a:latin typeface="Calibri" pitchFamily="34" charset="0"/>
-                <a:ea typeface="Calibri" pitchFamily="34" charset="-122"/>
-                <a:cs typeface="Calibri" pitchFamily="34" charset="-120"/>
-              </a:rPr>
-              <a:t>Produkt in Basket legen → Badge zeigt "1"</a:t>
-            </a:r>
-            <a:endParaRPr lang="en-US" sz="1200" dirty="0"/>
-          </a:p>
-        </p:txBody>
-      </p:sp>
-      <p:sp>
-        <p:nvSpPr>
-          <p:cNvPr id="27" name="Shape 25"/>
-          <p:cNvSpPr/>
-          <p:nvPr/>
-        </p:nvSpPr>
-        <p:spPr>
-          <a:xfrm>
-            <a:off x="4892040" y="3017520"/>
-            <a:ext cx="347472" cy="457200"/>
+              <a:rPr lang="en-US" sz="1100" dirty="0">
+                <a:solidFill>
+                  <a:srgbClr val="5C7A9B"/>
+                </a:solidFill>
+                <a:latin typeface="Calibri" pitchFamily="34" charset="0"/>
+                <a:ea typeface="Calibri" pitchFamily="34" charset="-122"/>
+                <a:cs typeface="Calibri" pitchFamily="34" charset="-120"/>
+              </a:rPr>
+              <a:t>Formular → Login → URL wechselt auf /#/search, Account-Button sichtbar</a:t>
+            </a:r>
+            <a:endParaRPr lang="en-US" sz="1100" dirty="0"/>
+          </a:p>
+        </p:txBody>
+      </p:sp>
+      <p:sp>
+        <p:nvSpPr>
+          <p:cNvPr id="24" name="Shape 22"/>
+          <p:cNvSpPr/>
+          <p:nvPr/>
+        </p:nvSpPr>
+        <p:spPr>
+          <a:xfrm>
+            <a:off x="4846320" y="3127248"/>
+            <a:ext cx="347472" cy="822960"/>
           </a:xfrm>
           <a:prstGeom prst="rect">
             <a:avLst/>
@@ -8152,14 +7237,14 @@
       </p:sp>
       <p:sp>
         <p:nvSpPr>
-          <p:cNvPr id="28" name="Text 26"/>
-          <p:cNvSpPr/>
-          <p:nvPr/>
-        </p:nvSpPr>
-        <p:spPr>
-          <a:xfrm>
-            <a:off x="4892040" y="3017520"/>
-            <a:ext cx="347472" cy="457200"/>
+          <p:cNvPr id="25" name="Text 23"/>
+          <p:cNvSpPr/>
+          <p:nvPr/>
+        </p:nvSpPr>
+        <p:spPr>
+          <a:xfrm>
+            <a:off x="4846320" y="3127248"/>
+            <a:ext cx="347472" cy="822960"/>
           </a:xfrm>
           <a:prstGeom prst="rect">
             <a:avLst/>
@@ -8175,15 +7260,54 @@
               <a:buNone/>
             </a:pPr>
             <a:r>
+              <a:rPr lang="en-US" sz="1300" b="1" dirty="0">
+                <a:solidFill>
+                  <a:srgbClr val="FFFFFF"/>
+                </a:solidFill>
+                <a:latin typeface="Calibri" pitchFamily="34" charset="0"/>
+                <a:ea typeface="Calibri" pitchFamily="34" charset="-122"/>
+                <a:cs typeface="Calibri" pitchFamily="34" charset="-120"/>
+              </a:rPr>
+              <a:t>4</a:t>
+            </a:r>
+            <a:endParaRPr lang="en-US" sz="1300" dirty="0"/>
+          </a:p>
+        </p:txBody>
+      </p:sp>
+      <p:sp>
+        <p:nvSpPr>
+          <p:cNvPr id="26" name="Text 24"/>
+          <p:cNvSpPr/>
+          <p:nvPr/>
+        </p:nvSpPr>
+        <p:spPr>
+          <a:xfrm>
+            <a:off x="5276088" y="3182112"/>
+            <a:ext cx="3383280" cy="274320"/>
+          </a:xfrm>
+          <a:prstGeom prst="rect">
+            <a:avLst/>
+          </a:prstGeom>
+          <a:noFill/>
+          <a:ln/>
+        </p:spPr>
+        <p:txBody>
+          <a:bodyPr wrap="square" lIns="0" tIns="0" rIns="0" bIns="0" rtlCol="0" anchor="ctr"/>
+          <a:lstStyle/>
+          <a:p>
+            <a:pPr marL="0" indent="0">
+              <a:buNone/>
+            </a:pPr>
+            <a:r>
               <a:rPr lang="en-US" sz="1200" b="1" dirty="0">
                 <a:solidFill>
-                  <a:srgbClr val="FFFFFF"/>
-                </a:solidFill>
-                <a:latin typeface="Calibri" pitchFamily="34" charset="0"/>
-                <a:ea typeface="Calibri" pitchFamily="34" charset="-122"/>
-                <a:cs typeface="Calibri" pitchFamily="34" charset="-120"/>
-              </a:rPr>
-              <a:t>2</a:t>
+                  <a:srgbClr val="1D3557"/>
+                </a:solidFill>
+                <a:latin typeface="Calibri" pitchFamily="34" charset="0"/>
+                <a:ea typeface="Calibri" pitchFamily="34" charset="-122"/>
+                <a:cs typeface="Calibri" pitchFamily="34" charset="-120"/>
+              </a:rPr>
+              <a:t>Login mit falschem Passwort</a:t>
             </a:r>
             <a:endParaRPr lang="en-US" sz="1200" dirty="0"/>
           </a:p>
@@ -8191,14 +7315,14 @@
       </p:sp>
       <p:sp>
         <p:nvSpPr>
-          <p:cNvPr id="29" name="Text 27"/>
-          <p:cNvSpPr/>
-          <p:nvPr/>
-        </p:nvSpPr>
-        <p:spPr>
-          <a:xfrm>
-            <a:off x="5321808" y="3063240"/>
-            <a:ext cx="3474720" cy="384048"/>
+          <p:cNvPr id="27" name="Text 25"/>
+          <p:cNvSpPr/>
+          <p:nvPr/>
+        </p:nvSpPr>
+        <p:spPr>
+          <a:xfrm>
+            <a:off x="5276088" y="3474720"/>
+            <a:ext cx="3383280" cy="402336"/>
           </a:xfrm>
           <a:prstGeom prst="rect">
             <a:avLst/>
@@ -8214,237 +7338,17 @@
               <a:buNone/>
             </a:pPr>
             <a:r>
-              <a:rPr lang="en-US" sz="1200" dirty="0">
-                <a:solidFill>
-                  <a:srgbClr val="1D3557"/>
-                </a:solidFill>
-                <a:latin typeface="Calibri" pitchFamily="34" charset="0"/>
-                <a:ea typeface="Calibri" pitchFamily="34" charset="-122"/>
-                <a:cs typeface="Calibri" pitchFamily="34" charset="-120"/>
-              </a:rPr>
-              <a:t>Basket öffnen</a:t>
-            </a:r>
-            <a:endParaRPr lang="en-US" sz="1200" dirty="0"/>
-          </a:p>
-        </p:txBody>
-      </p:sp>
-      <p:sp>
-        <p:nvSpPr>
-          <p:cNvPr id="30" name="Shape 28"/>
-          <p:cNvSpPr/>
-          <p:nvPr/>
-        </p:nvSpPr>
-        <p:spPr>
-          <a:xfrm>
-            <a:off x="4892040" y="3675888"/>
-            <a:ext cx="347472" cy="457200"/>
-          </a:xfrm>
-          <a:prstGeom prst="rect">
-            <a:avLst/>
-          </a:prstGeom>
-          <a:solidFill>
-            <a:srgbClr val="E63946"/>
-          </a:solidFill>
-          <a:ln w="12700">
-            <a:solidFill>
-              <a:srgbClr val="E63946"/>
-            </a:solidFill>
-            <a:prstDash val="solid"/>
-          </a:ln>
-        </p:spPr>
-        <p:txBody>
-          <a:bodyPr/>
-          <a:lstStyle/>
-          <a:p>
-            <a:endParaRPr lang="de-AT"/>
-          </a:p>
-        </p:txBody>
-      </p:sp>
-      <p:sp>
-        <p:nvSpPr>
-          <p:cNvPr id="31" name="Text 29"/>
-          <p:cNvSpPr/>
-          <p:nvPr/>
-        </p:nvSpPr>
-        <p:spPr>
-          <a:xfrm>
-            <a:off x="4892040" y="3675888"/>
-            <a:ext cx="347472" cy="457200"/>
-          </a:xfrm>
-          <a:prstGeom prst="rect">
-            <a:avLst/>
-          </a:prstGeom>
-          <a:noFill/>
-          <a:ln/>
-        </p:spPr>
-        <p:txBody>
-          <a:bodyPr wrap="square" lIns="0" tIns="0" rIns="0" bIns="0" rtlCol="0" anchor="ctr"/>
-          <a:lstStyle/>
-          <a:p>
-            <a:pPr marL="0" indent="0" algn="ctr">
-              <a:buNone/>
-            </a:pPr>
-            <a:r>
-              <a:rPr lang="en-US" sz="1200" b="1" dirty="0">
-                <a:solidFill>
-                  <a:srgbClr val="FFFFFF"/>
-                </a:solidFill>
-                <a:latin typeface="Calibri" pitchFamily="34" charset="0"/>
-                <a:ea typeface="Calibri" pitchFamily="34" charset="-122"/>
-                <a:cs typeface="Calibri" pitchFamily="34" charset="-120"/>
-              </a:rPr>
-              <a:t>3</a:t>
-            </a:r>
-            <a:endParaRPr lang="en-US" sz="1200" dirty="0"/>
-          </a:p>
-        </p:txBody>
-      </p:sp>
-      <p:sp>
-        <p:nvSpPr>
-          <p:cNvPr id="32" name="Text 30"/>
-          <p:cNvSpPr/>
-          <p:nvPr/>
-        </p:nvSpPr>
-        <p:spPr>
-          <a:xfrm>
-            <a:off x="5321808" y="3721608"/>
-            <a:ext cx="3474720" cy="384048"/>
-          </a:xfrm>
-          <a:prstGeom prst="rect">
-            <a:avLst/>
-          </a:prstGeom>
-          <a:noFill/>
-          <a:ln/>
-        </p:spPr>
-        <p:txBody>
-          <a:bodyPr wrap="square" lIns="0" tIns="0" rIns="0" bIns="0" rtlCol="0" anchor="ctr"/>
-          <a:lstStyle/>
-          <a:p>
-            <a:pPr marL="0" indent="0">
-              <a:buNone/>
-            </a:pPr>
-            <a:r>
-              <a:rPr lang="en-US" sz="1200" dirty="0">
-                <a:solidFill>
-                  <a:srgbClr val="1D3557"/>
-                </a:solidFill>
-                <a:latin typeface="Calibri" pitchFamily="34" charset="0"/>
-                <a:ea typeface="Calibri" pitchFamily="34" charset="-122"/>
-                <a:cs typeface="Calibri" pitchFamily="34" charset="-120"/>
-              </a:rPr>
-              <a:t>Löschen-Button klicken</a:t>
-            </a:r>
-            <a:endParaRPr lang="en-US" sz="1200" dirty="0"/>
-          </a:p>
-        </p:txBody>
-      </p:sp>
-      <p:sp>
-        <p:nvSpPr>
-          <p:cNvPr id="33" name="Shape 31"/>
-          <p:cNvSpPr/>
-          <p:nvPr/>
-        </p:nvSpPr>
-        <p:spPr>
-          <a:xfrm>
-            <a:off x="4892040" y="4334256"/>
-            <a:ext cx="347472" cy="457200"/>
-          </a:xfrm>
-          <a:prstGeom prst="rect">
-            <a:avLst/>
-          </a:prstGeom>
-          <a:solidFill>
-            <a:srgbClr val="E63946"/>
-          </a:solidFill>
-          <a:ln w="12700">
-            <a:solidFill>
-              <a:srgbClr val="E63946"/>
-            </a:solidFill>
-            <a:prstDash val="solid"/>
-          </a:ln>
-        </p:spPr>
-        <p:txBody>
-          <a:bodyPr/>
-          <a:lstStyle/>
-          <a:p>
-            <a:endParaRPr lang="de-AT"/>
-          </a:p>
-        </p:txBody>
-      </p:sp>
-      <p:sp>
-        <p:nvSpPr>
-          <p:cNvPr id="34" name="Text 32"/>
-          <p:cNvSpPr/>
-          <p:nvPr/>
-        </p:nvSpPr>
-        <p:spPr>
-          <a:xfrm>
-            <a:off x="4892040" y="4334256"/>
-            <a:ext cx="347472" cy="457200"/>
-          </a:xfrm>
-          <a:prstGeom prst="rect">
-            <a:avLst/>
-          </a:prstGeom>
-          <a:noFill/>
-          <a:ln/>
-        </p:spPr>
-        <p:txBody>
-          <a:bodyPr wrap="square" lIns="0" tIns="0" rIns="0" bIns="0" rtlCol="0" anchor="ctr"/>
-          <a:lstStyle/>
-          <a:p>
-            <a:pPr marL="0" indent="0" algn="ctr">
-              <a:buNone/>
-            </a:pPr>
-            <a:r>
-              <a:rPr lang="en-US" sz="1200" b="1" dirty="0">
-                <a:solidFill>
-                  <a:srgbClr val="FFFFFF"/>
-                </a:solidFill>
-                <a:latin typeface="Calibri" pitchFamily="34" charset="0"/>
-                <a:ea typeface="Calibri" pitchFamily="34" charset="-122"/>
-                <a:cs typeface="Calibri" pitchFamily="34" charset="-120"/>
-              </a:rPr>
-              <a:t>4</a:t>
-            </a:r>
-            <a:endParaRPr lang="en-US" sz="1200" dirty="0"/>
-          </a:p>
-        </p:txBody>
-      </p:sp>
-      <p:sp>
-        <p:nvSpPr>
-          <p:cNvPr id="35" name="Text 33"/>
-          <p:cNvSpPr/>
-          <p:nvPr/>
-        </p:nvSpPr>
-        <p:spPr>
-          <a:xfrm>
-            <a:off x="5321808" y="4379976"/>
-            <a:ext cx="3474720" cy="384048"/>
-          </a:xfrm>
-          <a:prstGeom prst="rect">
-            <a:avLst/>
-          </a:prstGeom>
-          <a:noFill/>
-          <a:ln/>
-        </p:spPr>
-        <p:txBody>
-          <a:bodyPr wrap="square" lIns="0" tIns="0" rIns="0" bIns="0" rtlCol="0" anchor="ctr"/>
-          <a:lstStyle/>
-          <a:p>
-            <a:pPr marL="0" indent="0">
-              <a:buNone/>
-            </a:pPr>
-            <a:r>
-              <a:rPr lang="en-US" sz="1200" dirty="0">
-                <a:solidFill>
-                  <a:srgbClr val="1D3557"/>
-                </a:solidFill>
-                <a:latin typeface="Calibri" pitchFamily="34" charset="0"/>
-                <a:ea typeface="Calibri" pitchFamily="34" charset="-122"/>
-                <a:cs typeface="Calibri" pitchFamily="34" charset="-120"/>
-              </a:rPr>
-              <a:t>Tabellenzeile weg, Badge zeigt "0"</a:t>
-            </a:r>
-            <a:endParaRPr lang="en-US" sz="1200" dirty="0"/>
+              <a:rPr lang="en-US" sz="1100" dirty="0">
+                <a:solidFill>
+                  <a:srgbClr val="5C7A9B"/>
+                </a:solidFill>
+                <a:latin typeface="Calibri" pitchFamily="34" charset="0"/>
+                <a:ea typeface="Calibri" pitchFamily="34" charset="-122"/>
+                <a:cs typeface="Calibri" pitchFamily="34" charset="-120"/>
+              </a:rPr>
+              <a:t>Falsches PW → Fehlermeldung "Invalid email or password" erscheint</a:t>
+            </a:r>
+            <a:endParaRPr lang="en-US" sz="1100" dirty="0"/>
           </a:p>
         </p:txBody>
       </p:sp>
@@ -8456,7 +7360,7 @@
 </p:sld>
 </file>
 
-<file path=ppt/slides/slide8.xml><?xml version="1.0" encoding="utf-8"?>
+<file path=ppt/slides/slide7.xml><?xml version="1.0" encoding="utf-8"?>
 <p:sld xmlns:a="http://schemas.openxmlformats.org/drawingml/2006/main" xmlns:r="http://schemas.openxmlformats.org/officeDocument/2006/relationships" xmlns:p="http://schemas.openxmlformats.org/presentationml/2006/main">
   <p:cSld name="Slide 8">
     <p:bg>
@@ -8514,7 +7418,7 @@
                 <a:ea typeface="Trebuchet MS" pitchFamily="34" charset="-122"/>
                 <a:cs typeface="Trebuchet MS" pitchFamily="34" charset="-120"/>
               </a:rPr>
-              <a:t>Load Test (1×) — k6 Product Search</a:t>
+              <a:t>Load Tests (2×) — k6</a:t>
             </a:r>
             <a:endParaRPr lang="en-US" sz="3000" dirty="0"/>
           </a:p>
@@ -8560,8 +7464,8 @@
         </p:nvSpPr>
         <p:spPr>
           <a:xfrm>
-            <a:off x="365760" y="1005840"/>
-            <a:ext cx="4572000" cy="3931920"/>
+            <a:off x="365760" y="960120"/>
+            <a:ext cx="4160520" cy="4023360"/>
           </a:xfrm>
           <a:prstGeom prst="rect">
             <a:avLst/>
@@ -8593,14 +7497,46 @@
       </p:sp>
       <p:sp>
         <p:nvSpPr>
-          <p:cNvPr id="5" name="Text 3"/>
-          <p:cNvSpPr/>
-          <p:nvPr/>
-        </p:nvSpPr>
-        <p:spPr>
-          <a:xfrm>
-            <a:off x="548640" y="1097280"/>
-            <a:ext cx="4206240" cy="365760"/>
+          <p:cNvPr id="5" name="Shape 3"/>
+          <p:cNvSpPr/>
+          <p:nvPr/>
+        </p:nvSpPr>
+        <p:spPr>
+          <a:xfrm>
+            <a:off x="365760" y="960120"/>
+            <a:ext cx="4160520" cy="411480"/>
+          </a:xfrm>
+          <a:prstGeom prst="rect">
+            <a:avLst/>
+          </a:prstGeom>
+          <a:solidFill>
+            <a:srgbClr val="457B9D"/>
+          </a:solidFill>
+          <a:ln w="12700">
+            <a:solidFill>
+              <a:srgbClr val="457B9D"/>
+            </a:solidFill>
+            <a:prstDash val="solid"/>
+          </a:ln>
+        </p:spPr>
+        <p:txBody>
+          <a:bodyPr/>
+          <a:lstStyle/>
+          <a:p>
+            <a:endParaRPr lang="de-AT"/>
+          </a:p>
+        </p:txBody>
+      </p:sp>
+      <p:sp>
+        <p:nvSpPr>
+          <p:cNvPr id="6" name="Text 4"/>
+          <p:cNvSpPr/>
+          <p:nvPr/>
+        </p:nvSpPr>
+        <p:spPr>
+          <a:xfrm>
+            <a:off x="502920" y="960120"/>
+            <a:ext cx="3931920" cy="411480"/>
           </a:xfrm>
           <a:prstGeom prst="rect">
             <a:avLst/>
@@ -8616,108 +7552,147 @@
               <a:buNone/>
             </a:pPr>
             <a:r>
-              <a:rPr lang="en-US" sz="1600" b="1" dirty="0">
+              <a:rPr lang="en-US" sz="1200" b="1" dirty="0">
+                <a:solidFill>
+                  <a:srgbClr val="FFFFFF"/>
+                </a:solidFill>
+                <a:latin typeface="Calibri" pitchFamily="34" charset="0"/>
+                <a:ea typeface="Calibri" pitchFamily="34" charset="-122"/>
+                <a:cs typeface="Calibri" pitchFamily="34" charset="-120"/>
+              </a:rPr>
+              <a:t>products-search.js</a:t>
+            </a:r>
+            <a:endParaRPr lang="en-US" sz="1200" dirty="0"/>
+          </a:p>
+        </p:txBody>
+      </p:sp>
+      <p:sp>
+        <p:nvSpPr>
+          <p:cNvPr id="7" name="Text 5"/>
+          <p:cNvSpPr/>
+          <p:nvPr/>
+        </p:nvSpPr>
+        <p:spPr>
+          <a:xfrm>
+            <a:off x="502920" y="1444752"/>
+            <a:ext cx="3840480" cy="256032"/>
+          </a:xfrm>
+          <a:prstGeom prst="rect">
+            <a:avLst/>
+          </a:prstGeom>
+          <a:noFill/>
+          <a:ln/>
+        </p:spPr>
+        <p:txBody>
+          <a:bodyPr wrap="square" lIns="0" tIns="0" rIns="0" bIns="0" rtlCol="0" anchor="ctr"/>
+          <a:lstStyle/>
+          <a:p>
+            <a:pPr marL="0" indent="0">
+              <a:buNone/>
+            </a:pPr>
+            <a:r>
+              <a:rPr lang="en-US" sz="1000" i="1" dirty="0">
+                <a:solidFill>
+                  <a:srgbClr val="5C7A9B"/>
+                </a:solidFill>
+                <a:latin typeface="Calibri" pitchFamily="34" charset="0"/>
+                <a:ea typeface="Calibri" pitchFamily="34" charset="-122"/>
+                <a:cs typeface="Calibri" pitchFamily="34" charset="-120"/>
+              </a:rPr>
+              <a:t>GET /rest/products/search?q={keyword}</a:t>
+            </a:r>
+            <a:endParaRPr lang="en-US" sz="1000" dirty="0"/>
+          </a:p>
+        </p:txBody>
+      </p:sp>
+      <p:sp>
+        <p:nvSpPr>
+          <p:cNvPr id="8" name="Text 6"/>
+          <p:cNvSpPr/>
+          <p:nvPr/>
+        </p:nvSpPr>
+        <p:spPr>
+          <a:xfrm>
+            <a:off x="530352" y="1783080"/>
+            <a:ext cx="1325880" cy="320040"/>
+          </a:xfrm>
+          <a:prstGeom prst="rect">
+            <a:avLst/>
+          </a:prstGeom>
+          <a:noFill/>
+          <a:ln/>
+        </p:spPr>
+        <p:txBody>
+          <a:bodyPr wrap="square" lIns="0" tIns="0" rIns="0" bIns="0" rtlCol="0" anchor="ctr"/>
+          <a:lstStyle/>
+          <a:p>
+            <a:pPr marL="0" indent="0">
+              <a:buNone/>
+            </a:pPr>
+            <a:r>
+              <a:rPr lang="en-US" sz="1100" b="1" dirty="0">
+                <a:solidFill>
+                  <a:srgbClr val="243560"/>
+                </a:solidFill>
+                <a:latin typeface="Calibri" pitchFamily="34" charset="0"/>
+                <a:ea typeface="Calibri" pitchFamily="34" charset="-122"/>
+                <a:cs typeface="Calibri" pitchFamily="34" charset="-120"/>
+              </a:rPr>
+              <a:t>VUs:</a:t>
+            </a:r>
+            <a:endParaRPr lang="en-US" sz="1100" dirty="0"/>
+          </a:p>
+        </p:txBody>
+      </p:sp>
+      <p:sp>
+        <p:nvSpPr>
+          <p:cNvPr id="9" name="Text 7"/>
+          <p:cNvSpPr/>
+          <p:nvPr/>
+        </p:nvSpPr>
+        <p:spPr>
+          <a:xfrm>
+            <a:off x="1901952" y="1783080"/>
+            <a:ext cx="2514600" cy="320040"/>
+          </a:xfrm>
+          <a:prstGeom prst="rect">
+            <a:avLst/>
+          </a:prstGeom>
+          <a:noFill/>
+          <a:ln/>
+        </p:spPr>
+        <p:txBody>
+          <a:bodyPr wrap="square" lIns="0" tIns="0" rIns="0" bIns="0" rtlCol="0" anchor="ctr"/>
+          <a:lstStyle/>
+          <a:p>
+            <a:pPr marL="0" indent="0">
+              <a:buNone/>
+            </a:pPr>
+            <a:r>
+              <a:rPr lang="en-US" sz="1100" dirty="0">
                 <a:solidFill>
                   <a:srgbClr val="1D3557"/>
                 </a:solidFill>
-                <a:latin typeface="Trebuchet MS" pitchFamily="34" charset="0"/>
-                <a:ea typeface="Trebuchet MS" pitchFamily="34" charset="-122"/>
-                <a:cs typeface="Trebuchet MS" pitchFamily="34" charset="-120"/>
-              </a:rPr>
-              <a:t>Test-Konfiguration</a:t>
-            </a:r>
-            <a:endParaRPr lang="en-US" sz="1600" dirty="0"/>
-          </a:p>
-        </p:txBody>
-      </p:sp>
-      <p:sp>
-        <p:nvSpPr>
-          <p:cNvPr id="6" name="Text 4"/>
-          <p:cNvSpPr/>
-          <p:nvPr/>
-        </p:nvSpPr>
-        <p:spPr>
-          <a:xfrm>
-            <a:off x="548640" y="1600200"/>
-            <a:ext cx="1463040" cy="347472"/>
-          </a:xfrm>
-          <a:prstGeom prst="rect">
-            <a:avLst/>
-          </a:prstGeom>
-          <a:noFill/>
-          <a:ln/>
-        </p:spPr>
-        <p:txBody>
-          <a:bodyPr wrap="square" lIns="0" tIns="0" rIns="0" bIns="0" rtlCol="0" anchor="ctr"/>
-          <a:lstStyle/>
-          <a:p>
-            <a:pPr marL="0" indent="0">
-              <a:buNone/>
-            </a:pPr>
-            <a:r>
-              <a:rPr lang="en-US" sz="1200" b="1" dirty="0">
-                <a:solidFill>
-                  <a:srgbClr val="243560"/>
-                </a:solidFill>
-                <a:latin typeface="Calibri" pitchFamily="34" charset="0"/>
-                <a:ea typeface="Calibri" pitchFamily="34" charset="-122"/>
-                <a:cs typeface="Calibri" pitchFamily="34" charset="-120"/>
-              </a:rPr>
-              <a:t>Tool:</a:t>
-            </a:r>
-            <a:endParaRPr lang="en-US" sz="1200" dirty="0"/>
-          </a:p>
-        </p:txBody>
-      </p:sp>
-      <p:sp>
-        <p:nvSpPr>
-          <p:cNvPr id="7" name="Text 5"/>
-          <p:cNvSpPr/>
-          <p:nvPr/>
-        </p:nvSpPr>
-        <p:spPr>
-          <a:xfrm>
-            <a:off x="2057400" y="1600200"/>
-            <a:ext cx="2651760" cy="347472"/>
-          </a:xfrm>
-          <a:prstGeom prst="rect">
-            <a:avLst/>
-          </a:prstGeom>
-          <a:noFill/>
-          <a:ln/>
-        </p:spPr>
-        <p:txBody>
-          <a:bodyPr wrap="square" lIns="0" tIns="0" rIns="0" bIns="0" rtlCol="0" anchor="ctr"/>
-          <a:lstStyle/>
-          <a:p>
-            <a:pPr marL="0" indent="0">
-              <a:buNone/>
-            </a:pPr>
-            <a:r>
-              <a:rPr lang="en-US" sz="1200" dirty="0">
-                <a:solidFill>
-                  <a:srgbClr val="1D3557"/>
-                </a:solidFill>
-                <a:latin typeface="Calibri" pitchFamily="34" charset="0"/>
-                <a:ea typeface="Calibri" pitchFamily="34" charset="-122"/>
-                <a:cs typeface="Calibri" pitchFamily="34" charset="-120"/>
-              </a:rPr>
-              <a:t>k6 (Grafana Labs)</a:t>
-            </a:r>
-            <a:endParaRPr lang="en-US" sz="1200" dirty="0"/>
-          </a:p>
-        </p:txBody>
-      </p:sp>
-      <p:sp>
-        <p:nvSpPr>
-          <p:cNvPr id="8" name="Shape 6"/>
-          <p:cNvSpPr/>
-          <p:nvPr/>
-        </p:nvSpPr>
-        <p:spPr>
-          <a:xfrm>
-            <a:off x="548640" y="1920240"/>
-            <a:ext cx="4114800" cy="0"/>
+                <a:latin typeface="Calibri" pitchFamily="34" charset="0"/>
+                <a:ea typeface="Calibri" pitchFamily="34" charset="-122"/>
+                <a:cs typeface="Calibri" pitchFamily="34" charset="-120"/>
+              </a:rPr>
+              <a:t>20 virtuelle Nutzer</a:t>
+            </a:r>
+            <a:endParaRPr lang="en-US" sz="1100" dirty="0"/>
+          </a:p>
+        </p:txBody>
+      </p:sp>
+      <p:sp>
+        <p:nvSpPr>
+          <p:cNvPr id="10" name="Shape 8"/>
+          <p:cNvSpPr/>
+          <p:nvPr/>
+        </p:nvSpPr>
+        <p:spPr>
+          <a:xfrm>
+            <a:off x="530352" y="2130552"/>
+            <a:ext cx="3840480" cy="0"/>
           </a:xfrm>
           <a:prstGeom prst="line">
             <a:avLst/>
@@ -8740,14 +7715,14 @@
       </p:sp>
       <p:sp>
         <p:nvSpPr>
-          <p:cNvPr id="9" name="Text 7"/>
-          <p:cNvSpPr/>
-          <p:nvPr/>
-        </p:nvSpPr>
-        <p:spPr>
-          <a:xfrm>
-            <a:off x="548640" y="2121408"/>
-            <a:ext cx="1463040" cy="347472"/>
+          <p:cNvPr id="11" name="Text 9"/>
+          <p:cNvSpPr/>
+          <p:nvPr/>
+        </p:nvSpPr>
+        <p:spPr>
+          <a:xfrm>
+            <a:off x="530352" y="2468880"/>
+            <a:ext cx="1325880" cy="320040"/>
           </a:xfrm>
           <a:prstGeom prst="rect">
             <a:avLst/>
@@ -8763,7 +7738,7 @@
               <a:buNone/>
             </a:pPr>
             <a:r>
-              <a:rPr lang="en-US" sz="1200" b="1" dirty="0">
+              <a:rPr lang="en-US" sz="1100" b="1" dirty="0">
                 <a:solidFill>
                   <a:srgbClr val="243560"/>
                 </a:solidFill>
@@ -8771,22 +7746,22 @@
                 <a:ea typeface="Calibri" pitchFamily="34" charset="-122"/>
                 <a:cs typeface="Calibri" pitchFamily="34" charset="-120"/>
               </a:rPr>
-              <a:t>Endpunkt:</a:t>
-            </a:r>
-            <a:endParaRPr lang="en-US" sz="1200" dirty="0"/>
-          </a:p>
-        </p:txBody>
-      </p:sp>
-      <p:sp>
-        <p:nvSpPr>
-          <p:cNvPr id="10" name="Text 8"/>
-          <p:cNvSpPr/>
-          <p:nvPr/>
-        </p:nvSpPr>
-        <p:spPr>
-          <a:xfrm>
-            <a:off x="2057400" y="2121408"/>
-            <a:ext cx="2651760" cy="347472"/>
+              <a:t>Iterationen:</a:t>
+            </a:r>
+            <a:endParaRPr lang="en-US" sz="1100" dirty="0"/>
+          </a:p>
+        </p:txBody>
+      </p:sp>
+      <p:sp>
+        <p:nvSpPr>
+          <p:cNvPr id="12" name="Text 10"/>
+          <p:cNvSpPr/>
+          <p:nvPr/>
+        </p:nvSpPr>
+        <p:spPr>
+          <a:xfrm>
+            <a:off x="1901952" y="2468880"/>
+            <a:ext cx="2514600" cy="320040"/>
           </a:xfrm>
           <a:prstGeom prst="rect">
             <a:avLst/>
@@ -8802,7 +7777,7 @@
               <a:buNone/>
             </a:pPr>
             <a:r>
-              <a:rPr lang="en-US" sz="1200" dirty="0">
+              <a:rPr lang="en-US" sz="1100" dirty="0">
                 <a:solidFill>
                   <a:srgbClr val="1D3557"/>
                 </a:solidFill>
@@ -8810,22 +7785,22 @@
                 <a:ea typeface="Calibri" pitchFamily="34" charset="-122"/>
                 <a:cs typeface="Calibri" pitchFamily="34" charset="-120"/>
               </a:rPr>
-              <a:t>GET /rest/products/search?q={keyword}</a:t>
-            </a:r>
-            <a:endParaRPr lang="en-US" sz="1200" dirty="0"/>
-          </a:p>
-        </p:txBody>
-      </p:sp>
-      <p:sp>
-        <p:nvSpPr>
-          <p:cNvPr id="11" name="Shape 9"/>
-          <p:cNvSpPr/>
-          <p:nvPr/>
-        </p:nvSpPr>
-        <p:spPr>
-          <a:xfrm>
-            <a:off x="548640" y="2441448"/>
-            <a:ext cx="4114800" cy="0"/>
+              <a:t>200 gesamt</a:t>
+            </a:r>
+            <a:endParaRPr lang="en-US" sz="1100" dirty="0"/>
+          </a:p>
+        </p:txBody>
+      </p:sp>
+      <p:sp>
+        <p:nvSpPr>
+          <p:cNvPr id="13" name="Shape 11"/>
+          <p:cNvSpPr/>
+          <p:nvPr/>
+        </p:nvSpPr>
+        <p:spPr>
+          <a:xfrm>
+            <a:off x="530352" y="2816352"/>
+            <a:ext cx="3840480" cy="0"/>
           </a:xfrm>
           <a:prstGeom prst="line">
             <a:avLst/>
@@ -8848,14 +7823,14 @@
       </p:sp>
       <p:sp>
         <p:nvSpPr>
-          <p:cNvPr id="12" name="Text 10"/>
-          <p:cNvSpPr/>
-          <p:nvPr/>
-        </p:nvSpPr>
-        <p:spPr>
-          <a:xfrm>
-            <a:off x="548640" y="2642616"/>
-            <a:ext cx="1463040" cy="347472"/>
+          <p:cNvPr id="14" name="Text 12"/>
+          <p:cNvSpPr/>
+          <p:nvPr/>
+        </p:nvSpPr>
+        <p:spPr>
+          <a:xfrm>
+            <a:off x="530352" y="3154680"/>
+            <a:ext cx="1325880" cy="320040"/>
           </a:xfrm>
           <a:prstGeom prst="rect">
             <a:avLst/>
@@ -8871,7 +7846,7 @@
               <a:buNone/>
             </a:pPr>
             <a:r>
-              <a:rPr lang="en-US" sz="1200" b="1" dirty="0">
+              <a:rPr lang="en-US" sz="1100" b="1" dirty="0">
                 <a:solidFill>
                   <a:srgbClr val="243560"/>
                 </a:solidFill>
@@ -8879,22 +7854,22 @@
                 <a:ea typeface="Calibri" pitchFamily="34" charset="-122"/>
                 <a:cs typeface="Calibri" pitchFamily="34" charset="-120"/>
               </a:rPr>
-              <a:t>VUs:</a:t>
-            </a:r>
-            <a:endParaRPr lang="en-US" sz="1200" dirty="0"/>
-          </a:p>
-        </p:txBody>
-      </p:sp>
-      <p:sp>
-        <p:nvSpPr>
-          <p:cNvPr id="13" name="Text 11"/>
-          <p:cNvSpPr/>
-          <p:nvPr/>
-        </p:nvSpPr>
-        <p:spPr>
-          <a:xfrm>
-            <a:off x="2057400" y="2642616"/>
-            <a:ext cx="2651760" cy="347472"/>
+              <a:t>Think Time:</a:t>
+            </a:r>
+            <a:endParaRPr lang="en-US" sz="1100" dirty="0"/>
+          </a:p>
+        </p:txBody>
+      </p:sp>
+      <p:sp>
+        <p:nvSpPr>
+          <p:cNvPr id="15" name="Text 13"/>
+          <p:cNvSpPr/>
+          <p:nvPr/>
+        </p:nvSpPr>
+        <p:spPr>
+          <a:xfrm>
+            <a:off x="1901952" y="3154680"/>
+            <a:ext cx="2514600" cy="320040"/>
           </a:xfrm>
           <a:prstGeom prst="rect">
             <a:avLst/>
@@ -8910,7 +7885,7 @@
               <a:buNone/>
             </a:pPr>
             <a:r>
-              <a:rPr lang="en-US" sz="1200" dirty="0">
+              <a:rPr lang="en-US" sz="1100" dirty="0">
                 <a:solidFill>
                   <a:srgbClr val="1D3557"/>
                 </a:solidFill>
@@ -8918,22 +7893,22 @@
                 <a:ea typeface="Calibri" pitchFamily="34" charset="-122"/>
                 <a:cs typeface="Calibri" pitchFamily="34" charset="-120"/>
               </a:rPr>
-              <a:t>20 virtuelle Nutzer</a:t>
-            </a:r>
-            <a:endParaRPr lang="en-US" sz="1200" dirty="0"/>
-          </a:p>
-        </p:txBody>
-      </p:sp>
-      <p:sp>
-        <p:nvSpPr>
-          <p:cNvPr id="14" name="Shape 12"/>
-          <p:cNvSpPr/>
-          <p:nvPr/>
-        </p:nvSpPr>
-        <p:spPr>
-          <a:xfrm>
-            <a:off x="548640" y="2962656"/>
-            <a:ext cx="4114800" cy="0"/>
+              <a:t>random 0–2 Sekunden</a:t>
+            </a:r>
+            <a:endParaRPr lang="en-US" sz="1100" dirty="0"/>
+          </a:p>
+        </p:txBody>
+      </p:sp>
+      <p:sp>
+        <p:nvSpPr>
+          <p:cNvPr id="16" name="Shape 14"/>
+          <p:cNvSpPr/>
+          <p:nvPr/>
+        </p:nvSpPr>
+        <p:spPr>
+          <a:xfrm>
+            <a:off x="530352" y="3502152"/>
+            <a:ext cx="3840480" cy="0"/>
           </a:xfrm>
           <a:prstGeom prst="line">
             <a:avLst/>
@@ -8956,14 +7931,14 @@
       </p:sp>
       <p:sp>
         <p:nvSpPr>
-          <p:cNvPr id="15" name="Text 13"/>
-          <p:cNvSpPr/>
-          <p:nvPr/>
-        </p:nvSpPr>
-        <p:spPr>
-          <a:xfrm>
-            <a:off x="548640" y="3163824"/>
-            <a:ext cx="1463040" cy="347472"/>
+          <p:cNvPr id="17" name="Text 15"/>
+          <p:cNvSpPr/>
+          <p:nvPr/>
+        </p:nvSpPr>
+        <p:spPr>
+          <a:xfrm>
+            <a:off x="530352" y="3840480"/>
+            <a:ext cx="1325880" cy="320040"/>
           </a:xfrm>
           <a:prstGeom prst="rect">
             <a:avLst/>
@@ -8979,7 +7954,7 @@
               <a:buNone/>
             </a:pPr>
             <a:r>
-              <a:rPr lang="en-US" sz="1200" b="1" dirty="0">
+              <a:rPr lang="en-US" sz="1100" b="1" dirty="0">
                 <a:solidFill>
                   <a:srgbClr val="243560"/>
                 </a:solidFill>
@@ -8987,22 +7962,22 @@
                 <a:ea typeface="Calibri" pitchFamily="34" charset="-122"/>
                 <a:cs typeface="Calibri" pitchFamily="34" charset="-120"/>
               </a:rPr>
-              <a:t>Iterationen:</a:t>
-            </a:r>
-            <a:endParaRPr lang="en-US" sz="1200" dirty="0"/>
-          </a:p>
-        </p:txBody>
-      </p:sp>
-      <p:sp>
-        <p:nvSpPr>
-          <p:cNvPr id="16" name="Text 14"/>
-          <p:cNvSpPr/>
-          <p:nvPr/>
-        </p:nvSpPr>
-        <p:spPr>
-          <a:xfrm>
-            <a:off x="2057400" y="3163824"/>
-            <a:ext cx="2651760" cy="347472"/>
+              <a:t>Threshold:</a:t>
+            </a:r>
+            <a:endParaRPr lang="en-US" sz="1100" dirty="0"/>
+          </a:p>
+        </p:txBody>
+      </p:sp>
+      <p:sp>
+        <p:nvSpPr>
+          <p:cNvPr id="18" name="Text 16"/>
+          <p:cNvSpPr/>
+          <p:nvPr/>
+        </p:nvSpPr>
+        <p:spPr>
+          <a:xfrm>
+            <a:off x="1901952" y="3840480"/>
+            <a:ext cx="2514600" cy="320040"/>
           </a:xfrm>
           <a:prstGeom prst="rect">
             <a:avLst/>
@@ -9018,7 +7993,7 @@
               <a:buNone/>
             </a:pPr>
             <a:r>
-              <a:rPr lang="en-US" sz="1200" dirty="0">
+              <a:rPr lang="en-US" sz="1100" dirty="0">
                 <a:solidFill>
                   <a:srgbClr val="1D3557"/>
                 </a:solidFill>
@@ -9026,238 +8001,22 @@
                 <a:ea typeface="Calibri" pitchFamily="34" charset="-122"/>
                 <a:cs typeface="Calibri" pitchFamily="34" charset="-120"/>
               </a:rPr>
-              <a:t>200 gesamt</a:t>
-            </a:r>
-            <a:endParaRPr lang="en-US" sz="1200" dirty="0"/>
-          </a:p>
-        </p:txBody>
-      </p:sp>
-      <p:sp>
-        <p:nvSpPr>
-          <p:cNvPr id="17" name="Shape 15"/>
-          <p:cNvSpPr/>
-          <p:nvPr/>
-        </p:nvSpPr>
-        <p:spPr>
-          <a:xfrm>
-            <a:off x="548640" y="3483864"/>
-            <a:ext cx="4114800" cy="0"/>
-          </a:xfrm>
-          <a:prstGeom prst="line">
-            <a:avLst/>
-          </a:prstGeom>
-          <a:noFill/>
-          <a:ln w="6350">
-            <a:solidFill>
-              <a:srgbClr val="E2EAF4"/>
-            </a:solidFill>
-            <a:prstDash val="solid"/>
-          </a:ln>
-        </p:spPr>
-        <p:txBody>
-          <a:bodyPr/>
-          <a:lstStyle/>
-          <a:p>
-            <a:endParaRPr lang="de-AT"/>
-          </a:p>
-        </p:txBody>
-      </p:sp>
-      <p:sp>
-        <p:nvSpPr>
-          <p:cNvPr id="18" name="Text 16"/>
-          <p:cNvSpPr/>
-          <p:nvPr/>
-        </p:nvSpPr>
-        <p:spPr>
-          <a:xfrm>
-            <a:off x="548640" y="3685032"/>
-            <a:ext cx="1463040" cy="347472"/>
-          </a:xfrm>
-          <a:prstGeom prst="rect">
-            <a:avLst/>
-          </a:prstGeom>
-          <a:noFill/>
-          <a:ln/>
-        </p:spPr>
-        <p:txBody>
-          <a:bodyPr wrap="square" lIns="0" tIns="0" rIns="0" bIns="0" rtlCol="0" anchor="ctr"/>
-          <a:lstStyle/>
-          <a:p>
-            <a:pPr marL="0" indent="0">
-              <a:buNone/>
-            </a:pPr>
-            <a:r>
-              <a:rPr lang="en-US" sz="1200" b="1" dirty="0">
-                <a:solidFill>
-                  <a:srgbClr val="243560"/>
-                </a:solidFill>
-                <a:latin typeface="Calibri" pitchFamily="34" charset="0"/>
-                <a:ea typeface="Calibri" pitchFamily="34" charset="-122"/>
-                <a:cs typeface="Calibri" pitchFamily="34" charset="-120"/>
-              </a:rPr>
-              <a:t>Think Time:</a:t>
-            </a:r>
-            <a:endParaRPr lang="en-US" sz="1200" dirty="0"/>
-          </a:p>
-        </p:txBody>
-      </p:sp>
-      <p:sp>
-        <p:nvSpPr>
-          <p:cNvPr id="19" name="Text 17"/>
-          <p:cNvSpPr/>
-          <p:nvPr/>
-        </p:nvSpPr>
-        <p:spPr>
-          <a:xfrm>
-            <a:off x="2057400" y="3685032"/>
-            <a:ext cx="2651760" cy="347472"/>
-          </a:xfrm>
-          <a:prstGeom prst="rect">
-            <a:avLst/>
-          </a:prstGeom>
-          <a:noFill/>
-          <a:ln/>
-        </p:spPr>
-        <p:txBody>
-          <a:bodyPr wrap="square" lIns="0" tIns="0" rIns="0" bIns="0" rtlCol="0" anchor="ctr"/>
-          <a:lstStyle/>
-          <a:p>
-            <a:pPr marL="0" indent="0">
-              <a:buNone/>
-            </a:pPr>
-            <a:r>
-              <a:rPr lang="en-US" sz="1200" dirty="0">
-                <a:solidFill>
-                  <a:srgbClr val="1D3557"/>
-                </a:solidFill>
-                <a:latin typeface="Calibri" pitchFamily="34" charset="0"/>
-                <a:ea typeface="Calibri" pitchFamily="34" charset="-122"/>
-                <a:cs typeface="Calibri" pitchFamily="34" charset="-120"/>
-              </a:rPr>
-              <a:t>random 0–2 Sekunden</a:t>
-            </a:r>
-            <a:endParaRPr lang="en-US" sz="1200" dirty="0"/>
-          </a:p>
-        </p:txBody>
-      </p:sp>
-      <p:sp>
-        <p:nvSpPr>
-          <p:cNvPr id="20" name="Shape 18"/>
-          <p:cNvSpPr/>
-          <p:nvPr/>
-        </p:nvSpPr>
-        <p:spPr>
-          <a:xfrm>
-            <a:off x="548640" y="4005072"/>
-            <a:ext cx="4114800" cy="0"/>
-          </a:xfrm>
-          <a:prstGeom prst="line">
-            <a:avLst/>
-          </a:prstGeom>
-          <a:noFill/>
-          <a:ln w="6350">
-            <a:solidFill>
-              <a:srgbClr val="E2EAF4"/>
-            </a:solidFill>
-            <a:prstDash val="solid"/>
-          </a:ln>
-        </p:spPr>
-        <p:txBody>
-          <a:bodyPr/>
-          <a:lstStyle/>
-          <a:p>
-            <a:endParaRPr lang="de-AT"/>
-          </a:p>
-        </p:txBody>
-      </p:sp>
-      <p:sp>
-        <p:nvSpPr>
-          <p:cNvPr id="21" name="Text 19"/>
-          <p:cNvSpPr/>
-          <p:nvPr/>
-        </p:nvSpPr>
-        <p:spPr>
-          <a:xfrm>
-            <a:off x="548640" y="4206240"/>
-            <a:ext cx="1463040" cy="347472"/>
-          </a:xfrm>
-          <a:prstGeom prst="rect">
-            <a:avLst/>
-          </a:prstGeom>
-          <a:noFill/>
-          <a:ln/>
-        </p:spPr>
-        <p:txBody>
-          <a:bodyPr wrap="square" lIns="0" tIns="0" rIns="0" bIns="0" rtlCol="0" anchor="ctr"/>
-          <a:lstStyle/>
-          <a:p>
-            <a:pPr marL="0" indent="0">
-              <a:buNone/>
-            </a:pPr>
-            <a:r>
-              <a:rPr lang="en-US" sz="1200" b="1" dirty="0">
-                <a:solidFill>
-                  <a:srgbClr val="243560"/>
-                </a:solidFill>
-                <a:latin typeface="Calibri" pitchFamily="34" charset="0"/>
-                <a:ea typeface="Calibri" pitchFamily="34" charset="-122"/>
-                <a:cs typeface="Calibri" pitchFamily="34" charset="-120"/>
-              </a:rPr>
-              <a:t>Keywords:</a:t>
-            </a:r>
-            <a:endParaRPr lang="en-US" sz="1200" dirty="0"/>
-          </a:p>
-        </p:txBody>
-      </p:sp>
-      <p:sp>
-        <p:nvSpPr>
-          <p:cNvPr id="22" name="Text 20"/>
-          <p:cNvSpPr/>
-          <p:nvPr/>
-        </p:nvSpPr>
-        <p:spPr>
-          <a:xfrm>
-            <a:off x="2057400" y="4206240"/>
-            <a:ext cx="2651760" cy="347472"/>
-          </a:xfrm>
-          <a:prstGeom prst="rect">
-            <a:avLst/>
-          </a:prstGeom>
-          <a:noFill/>
-          <a:ln/>
-        </p:spPr>
-        <p:txBody>
-          <a:bodyPr wrap="square" lIns="0" tIns="0" rIns="0" bIns="0" rtlCol="0" anchor="ctr"/>
-          <a:lstStyle/>
-          <a:p>
-            <a:pPr marL="0" indent="0">
-              <a:buNone/>
-            </a:pPr>
-            <a:r>
-              <a:rPr lang="en-US" sz="1200" dirty="0">
-                <a:solidFill>
-                  <a:srgbClr val="1D3557"/>
-                </a:solidFill>
-                <a:latin typeface="Calibri" pitchFamily="34" charset="0"/>
-                <a:ea typeface="Calibri" pitchFamily="34" charset="-122"/>
-                <a:cs typeface="Calibri" pitchFamily="34" charset="-120"/>
-              </a:rPr>
-              <a:t>apple, juice, raspberry, banana, organic, chocolate</a:t>
-            </a:r>
-            <a:endParaRPr lang="en-US" sz="1200" dirty="0"/>
-          </a:p>
-        </p:txBody>
-      </p:sp>
-      <p:sp>
-        <p:nvSpPr>
-          <p:cNvPr id="23" name="Shape 21"/>
-          <p:cNvSpPr/>
-          <p:nvPr/>
-        </p:nvSpPr>
-        <p:spPr>
-          <a:xfrm>
-            <a:off x="5212080" y="1005840"/>
-            <a:ext cx="3566160" cy="3931920"/>
+              <a:t>p(95) &lt; 1.200ms, Fehlerrate &lt; 1%</a:t>
+            </a:r>
+            <a:endParaRPr lang="en-US" sz="1100" dirty="0"/>
+          </a:p>
+        </p:txBody>
+      </p:sp>
+      <p:sp>
+        <p:nvSpPr>
+          <p:cNvPr id="19" name="Shape 17"/>
+          <p:cNvSpPr/>
+          <p:nvPr/>
+        </p:nvSpPr>
+        <p:spPr>
+          <a:xfrm>
+            <a:off x="4709160" y="960120"/>
+            <a:ext cx="4069080" cy="4023360"/>
           </a:xfrm>
           <a:prstGeom prst="rect">
             <a:avLst/>
@@ -9289,14 +8048,163 @@
       </p:sp>
       <p:sp>
         <p:nvSpPr>
+          <p:cNvPr id="20" name="Shape 18"/>
+          <p:cNvSpPr/>
+          <p:nvPr/>
+        </p:nvSpPr>
+        <p:spPr>
+          <a:xfrm>
+            <a:off x="4709160" y="960120"/>
+            <a:ext cx="4069080" cy="411480"/>
+          </a:xfrm>
+          <a:prstGeom prst="rect">
+            <a:avLst/>
+          </a:prstGeom>
+          <a:solidFill>
+            <a:srgbClr val="E63946"/>
+          </a:solidFill>
+          <a:ln w="12700">
+            <a:solidFill>
+              <a:srgbClr val="E63946"/>
+            </a:solidFill>
+            <a:prstDash val="solid"/>
+          </a:ln>
+        </p:spPr>
+        <p:txBody>
+          <a:bodyPr/>
+          <a:lstStyle/>
+          <a:p>
+            <a:endParaRPr lang="de-AT"/>
+          </a:p>
+        </p:txBody>
+      </p:sp>
+      <p:sp>
+        <p:nvSpPr>
+          <p:cNvPr id="21" name="Text 19"/>
+          <p:cNvSpPr/>
+          <p:nvPr/>
+        </p:nvSpPr>
+        <p:spPr>
+          <a:xfrm>
+            <a:off x="4846320" y="960120"/>
+            <a:ext cx="3840480" cy="411480"/>
+          </a:xfrm>
+          <a:prstGeom prst="rect">
+            <a:avLst/>
+          </a:prstGeom>
+          <a:noFill/>
+          <a:ln/>
+        </p:spPr>
+        <p:txBody>
+          <a:bodyPr wrap="square" lIns="0" tIns="0" rIns="0" bIns="0" rtlCol="0" anchor="ctr"/>
+          <a:lstStyle/>
+          <a:p>
+            <a:pPr marL="0" indent="0">
+              <a:buNone/>
+            </a:pPr>
+            <a:r>
+              <a:rPr lang="en-US" sz="1200" b="1" dirty="0">
+                <a:solidFill>
+                  <a:srgbClr val="FFFFFF"/>
+                </a:solidFill>
+                <a:latin typeface="Calibri" pitchFamily="34" charset="0"/>
+                <a:ea typeface="Calibri" pitchFamily="34" charset="-122"/>
+                <a:cs typeface="Calibri" pitchFamily="34" charset="-120"/>
+              </a:rPr>
+              <a:t>place-order.js</a:t>
+            </a:r>
+            <a:endParaRPr lang="en-US" sz="1200" dirty="0"/>
+          </a:p>
+        </p:txBody>
+      </p:sp>
+      <p:sp>
+        <p:nvSpPr>
+          <p:cNvPr id="22" name="Text 20"/>
+          <p:cNvSpPr/>
+          <p:nvPr/>
+        </p:nvSpPr>
+        <p:spPr>
+          <a:xfrm>
+            <a:off x="4846320" y="1444752"/>
+            <a:ext cx="3749040" cy="256032"/>
+          </a:xfrm>
+          <a:prstGeom prst="rect">
+            <a:avLst/>
+          </a:prstGeom>
+          <a:noFill/>
+          <a:ln/>
+        </p:spPr>
+        <p:txBody>
+          <a:bodyPr wrap="square" lIns="0" tIns="0" rIns="0" bIns="0" rtlCol="0" anchor="ctr"/>
+          <a:lstStyle/>
+          <a:p>
+            <a:pPr marL="0" indent="0">
+              <a:buNone/>
+            </a:pPr>
+            <a:r>
+              <a:rPr lang="en-US" sz="1000" i="1" dirty="0">
+                <a:solidFill>
+                  <a:srgbClr val="5C7A9B"/>
+                </a:solidFill>
+                <a:latin typeface="Calibri" pitchFamily="34" charset="0"/>
+                <a:ea typeface="Calibri" pitchFamily="34" charset="-122"/>
+                <a:cs typeface="Calibri" pitchFamily="34" charset="-120"/>
+              </a:rPr>
+              <a:t>Login → Basket (2 Items) → Checkout</a:t>
+            </a:r>
+            <a:endParaRPr lang="en-US" sz="1000" dirty="0"/>
+          </a:p>
+        </p:txBody>
+      </p:sp>
+      <p:sp>
+        <p:nvSpPr>
+          <p:cNvPr id="23" name="Text 21"/>
+          <p:cNvSpPr/>
+          <p:nvPr/>
+        </p:nvSpPr>
+        <p:spPr>
+          <a:xfrm>
+            <a:off x="4828032" y="1783080"/>
+            <a:ext cx="1325880" cy="320040"/>
+          </a:xfrm>
+          <a:prstGeom prst="rect">
+            <a:avLst/>
+          </a:prstGeom>
+          <a:noFill/>
+          <a:ln/>
+        </p:spPr>
+        <p:txBody>
+          <a:bodyPr wrap="square" lIns="0" tIns="0" rIns="0" bIns="0" rtlCol="0" anchor="ctr"/>
+          <a:lstStyle/>
+          <a:p>
+            <a:pPr marL="0" indent="0">
+              <a:buNone/>
+            </a:pPr>
+            <a:r>
+              <a:rPr lang="en-US" sz="1100" b="1" dirty="0">
+                <a:solidFill>
+                  <a:srgbClr val="243560"/>
+                </a:solidFill>
+                <a:latin typeface="Calibri" pitchFamily="34" charset="0"/>
+                <a:ea typeface="Calibri" pitchFamily="34" charset="-122"/>
+                <a:cs typeface="Calibri" pitchFamily="34" charset="-120"/>
+              </a:rPr>
+              <a:t>VUs:</a:t>
+            </a:r>
+            <a:endParaRPr lang="en-US" sz="1100" dirty="0"/>
+          </a:p>
+        </p:txBody>
+      </p:sp>
+      <p:sp>
+        <p:nvSpPr>
           <p:cNvPr id="24" name="Text 22"/>
           <p:cNvSpPr/>
           <p:nvPr/>
         </p:nvSpPr>
         <p:spPr>
           <a:xfrm>
-            <a:off x="5394960" y="1097280"/>
-            <a:ext cx="3200400" cy="365760"/>
+            <a:off x="6199632" y="1783080"/>
+            <a:ext cx="2423160" cy="320040"/>
           </a:xfrm>
           <a:prstGeom prst="rect">
             <a:avLst/>
@@ -9312,17 +8220,17 @@
               <a:buNone/>
             </a:pPr>
             <a:r>
-              <a:rPr lang="en-US" sz="1600" b="1" dirty="0">
+              <a:rPr lang="en-US" sz="1100" dirty="0">
                 <a:solidFill>
                   <a:srgbClr val="1D3557"/>
                 </a:solidFill>
-                <a:latin typeface="Trebuchet MS" pitchFamily="34" charset="0"/>
-                <a:ea typeface="Trebuchet MS" pitchFamily="34" charset="-122"/>
-                <a:cs typeface="Trebuchet MS" pitchFamily="34" charset="-120"/>
-              </a:rPr>
-              <a:t>Thresholds</a:t>
-            </a:r>
-            <a:endParaRPr lang="en-US" sz="1600" dirty="0"/>
+                <a:latin typeface="Calibri" pitchFamily="34" charset="0"/>
+                <a:ea typeface="Calibri" pitchFamily="34" charset="-122"/>
+                <a:cs typeface="Calibri" pitchFamily="34" charset="-120"/>
+              </a:rPr>
+              <a:t>10 virtuelle Nutzer</a:t>
+            </a:r>
+            <a:endParaRPr lang="en-US" sz="1100" dirty="0"/>
           </a:p>
         </p:txBody>
       </p:sp>
@@ -9334,28 +8242,19 @@
         </p:nvSpPr>
         <p:spPr>
           <a:xfrm>
-            <a:off x="5349240" y="1600200"/>
-            <a:ext cx="3246120" cy="1417320"/>
-          </a:xfrm>
-          <a:prstGeom prst="rect">
-            <a:avLst/>
-          </a:prstGeom>
-          <a:solidFill>
-            <a:srgbClr val="FFFFFF"/>
-          </a:solidFill>
+            <a:off x="4828032" y="2130552"/>
+            <a:ext cx="3749040" cy="0"/>
+          </a:xfrm>
+          <a:prstGeom prst="line">
+            <a:avLst/>
+          </a:prstGeom>
+          <a:noFill/>
           <a:ln w="6350">
             <a:solidFill>
               <a:srgbClr val="E2EAF4"/>
             </a:solidFill>
             <a:prstDash val="solid"/>
           </a:ln>
-          <a:effectLst>
-            <a:outerShdw blurRad="101600" dist="38100" dir="8100000" algn="bl" rotWithShape="0">
-              <a:srgbClr val="000000">
-                <a:alpha val="12000"/>
-              </a:srgbClr>
-            </a:outerShdw>
-          </a:effectLst>
         </p:spPr>
         <p:txBody>
           <a:bodyPr/>
@@ -9367,33 +8266,40 @@
       </p:sp>
       <p:sp>
         <p:nvSpPr>
-          <p:cNvPr id="26" name="Shape 24"/>
-          <p:cNvSpPr/>
-          <p:nvPr/>
-        </p:nvSpPr>
-        <p:spPr>
-          <a:xfrm>
-            <a:off x="5349240" y="1600200"/>
-            <a:ext cx="3246120" cy="411480"/>
-          </a:xfrm>
-          <a:prstGeom prst="rect">
-            <a:avLst/>
-          </a:prstGeom>
-          <a:solidFill>
-            <a:srgbClr val="457B9D"/>
-          </a:solidFill>
-          <a:ln w="12700">
-            <a:solidFill>
-              <a:srgbClr val="457B9D"/>
-            </a:solidFill>
-            <a:prstDash val="solid"/>
-          </a:ln>
-        </p:spPr>
-        <p:txBody>
-          <a:bodyPr/>
-          <a:lstStyle/>
-          <a:p>
-            <a:endParaRPr lang="de-AT"/>
+          <p:cNvPr id="26" name="Text 24"/>
+          <p:cNvSpPr/>
+          <p:nvPr/>
+        </p:nvSpPr>
+        <p:spPr>
+          <a:xfrm>
+            <a:off x="4828032" y="2468880"/>
+            <a:ext cx="1325880" cy="320040"/>
+          </a:xfrm>
+          <a:prstGeom prst="rect">
+            <a:avLst/>
+          </a:prstGeom>
+          <a:noFill/>
+          <a:ln/>
+        </p:spPr>
+        <p:txBody>
+          <a:bodyPr wrap="square" lIns="0" tIns="0" rIns="0" bIns="0" rtlCol="0" anchor="ctr"/>
+          <a:lstStyle/>
+          <a:p>
+            <a:pPr marL="0" indent="0">
+              <a:buNone/>
+            </a:pPr>
+            <a:r>
+              <a:rPr lang="en-US" sz="1100" b="1" dirty="0">
+                <a:solidFill>
+                  <a:srgbClr val="243560"/>
+                </a:solidFill>
+                <a:latin typeface="Calibri" pitchFamily="34" charset="0"/>
+                <a:ea typeface="Calibri" pitchFamily="34" charset="-122"/>
+                <a:cs typeface="Calibri" pitchFamily="34" charset="-120"/>
+              </a:rPr>
+              <a:t>Iterationen:</a:t>
+            </a:r>
+            <a:endParaRPr lang="en-US" sz="1100" dirty="0"/>
           </a:p>
         </p:txBody>
       </p:sp>
@@ -9405,8 +8311,8 @@
         </p:nvSpPr>
         <p:spPr>
           <a:xfrm>
-            <a:off x="5440680" y="1600200"/>
-            <a:ext cx="3063240" cy="411480"/>
+            <a:off x="6199632" y="2468880"/>
+            <a:ext cx="2423160" cy="320040"/>
           </a:xfrm>
           <a:prstGeom prst="rect">
             <a:avLst/>
@@ -9422,15 +8328,15 @@
               <a:buNone/>
             </a:pPr>
             <a:r>
-              <a:rPr lang="en-US" sz="1100" b="1" dirty="0">
-                <a:solidFill>
-                  <a:srgbClr val="FFFFFF"/>
-                </a:solidFill>
-                <a:latin typeface="Calibri" pitchFamily="34" charset="0"/>
-                <a:ea typeface="Calibri" pitchFamily="34" charset="-122"/>
-                <a:cs typeface="Calibri" pitchFamily="34" charset="-120"/>
-              </a:rPr>
-              <a:t>http_req_duration</a:t>
+              <a:rPr lang="en-US" sz="1100" dirty="0">
+                <a:solidFill>
+                  <a:srgbClr val="1D3557"/>
+                </a:solidFill>
+                <a:latin typeface="Calibri" pitchFamily="34" charset="0"/>
+                <a:ea typeface="Calibri" pitchFamily="34" charset="-122"/>
+                <a:cs typeface="Calibri" pitchFamily="34" charset="-120"/>
+              </a:rPr>
+              <a:t>50 gesamt</a:t>
             </a:r>
             <a:endParaRPr lang="en-US" sz="1100" dirty="0"/>
           </a:p>
@@ -9438,112 +8344,25 @@
       </p:sp>
       <p:sp>
         <p:nvSpPr>
-          <p:cNvPr id="28" name="Text 26"/>
-          <p:cNvSpPr/>
-          <p:nvPr/>
-        </p:nvSpPr>
-        <p:spPr>
-          <a:xfrm>
-            <a:off x="5440680" y="2057400"/>
-            <a:ext cx="3063240" cy="320040"/>
-          </a:xfrm>
-          <a:prstGeom prst="rect">
-            <a:avLst/>
-          </a:prstGeom>
-          <a:noFill/>
-          <a:ln/>
-        </p:spPr>
-        <p:txBody>
-          <a:bodyPr wrap="square" lIns="0" tIns="0" rIns="0" bIns="0" rtlCol="0" anchor="ctr"/>
-          <a:lstStyle/>
-          <a:p>
-            <a:pPr marL="0" indent="0">
-              <a:buNone/>
-            </a:pPr>
-            <a:r>
-              <a:rPr lang="en-US" sz="1600" b="1" dirty="0">
-                <a:solidFill>
-                  <a:srgbClr val="457B9D"/>
-                </a:solidFill>
-                <a:latin typeface="Trebuchet MS" pitchFamily="34" charset="0"/>
-                <a:ea typeface="Trebuchet MS" pitchFamily="34" charset="-122"/>
-                <a:cs typeface="Trebuchet MS" pitchFamily="34" charset="-120"/>
-              </a:rPr>
-              <a:t>p(95) &lt; 1200ms</a:t>
-            </a:r>
-            <a:endParaRPr lang="en-US" sz="1600" dirty="0"/>
-          </a:p>
-        </p:txBody>
-      </p:sp>
-      <p:sp>
-        <p:nvSpPr>
-          <p:cNvPr id="29" name="Text 27"/>
-          <p:cNvSpPr/>
-          <p:nvPr/>
-        </p:nvSpPr>
-        <p:spPr>
-          <a:xfrm>
-            <a:off x="5440680" y="2404872"/>
-            <a:ext cx="3063240" cy="512064"/>
-          </a:xfrm>
-          <a:prstGeom prst="rect">
-            <a:avLst/>
-          </a:prstGeom>
-          <a:noFill/>
-          <a:ln/>
-        </p:spPr>
-        <p:txBody>
-          <a:bodyPr wrap="square" lIns="0" tIns="0" rIns="0" bIns="0" rtlCol="0" anchor="ctr"/>
-          <a:lstStyle/>
-          <a:p>
-            <a:pPr marL="0" indent="0">
-              <a:buNone/>
-            </a:pPr>
-            <a:r>
-              <a:rPr lang="en-US" sz="1050" dirty="0">
-                <a:solidFill>
-                  <a:srgbClr val="5C7A9B"/>
-                </a:solidFill>
-                <a:latin typeface="Calibri" pitchFamily="34" charset="0"/>
-                <a:ea typeface="Calibri" pitchFamily="34" charset="-122"/>
-                <a:cs typeface="Calibri" pitchFamily="34" charset="-120"/>
-              </a:rPr>
-              <a:t>95% der Requests müssen unter 1,2 Sekunden bleiben</a:t>
-            </a:r>
-            <a:endParaRPr lang="en-US" sz="1050" dirty="0"/>
-          </a:p>
-        </p:txBody>
-      </p:sp>
-      <p:sp>
-        <p:nvSpPr>
-          <p:cNvPr id="30" name="Shape 28"/>
-          <p:cNvSpPr/>
-          <p:nvPr/>
-        </p:nvSpPr>
-        <p:spPr>
-          <a:xfrm>
-            <a:off x="5349240" y="3246120"/>
-            <a:ext cx="3246120" cy="1417320"/>
-          </a:xfrm>
-          <a:prstGeom prst="rect">
-            <a:avLst/>
-          </a:prstGeom>
-          <a:solidFill>
-            <a:srgbClr val="FFFFFF"/>
-          </a:solidFill>
+          <p:cNvPr id="28" name="Shape 26"/>
+          <p:cNvSpPr/>
+          <p:nvPr/>
+        </p:nvSpPr>
+        <p:spPr>
+          <a:xfrm>
+            <a:off x="4828032" y="2816352"/>
+            <a:ext cx="3749040" cy="0"/>
+          </a:xfrm>
+          <a:prstGeom prst="line">
+            <a:avLst/>
+          </a:prstGeom>
+          <a:noFill/>
           <a:ln w="6350">
             <a:solidFill>
               <a:srgbClr val="E2EAF4"/>
             </a:solidFill>
             <a:prstDash val="solid"/>
           </a:ln>
-          <a:effectLst>
-            <a:outerShdw blurRad="101600" dist="38100" dir="8100000" algn="bl" rotWithShape="0">
-              <a:srgbClr val="000000">
-                <a:alpha val="12000"/>
-              </a:srgbClr>
-            </a:outerShdw>
-          </a:effectLst>
         </p:spPr>
         <p:txBody>
           <a:bodyPr/>
@@ -9555,24 +8374,100 @@
       </p:sp>
       <p:sp>
         <p:nvSpPr>
+          <p:cNvPr id="29" name="Text 27"/>
+          <p:cNvSpPr/>
+          <p:nvPr/>
+        </p:nvSpPr>
+        <p:spPr>
+          <a:xfrm>
+            <a:off x="4828032" y="3154680"/>
+            <a:ext cx="1325880" cy="320040"/>
+          </a:xfrm>
+          <a:prstGeom prst="rect">
+            <a:avLst/>
+          </a:prstGeom>
+          <a:noFill/>
+          <a:ln/>
+        </p:spPr>
+        <p:txBody>
+          <a:bodyPr wrap="square" lIns="0" tIns="0" rIns="0" bIns="0" rtlCol="0" anchor="ctr"/>
+          <a:lstStyle/>
+          <a:p>
+            <a:pPr marL="0" indent="0">
+              <a:buNone/>
+            </a:pPr>
+            <a:r>
+              <a:rPr lang="en-US" sz="1100" b="1" dirty="0">
+                <a:solidFill>
+                  <a:srgbClr val="243560"/>
+                </a:solidFill>
+                <a:latin typeface="Calibri" pitchFamily="34" charset="0"/>
+                <a:ea typeface="Calibri" pitchFamily="34" charset="-122"/>
+                <a:cs typeface="Calibri" pitchFamily="34" charset="-120"/>
+              </a:rPr>
+              <a:t>Think Time:</a:t>
+            </a:r>
+            <a:endParaRPr lang="en-US" sz="1100" dirty="0"/>
+          </a:p>
+        </p:txBody>
+      </p:sp>
+      <p:sp>
+        <p:nvSpPr>
+          <p:cNvPr id="30" name="Text 28"/>
+          <p:cNvSpPr/>
+          <p:nvPr/>
+        </p:nvSpPr>
+        <p:spPr>
+          <a:xfrm>
+            <a:off x="6199632" y="3154680"/>
+            <a:ext cx="2423160" cy="320040"/>
+          </a:xfrm>
+          <a:prstGeom prst="rect">
+            <a:avLst/>
+          </a:prstGeom>
+          <a:noFill/>
+          <a:ln/>
+        </p:spPr>
+        <p:txBody>
+          <a:bodyPr wrap="square" lIns="0" tIns="0" rIns="0" bIns="0" rtlCol="0" anchor="ctr"/>
+          <a:lstStyle/>
+          <a:p>
+            <a:pPr marL="0" indent="0">
+              <a:buNone/>
+            </a:pPr>
+            <a:r>
+              <a:rPr lang="en-US" sz="1100" dirty="0">
+                <a:solidFill>
+                  <a:srgbClr val="1D3557"/>
+                </a:solidFill>
+                <a:latin typeface="Calibri" pitchFamily="34" charset="0"/>
+                <a:ea typeface="Calibri" pitchFamily="34" charset="-122"/>
+                <a:cs typeface="Calibri" pitchFamily="34" charset="-120"/>
+              </a:rPr>
+              <a:t>random 0–2 Sekunden</a:t>
+            </a:r>
+            <a:endParaRPr lang="en-US" sz="1100" dirty="0"/>
+          </a:p>
+        </p:txBody>
+      </p:sp>
+      <p:sp>
+        <p:nvSpPr>
           <p:cNvPr id="31" name="Shape 29"/>
           <p:cNvSpPr/>
           <p:nvPr/>
         </p:nvSpPr>
         <p:spPr>
           <a:xfrm>
-            <a:off x="5349240" y="3246120"/>
-            <a:ext cx="3246120" cy="411480"/>
-          </a:xfrm>
-          <a:prstGeom prst="rect">
-            <a:avLst/>
-          </a:prstGeom>
-          <a:solidFill>
-            <a:srgbClr val="243560"/>
-          </a:solidFill>
-          <a:ln w="12700">
+            <a:off x="4828032" y="3502152"/>
+            <a:ext cx="3749040" cy="0"/>
+          </a:xfrm>
+          <a:prstGeom prst="line">
+            <a:avLst/>
+          </a:prstGeom>
+          <a:noFill/>
+          <a:ln w="6350">
             <a:solidFill>
-              <a:srgbClr val="243560"/>
+              <a:srgbClr val="E2EAF4"/>
             </a:solidFill>
             <a:prstDash val="solid"/>
           </a:ln>
@@ -9593,8 +8488,8 @@
         </p:nvSpPr>
         <p:spPr>
           <a:xfrm>
-            <a:off x="5440680" y="3246120"/>
-            <a:ext cx="3063240" cy="411480"/>
+            <a:off x="4828032" y="3840480"/>
+            <a:ext cx="1325880" cy="320040"/>
           </a:xfrm>
           <a:prstGeom prst="rect">
             <a:avLst/>
@@ -9612,13 +8507,13 @@
             <a:r>
               <a:rPr lang="en-US" sz="1100" b="1" dirty="0">
                 <a:solidFill>
-                  <a:srgbClr val="FFFFFF"/>
-                </a:solidFill>
-                <a:latin typeface="Calibri" pitchFamily="34" charset="0"/>
-                <a:ea typeface="Calibri" pitchFamily="34" charset="-122"/>
-                <a:cs typeface="Calibri" pitchFamily="34" charset="-120"/>
-              </a:rPr>
-              <a:t>http_req_failed</a:t>
+                  <a:srgbClr val="243560"/>
+                </a:solidFill>
+                <a:latin typeface="Calibri" pitchFamily="34" charset="0"/>
+                <a:ea typeface="Calibri" pitchFamily="34" charset="-122"/>
+                <a:cs typeface="Calibri" pitchFamily="34" charset="-120"/>
+              </a:rPr>
+              <a:t>Threshold:</a:t>
             </a:r>
             <a:endParaRPr lang="en-US" sz="1100" dirty="0"/>
           </a:p>
@@ -9632,8 +8527,8 @@
         </p:nvSpPr>
         <p:spPr>
           <a:xfrm>
-            <a:off x="5440680" y="3703320"/>
-            <a:ext cx="3063240" cy="320040"/>
+            <a:off x="6199632" y="3840480"/>
+            <a:ext cx="2423160" cy="320040"/>
           </a:xfrm>
           <a:prstGeom prst="rect">
             <a:avLst/>
@@ -9649,56 +8544,17 @@
               <a:buNone/>
             </a:pPr>
             <a:r>
-              <a:rPr lang="en-US" sz="1600" b="1" dirty="0">
-                <a:solidFill>
-                  <a:srgbClr val="243560"/>
-                </a:solidFill>
-                <a:latin typeface="Trebuchet MS" pitchFamily="34" charset="0"/>
-                <a:ea typeface="Trebuchet MS" pitchFamily="34" charset="-122"/>
-                <a:cs typeface="Trebuchet MS" pitchFamily="34" charset="-120"/>
-              </a:rPr>
-              <a:t>rate &lt; 1%</a:t>
-            </a:r>
-            <a:endParaRPr lang="en-US" sz="1600" dirty="0"/>
-          </a:p>
-        </p:txBody>
-      </p:sp>
-      <p:sp>
-        <p:nvSpPr>
-          <p:cNvPr id="34" name="Text 32"/>
-          <p:cNvSpPr/>
-          <p:nvPr/>
-        </p:nvSpPr>
-        <p:spPr>
-          <a:xfrm>
-            <a:off x="5440680" y="4050792"/>
-            <a:ext cx="3063240" cy="512064"/>
-          </a:xfrm>
-          <a:prstGeom prst="rect">
-            <a:avLst/>
-          </a:prstGeom>
-          <a:noFill/>
-          <a:ln/>
-        </p:spPr>
-        <p:txBody>
-          <a:bodyPr wrap="square" lIns="0" tIns="0" rIns="0" bIns="0" rtlCol="0" anchor="ctr"/>
-          <a:lstStyle/>
-          <a:p>
-            <a:pPr marL="0" indent="0">
-              <a:buNone/>
-            </a:pPr>
-            <a:r>
-              <a:rPr lang="en-US" sz="1050" dirty="0">
-                <a:solidFill>
-                  <a:srgbClr val="5C7A9B"/>
-                </a:solidFill>
-                <a:latin typeface="Calibri" pitchFamily="34" charset="0"/>
-                <a:ea typeface="Calibri" pitchFamily="34" charset="-122"/>
-                <a:cs typeface="Calibri" pitchFamily="34" charset="-120"/>
-              </a:rPr>
-              <a:t>Fehlerrate (Non-2xx) muss unter 1% bleiben</a:t>
-            </a:r>
-            <a:endParaRPr lang="en-US" sz="1050" dirty="0"/>
+              <a:rPr lang="en-US" sz="1100" dirty="0">
+                <a:solidFill>
+                  <a:srgbClr val="1D3557"/>
+                </a:solidFill>
+                <a:latin typeface="Calibri" pitchFamily="34" charset="0"/>
+                <a:ea typeface="Calibri" pitchFamily="34" charset="-122"/>
+                <a:cs typeface="Calibri" pitchFamily="34" charset="-120"/>
+              </a:rPr>
+              <a:t>p(95) &lt; 2.000ms</a:t>
+            </a:r>
+            <a:endParaRPr lang="en-US" sz="1100" dirty="0"/>
           </a:p>
         </p:txBody>
       </p:sp>
@@ -9710,13 +8566,13 @@
 </p:sld>
 </file>
 
-<file path=ppt/slides/slide9.xml><?xml version="1.0" encoding="utf-8"?>
+<file path=ppt/slides/slide8.xml><?xml version="1.0" encoding="utf-8"?>
 <p:sld xmlns:a="http://schemas.openxmlformats.org/drawingml/2006/main" xmlns:r="http://schemas.openxmlformats.org/officeDocument/2006/relationships" xmlns:p="http://schemas.openxmlformats.org/presentationml/2006/main">
-  <p:cSld name="Slide 9">
+  <p:cSld name="Slide 10">
     <p:bg>
       <p:bgPr>
         <a:solidFill>
-          <a:srgbClr val="F8FAFC"/>
+          <a:srgbClr val="1A2744"/>
         </a:solidFill>
         <a:effectLst/>
       </p:bgPr>
@@ -9737,53 +8593,14 @@
       </p:grpSpPr>
       <p:sp>
         <p:nvSpPr>
-          <p:cNvPr id="2" name="Text 0"/>
-          <p:cNvSpPr/>
-          <p:nvPr/>
-        </p:nvSpPr>
-        <p:spPr>
-          <a:xfrm>
-            <a:off x="457200" y="256032"/>
-            <a:ext cx="8229600" cy="548640"/>
-          </a:xfrm>
-          <a:prstGeom prst="rect">
-            <a:avLst/>
-          </a:prstGeom>
-          <a:noFill/>
-          <a:ln/>
-        </p:spPr>
-        <p:txBody>
-          <a:bodyPr wrap="square" lIns="0" tIns="0" rIns="0" bIns="0" rtlCol="0" anchor="ctr"/>
-          <a:lstStyle/>
-          <a:p>
-            <a:pPr marL="0" indent="0">
-              <a:buNone/>
-            </a:pPr>
-            <a:r>
-              <a:rPr lang="en-US" sz="3000" b="1" dirty="0">
-                <a:solidFill>
-                  <a:srgbClr val="1D3557"/>
-                </a:solidFill>
-                <a:latin typeface="Trebuchet MS" pitchFamily="34" charset="0"/>
-                <a:ea typeface="Trebuchet MS" pitchFamily="34" charset="-122"/>
-                <a:cs typeface="Trebuchet MS" pitchFamily="34" charset="-120"/>
-              </a:rPr>
-              <a:t>Load Test Ergebnisse</a:t>
-            </a:r>
-            <a:endParaRPr lang="en-US" sz="3000" dirty="0"/>
-          </a:p>
-        </p:txBody>
-      </p:sp>
-      <p:sp>
-        <p:nvSpPr>
-          <p:cNvPr id="3" name="Shape 1"/>
-          <p:cNvSpPr/>
-          <p:nvPr/>
-        </p:nvSpPr>
-        <p:spPr>
-          <a:xfrm>
-            <a:off x="457200" y="822960"/>
-            <a:ext cx="1097280" cy="45720"/>
+          <p:cNvPr id="2" name="Shape 0"/>
+          <p:cNvSpPr/>
+          <p:nvPr/>
+        </p:nvSpPr>
+        <p:spPr>
+          <a:xfrm>
+            <a:off x="0" y="0"/>
+            <a:ext cx="137160" cy="5143500"/>
           </a:xfrm>
           <a:prstGeom prst="rect">
             <a:avLst/>
@@ -9808,34 +8625,66 @@
       </p:sp>
       <p:sp>
         <p:nvSpPr>
+          <p:cNvPr id="3" name="Text 1"/>
+          <p:cNvSpPr/>
+          <p:nvPr/>
+        </p:nvSpPr>
+        <p:spPr>
+          <a:xfrm>
+            <a:off x="457200" y="365760"/>
+            <a:ext cx="8229600" cy="548640"/>
+          </a:xfrm>
+          <a:prstGeom prst="rect">
+            <a:avLst/>
+          </a:prstGeom>
+          <a:noFill/>
+          <a:ln/>
+        </p:spPr>
+        <p:txBody>
+          <a:bodyPr wrap="square" lIns="0" tIns="0" rIns="0" bIns="0" rtlCol="0" anchor="ctr"/>
+          <a:lstStyle/>
+          <a:p>
+            <a:pPr marL="0" indent="0">
+              <a:buNone/>
+            </a:pPr>
+            <a:r>
+              <a:rPr lang="en-US" sz="3200" b="1" dirty="0">
+                <a:solidFill>
+                  <a:srgbClr val="FFFFFF"/>
+                </a:solidFill>
+                <a:latin typeface="Trebuchet MS" pitchFamily="34" charset="0"/>
+                <a:ea typeface="Trebuchet MS" pitchFamily="34" charset="-122"/>
+                <a:cs typeface="Trebuchet MS" pitchFamily="34" charset="-120"/>
+              </a:rPr>
+              <a:t>Zusammenfassung</a:t>
+            </a:r>
+            <a:endParaRPr lang="en-US" sz="3200" dirty="0"/>
+          </a:p>
+        </p:txBody>
+      </p:sp>
+      <p:sp>
+        <p:nvSpPr>
           <p:cNvPr id="4" name="Shape 2"/>
           <p:cNvSpPr/>
           <p:nvPr/>
         </p:nvSpPr>
         <p:spPr>
           <a:xfrm>
-            <a:off x="365760" y="1005840"/>
-            <a:ext cx="4114800" cy="1920240"/>
+            <a:off x="457200" y="1097280"/>
+            <a:ext cx="411480" cy="475488"/>
           </a:xfrm>
           <a:prstGeom prst="rect">
             <a:avLst/>
           </a:prstGeom>
           <a:solidFill>
-            <a:srgbClr val="FFFFFF"/>
+            <a:srgbClr val="E63946"/>
           </a:solidFill>
-          <a:ln w="6350">
+          <a:ln w="12700">
             <a:solidFill>
-              <a:srgbClr val="E2EAF4"/>
+              <a:srgbClr val="E63946"/>
             </a:solidFill>
             <a:prstDash val="solid"/>
           </a:ln>
-          <a:effectLst>
-            <a:outerShdw blurRad="101600" dist="38100" dir="8100000" algn="bl" rotWithShape="0">
-              <a:srgbClr val="000000">
-                <a:alpha val="12000"/>
-              </a:srgbClr>
-            </a:outerShdw>
-          </a:effectLst>
         </p:spPr>
         <p:txBody>
           <a:bodyPr/>
@@ -9847,24 +8696,102 @@
       </p:sp>
       <p:sp>
         <p:nvSpPr>
-          <p:cNvPr id="5" name="Shape 3"/>
-          <p:cNvSpPr/>
-          <p:nvPr/>
-        </p:nvSpPr>
-        <p:spPr>
-          <a:xfrm>
-            <a:off x="365760" y="1005840"/>
-            <a:ext cx="4114800" cy="457200"/>
+          <p:cNvPr id="5" name="Text 3"/>
+          <p:cNvSpPr/>
+          <p:nvPr/>
+        </p:nvSpPr>
+        <p:spPr>
+          <a:xfrm>
+            <a:off x="457200" y="1097280"/>
+            <a:ext cx="411480" cy="475488"/>
+          </a:xfrm>
+          <a:prstGeom prst="rect">
+            <a:avLst/>
+          </a:prstGeom>
+          <a:noFill/>
+          <a:ln/>
+        </p:spPr>
+        <p:txBody>
+          <a:bodyPr wrap="square" lIns="0" tIns="0" rIns="0" bIns="0" rtlCol="0" anchor="ctr"/>
+          <a:lstStyle/>
+          <a:p>
+            <a:pPr marL="0" indent="0" algn="ctr">
+              <a:buNone/>
+            </a:pPr>
+            <a:r>
+              <a:rPr lang="en-US" sz="1800" b="1" dirty="0">
+                <a:solidFill>
+                  <a:srgbClr val="FFFFFF"/>
+                </a:solidFill>
+                <a:latin typeface="Calibri" pitchFamily="34" charset="0"/>
+                <a:ea typeface="Calibri" pitchFamily="34" charset="-122"/>
+                <a:cs typeface="Calibri" pitchFamily="34" charset="-120"/>
+              </a:rPr>
+              <a:t>✓</a:t>
+            </a:r>
+            <a:endParaRPr lang="en-US" sz="1800" dirty="0"/>
+          </a:p>
+        </p:txBody>
+      </p:sp>
+      <p:sp>
+        <p:nvSpPr>
+          <p:cNvPr id="6" name="Text 4"/>
+          <p:cNvSpPr/>
+          <p:nvPr/>
+        </p:nvSpPr>
+        <p:spPr>
+          <a:xfrm>
+            <a:off x="960120" y="1115568"/>
+            <a:ext cx="7315200" cy="438912"/>
+          </a:xfrm>
+          <a:prstGeom prst="rect">
+            <a:avLst/>
+          </a:prstGeom>
+          <a:noFill/>
+          <a:ln/>
+        </p:spPr>
+        <p:txBody>
+          <a:bodyPr wrap="square" lIns="0" tIns="0" rIns="0" bIns="0" rtlCol="0" anchor="ctr"/>
+          <a:lstStyle/>
+          <a:p>
+            <a:pPr marL="0" indent="0">
+              <a:buNone/>
+            </a:pPr>
+            <a:r>
+              <a:rPr lang="en-US" sz="1400" dirty="0">
+                <a:solidFill>
+                  <a:srgbClr val="C5D8EE"/>
+                </a:solidFill>
+                <a:latin typeface="Calibri" pitchFamily="34" charset="0"/>
+                <a:ea typeface="Calibri" pitchFamily="34" charset="-122"/>
+                <a:cs typeface="Calibri" pitchFamily="34" charset="-120"/>
+              </a:rPr>
+              <a:t>52 Tests implementiert — 40 Unit, 6 Integration, 4 E2E, 2 Load</a:t>
+            </a:r>
+            <a:endParaRPr lang="en-US" sz="1400" dirty="0"/>
+          </a:p>
+        </p:txBody>
+      </p:sp>
+      <p:sp>
+        <p:nvSpPr>
+          <p:cNvPr id="7" name="Shape 5"/>
+          <p:cNvSpPr/>
+          <p:nvPr/>
+        </p:nvSpPr>
+        <p:spPr>
+          <a:xfrm>
+            <a:off x="457200" y="1755648"/>
+            <a:ext cx="411480" cy="475488"/>
           </a:xfrm>
           <a:prstGeom prst="rect">
             <a:avLst/>
           </a:prstGeom>
           <a:solidFill>
-            <a:srgbClr val="1A7D4A"/>
+            <a:srgbClr val="E63946"/>
           </a:solidFill>
           <a:ln w="12700">
             <a:solidFill>
-              <a:srgbClr val="1A7D4A"/>
+              <a:srgbClr val="E63946"/>
             </a:solidFill>
             <a:prstDash val="solid"/>
           </a:ln>
@@ -9879,14 +8806,53 @@
       </p:sp>
       <p:sp>
         <p:nvSpPr>
-          <p:cNvPr id="6" name="Text 4"/>
-          <p:cNvSpPr/>
-          <p:nvPr/>
-        </p:nvSpPr>
-        <p:spPr>
-          <a:xfrm>
-            <a:off x="457200" y="1005840"/>
-            <a:ext cx="3931920" cy="457200"/>
+          <p:cNvPr id="8" name="Text 6"/>
+          <p:cNvSpPr/>
+          <p:nvPr/>
+        </p:nvSpPr>
+        <p:spPr>
+          <a:xfrm>
+            <a:off x="457200" y="1755648"/>
+            <a:ext cx="411480" cy="475488"/>
+          </a:xfrm>
+          <a:prstGeom prst="rect">
+            <a:avLst/>
+          </a:prstGeom>
+          <a:noFill/>
+          <a:ln/>
+        </p:spPr>
+        <p:txBody>
+          <a:bodyPr wrap="square" lIns="0" tIns="0" rIns="0" bIns="0" rtlCol="0" anchor="ctr"/>
+          <a:lstStyle/>
+          <a:p>
+            <a:pPr marL="0" indent="0" algn="ctr">
+              <a:buNone/>
+            </a:pPr>
+            <a:r>
+              <a:rPr lang="en-US" sz="1800" b="1" dirty="0">
+                <a:solidFill>
+                  <a:srgbClr val="FFFFFF"/>
+                </a:solidFill>
+                <a:latin typeface="Calibri" pitchFamily="34" charset="0"/>
+                <a:ea typeface="Calibri" pitchFamily="34" charset="-122"/>
+                <a:cs typeface="Calibri" pitchFamily="34" charset="-120"/>
+              </a:rPr>
+              <a:t>✓</a:t>
+            </a:r>
+            <a:endParaRPr lang="en-US" sz="1800" dirty="0"/>
+          </a:p>
+        </p:txBody>
+      </p:sp>
+      <p:sp>
+        <p:nvSpPr>
+          <p:cNvPr id="9" name="Text 7"/>
+          <p:cNvSpPr/>
+          <p:nvPr/>
+        </p:nvSpPr>
+        <p:spPr>
+          <a:xfrm>
+            <a:off x="960120" y="1773936"/>
+            <a:ext cx="7315200" cy="438912"/>
           </a:xfrm>
           <a:prstGeom prst="rect">
             <a:avLst/>
@@ -9902,7 +8868,78 @@
               <a:buNone/>
             </a:pPr>
             <a:r>
-              <a:rPr lang="en-US" sz="1300" b="1" dirty="0">
+              <a:rPr lang="en-US" sz="1400" dirty="0">
+                <a:solidFill>
+                  <a:srgbClr val="C5D8EE"/>
+                </a:solidFill>
+                <a:latin typeface="Calibri" pitchFamily="34" charset="0"/>
+                <a:ea typeface="Calibri" pitchFamily="34" charset="-122"/>
+                <a:cs typeface="Calibri" pitchFamily="34" charset="-120"/>
+              </a:rPr>
+              <a:t>Playwright deckt alle funktionalen Test-Ebenen ab (TypeScript)</a:t>
+            </a:r>
+            <a:endParaRPr lang="en-US" sz="1400" dirty="0"/>
+          </a:p>
+        </p:txBody>
+      </p:sp>
+      <p:sp>
+        <p:nvSpPr>
+          <p:cNvPr id="10" name="Shape 8"/>
+          <p:cNvSpPr/>
+          <p:nvPr/>
+        </p:nvSpPr>
+        <p:spPr>
+          <a:xfrm>
+            <a:off x="457200" y="2414016"/>
+            <a:ext cx="411480" cy="475488"/>
+          </a:xfrm>
+          <a:prstGeom prst="rect">
+            <a:avLst/>
+          </a:prstGeom>
+          <a:solidFill>
+            <a:srgbClr val="E63946"/>
+          </a:solidFill>
+          <a:ln w="12700">
+            <a:solidFill>
+              <a:srgbClr val="E63946"/>
+            </a:solidFill>
+            <a:prstDash val="solid"/>
+          </a:ln>
+        </p:spPr>
+        <p:txBody>
+          <a:bodyPr/>
+          <a:lstStyle/>
+          <a:p>
+            <a:endParaRPr lang="de-AT"/>
+          </a:p>
+        </p:txBody>
+      </p:sp>
+      <p:sp>
+        <p:nvSpPr>
+          <p:cNvPr id="11" name="Text 9"/>
+          <p:cNvSpPr/>
+          <p:nvPr/>
+        </p:nvSpPr>
+        <p:spPr>
+          <a:xfrm>
+            <a:off x="457200" y="2414016"/>
+            <a:ext cx="411480" cy="475488"/>
+          </a:xfrm>
+          <a:prstGeom prst="rect">
+            <a:avLst/>
+          </a:prstGeom>
+          <a:noFill/>
+          <a:ln/>
+        </p:spPr>
+        <p:txBody>
+          <a:bodyPr wrap="square" lIns="0" tIns="0" rIns="0" bIns="0" rtlCol="0" anchor="ctr"/>
+          <a:lstStyle/>
+          <a:p>
+            <a:pPr marL="0" indent="0" algn="ctr">
+              <a:buNone/>
+            </a:pPr>
+            <a:r>
+              <a:rPr lang="en-US" sz="1800" b="1" dirty="0">
                 <a:solidFill>
                   <a:srgbClr val="FFFFFF"/>
                 </a:solidFill>
@@ -9910,22 +8947,93 @@
                 <a:ea typeface="Calibri" pitchFamily="34" charset="-122"/>
                 <a:cs typeface="Calibri" pitchFamily="34" charset="-120"/>
               </a:rPr>
-              <a:t>✓  Response Time p(95)</a:t>
-            </a:r>
-            <a:endParaRPr lang="en-US" sz="1300" dirty="0"/>
-          </a:p>
-        </p:txBody>
-      </p:sp>
-      <p:sp>
-        <p:nvSpPr>
-          <p:cNvPr id="7" name="Text 5"/>
-          <p:cNvSpPr/>
-          <p:nvPr/>
-        </p:nvSpPr>
-        <p:spPr>
-          <a:xfrm>
-            <a:off x="457200" y="1508760"/>
-            <a:ext cx="3931920" cy="777240"/>
+              <a:t>✓</a:t>
+            </a:r>
+            <a:endParaRPr lang="en-US" sz="1800" dirty="0"/>
+          </a:p>
+        </p:txBody>
+      </p:sp>
+      <p:sp>
+        <p:nvSpPr>
+          <p:cNvPr id="12" name="Text 10"/>
+          <p:cNvSpPr/>
+          <p:nvPr/>
+        </p:nvSpPr>
+        <p:spPr>
+          <a:xfrm>
+            <a:off x="960120" y="2432304"/>
+            <a:ext cx="7315200" cy="438912"/>
+          </a:xfrm>
+          <a:prstGeom prst="rect">
+            <a:avLst/>
+          </a:prstGeom>
+          <a:noFill/>
+          <a:ln/>
+        </p:spPr>
+        <p:txBody>
+          <a:bodyPr wrap="square" lIns="0" tIns="0" rIns="0" bIns="0" rtlCol="0" anchor="ctr"/>
+          <a:lstStyle/>
+          <a:p>
+            <a:pPr marL="0" indent="0">
+              <a:buNone/>
+            </a:pPr>
+            <a:r>
+              <a:rPr lang="en-US" sz="1400" dirty="0">
+                <a:solidFill>
+                  <a:srgbClr val="C5D8EE"/>
+                </a:solidFill>
+                <a:latin typeface="Calibri" pitchFamily="34" charset="0"/>
+                <a:ea typeface="Calibri" pitchFamily="34" charset="-122"/>
+                <a:cs typeface="Calibri" pitchFamily="34" charset="-120"/>
+              </a:rPr>
+              <a:t>k6: Product Search p95=352ms (0% Fehler) · Checkout-Flow p95&lt;2.000ms</a:t>
+            </a:r>
+            <a:endParaRPr lang="en-US" sz="1400" dirty="0"/>
+          </a:p>
+        </p:txBody>
+      </p:sp>
+      <p:sp>
+        <p:nvSpPr>
+          <p:cNvPr id="13" name="Shape 11"/>
+          <p:cNvSpPr/>
+          <p:nvPr/>
+        </p:nvSpPr>
+        <p:spPr>
+          <a:xfrm>
+            <a:off x="457200" y="3072384"/>
+            <a:ext cx="411480" cy="475488"/>
+          </a:xfrm>
+          <a:prstGeom prst="rect">
+            <a:avLst/>
+          </a:prstGeom>
+          <a:solidFill>
+            <a:srgbClr val="E63946"/>
+          </a:solidFill>
+          <a:ln w="12700">
+            <a:solidFill>
+              <a:srgbClr val="E63946"/>
+            </a:solidFill>
+            <a:prstDash val="solid"/>
+          </a:ln>
+        </p:spPr>
+        <p:txBody>
+          <a:bodyPr/>
+          <a:lstStyle/>
+          <a:p>
+            <a:endParaRPr lang="de-AT"/>
+          </a:p>
+        </p:txBody>
+      </p:sp>
+      <p:sp>
+        <p:nvSpPr>
+          <p:cNvPr id="14" name="Text 12"/>
+          <p:cNvSpPr/>
+          <p:nvPr/>
+        </p:nvSpPr>
+        <p:spPr>
+          <a:xfrm>
+            <a:off x="457200" y="3072384"/>
+            <a:ext cx="411480" cy="475488"/>
           </a:xfrm>
           <a:prstGeom prst="rect">
             <a:avLst/>
@@ -9941,341 +9049,208 @@
               <a:buNone/>
             </a:pPr>
             <a:r>
-              <a:rPr lang="en-US" sz="4400" b="1" dirty="0">
-                <a:solidFill>
-                  <a:srgbClr val="1A7D4A"/>
+              <a:rPr lang="en-US" sz="1800" b="1" dirty="0">
+                <a:solidFill>
+                  <a:srgbClr val="FFFFFF"/>
+                </a:solidFill>
+                <a:latin typeface="Calibri" pitchFamily="34" charset="0"/>
+                <a:ea typeface="Calibri" pitchFamily="34" charset="-122"/>
+                <a:cs typeface="Calibri" pitchFamily="34" charset="-120"/>
+              </a:rPr>
+              <a:t>✓</a:t>
+            </a:r>
+            <a:endParaRPr lang="en-US" sz="1800" dirty="0"/>
+          </a:p>
+        </p:txBody>
+      </p:sp>
+      <p:sp>
+        <p:nvSpPr>
+          <p:cNvPr id="15" name="Text 13"/>
+          <p:cNvSpPr/>
+          <p:nvPr/>
+        </p:nvSpPr>
+        <p:spPr>
+          <a:xfrm>
+            <a:off x="960120" y="3090672"/>
+            <a:ext cx="7315200" cy="438912"/>
+          </a:xfrm>
+          <a:prstGeom prst="rect">
+            <a:avLst/>
+          </a:prstGeom>
+          <a:noFill/>
+          <a:ln/>
+        </p:spPr>
+        <p:txBody>
+          <a:bodyPr wrap="square" lIns="0" tIns="0" rIns="0" bIns="0" rtlCol="0" anchor="ctr"/>
+          <a:lstStyle/>
+          <a:p>
+            <a:pPr marL="0" indent="0">
+              <a:buNone/>
+            </a:pPr>
+            <a:r>
+              <a:rPr lang="en-US" sz="1400" dirty="0">
+                <a:solidFill>
+                  <a:srgbClr val="C5D8EE"/>
+                </a:solidFill>
+                <a:latin typeface="Calibri" pitchFamily="34" charset="0"/>
+                <a:ea typeface="Calibri" pitchFamily="34" charset="-122"/>
+                <a:cs typeface="Calibri" pitchFamily="34" charset="-120"/>
+              </a:rPr>
+              <a:t>GitHub Actions CI/CD Pipeline automatisiert Test-Ausführung auf Push/PR</a:t>
+            </a:r>
+            <a:endParaRPr lang="en-US" sz="1400" dirty="0"/>
+          </a:p>
+        </p:txBody>
+      </p:sp>
+      <p:sp>
+        <p:nvSpPr>
+          <p:cNvPr id="16" name="Shape 14"/>
+          <p:cNvSpPr/>
+          <p:nvPr/>
+        </p:nvSpPr>
+        <p:spPr>
+          <a:xfrm>
+            <a:off x="457200" y="3730752"/>
+            <a:ext cx="411480" cy="475488"/>
+          </a:xfrm>
+          <a:prstGeom prst="rect">
+            <a:avLst/>
+          </a:prstGeom>
+          <a:solidFill>
+            <a:srgbClr val="E63946"/>
+          </a:solidFill>
+          <a:ln w="12700">
+            <a:solidFill>
+              <a:srgbClr val="E63946"/>
+            </a:solidFill>
+            <a:prstDash val="solid"/>
+          </a:ln>
+        </p:spPr>
+        <p:txBody>
+          <a:bodyPr/>
+          <a:lstStyle/>
+          <a:p>
+            <a:endParaRPr lang="de-AT"/>
+          </a:p>
+        </p:txBody>
+      </p:sp>
+      <p:sp>
+        <p:nvSpPr>
+          <p:cNvPr id="17" name="Text 15"/>
+          <p:cNvSpPr/>
+          <p:nvPr/>
+        </p:nvSpPr>
+        <p:spPr>
+          <a:xfrm>
+            <a:off x="457200" y="3730752"/>
+            <a:ext cx="411480" cy="475488"/>
+          </a:xfrm>
+          <a:prstGeom prst="rect">
+            <a:avLst/>
+          </a:prstGeom>
+          <a:noFill/>
+          <a:ln/>
+        </p:spPr>
+        <p:txBody>
+          <a:bodyPr wrap="square" lIns="0" tIns="0" rIns="0" bIns="0" rtlCol="0" anchor="ctr"/>
+          <a:lstStyle/>
+          <a:p>
+            <a:pPr marL="0" indent="0" algn="ctr">
+              <a:buNone/>
+            </a:pPr>
+            <a:r>
+              <a:rPr lang="en-US" sz="1800" b="1" dirty="0">
+                <a:solidFill>
+                  <a:srgbClr val="FFFFFF"/>
+                </a:solidFill>
+                <a:latin typeface="Calibri" pitchFamily="34" charset="0"/>
+                <a:ea typeface="Calibri" pitchFamily="34" charset="-122"/>
+                <a:cs typeface="Calibri" pitchFamily="34" charset="-120"/>
+              </a:rPr>
+              <a:t>✓</a:t>
+            </a:r>
+            <a:endParaRPr lang="en-US" sz="1800" dirty="0"/>
+          </a:p>
+        </p:txBody>
+      </p:sp>
+      <p:sp>
+        <p:nvSpPr>
+          <p:cNvPr id="18" name="Text 16"/>
+          <p:cNvSpPr/>
+          <p:nvPr/>
+        </p:nvSpPr>
+        <p:spPr>
+          <a:xfrm>
+            <a:off x="960120" y="3749040"/>
+            <a:ext cx="7315200" cy="438912"/>
+          </a:xfrm>
+          <a:prstGeom prst="rect">
+            <a:avLst/>
+          </a:prstGeom>
+          <a:noFill/>
+          <a:ln/>
+        </p:spPr>
+        <p:txBody>
+          <a:bodyPr wrap="square" lIns="0" tIns="0" rIns="0" bIns="0" rtlCol="0" anchor="ctr"/>
+          <a:lstStyle/>
+          <a:p>
+            <a:pPr marL="0" indent="0">
+              <a:buNone/>
+            </a:pPr>
+            <a:r>
+              <a:rPr lang="en-US" sz="1400" dirty="0">
+                <a:solidFill>
+                  <a:srgbClr val="C5D8EE"/>
+                </a:solidFill>
+                <a:latin typeface="Calibri" pitchFamily="34" charset="0"/>
+                <a:ea typeface="Calibri" pitchFamily="34" charset="-122"/>
+                <a:cs typeface="Calibri" pitchFamily="34" charset="-120"/>
+              </a:rPr>
+              <a:t>Test-Isolation durch Serial-Execution und Cookie-Seeding sichergestellt</a:t>
+            </a:r>
+            <a:endParaRPr lang="en-US" sz="1400" dirty="0"/>
+          </a:p>
+        </p:txBody>
+      </p:sp>
+      <p:sp>
+        <p:nvSpPr>
+          <p:cNvPr id="21" name="Text 19"/>
+          <p:cNvSpPr/>
+          <p:nvPr/>
+        </p:nvSpPr>
+        <p:spPr>
+          <a:xfrm>
+            <a:off x="6217920" y="1371600"/>
+            <a:ext cx="2651760" cy="2560320"/>
+          </a:xfrm>
+          <a:prstGeom prst="rect">
+            <a:avLst/>
+          </a:prstGeom>
+          <a:noFill/>
+          <a:ln/>
+        </p:spPr>
+        <p:txBody>
+          <a:bodyPr wrap="square" lIns="0" tIns="0" rIns="0" bIns="0" rtlCol="0" anchor="ctr"/>
+          <a:lstStyle/>
+          <a:p>
+            <a:pPr marL="0" indent="0" algn="ctr">
+              <a:buNone/>
+            </a:pPr>
+            <a:r>
+              <a:rPr lang="en-US" sz="3600" b="1" dirty="0">
+                <a:solidFill>
+                  <a:srgbClr val="E63946"/>
                 </a:solidFill>
                 <a:latin typeface="Trebuchet MS" pitchFamily="34" charset="0"/>
                 <a:ea typeface="Trebuchet MS" pitchFamily="34" charset="-122"/>
                 <a:cs typeface="Trebuchet MS" pitchFamily="34" charset="-120"/>
               </a:rPr>
-              <a:t>352ms</a:t>
-            </a:r>
-            <a:endParaRPr lang="en-US" sz="4400" dirty="0"/>
-          </a:p>
-        </p:txBody>
-      </p:sp>
-      <p:sp>
-        <p:nvSpPr>
-          <p:cNvPr id="8" name="Text 6"/>
-          <p:cNvSpPr/>
-          <p:nvPr/>
-        </p:nvSpPr>
-        <p:spPr>
-          <a:xfrm>
-            <a:off x="457200" y="2350008"/>
-            <a:ext cx="3931920" cy="320040"/>
-          </a:xfrm>
-          <a:prstGeom prst="rect">
-            <a:avLst/>
-          </a:prstGeom>
-          <a:noFill/>
-          <a:ln/>
-        </p:spPr>
-        <p:txBody>
-          <a:bodyPr wrap="square" lIns="0" tIns="0" rIns="0" bIns="0" rtlCol="0" anchor="ctr"/>
-          <a:lstStyle/>
-          <a:p>
-            <a:pPr marL="0" indent="0" algn="ctr">
-              <a:buNone/>
-            </a:pPr>
-            <a:r>
-              <a:rPr lang="en-US" sz="1100" dirty="0">
-                <a:solidFill>
-                  <a:srgbClr val="5C7A9B"/>
-                </a:solidFill>
-                <a:latin typeface="Calibri" pitchFamily="34" charset="0"/>
-                <a:ea typeface="Calibri" pitchFamily="34" charset="-122"/>
-                <a:cs typeface="Calibri" pitchFamily="34" charset="-120"/>
-              </a:rPr>
-              <a:t>Threshold: &lt; 1.200ms</a:t>
-            </a:r>
-            <a:endParaRPr lang="en-US" sz="1100" dirty="0"/>
-          </a:p>
-        </p:txBody>
-      </p:sp>
-      <p:sp>
-        <p:nvSpPr>
-          <p:cNvPr id="9" name="Text 7"/>
-          <p:cNvSpPr/>
-          <p:nvPr/>
-        </p:nvSpPr>
-        <p:spPr>
-          <a:xfrm>
-            <a:off x="457200" y="2670048"/>
-            <a:ext cx="3931920" cy="228600"/>
-          </a:xfrm>
-          <a:prstGeom prst="rect">
-            <a:avLst/>
-          </a:prstGeom>
-          <a:noFill/>
-          <a:ln/>
-        </p:spPr>
-        <p:txBody>
-          <a:bodyPr wrap="square" lIns="0" tIns="0" rIns="0" bIns="0" rtlCol="0" anchor="ctr"/>
-          <a:lstStyle/>
-          <a:p>
-            <a:pPr marL="0" indent="0" algn="ctr">
-              <a:buNone/>
-            </a:pPr>
-            <a:r>
-              <a:rPr lang="en-US" sz="1100" b="1" i="1" dirty="0">
-                <a:solidFill>
-                  <a:srgbClr val="1A7D4A"/>
-                </a:solidFill>
-                <a:latin typeface="Calibri" pitchFamily="34" charset="0"/>
-                <a:ea typeface="Calibri" pitchFamily="34" charset="-122"/>
-                <a:cs typeface="Calibri" pitchFamily="34" charset="-120"/>
-              </a:rPr>
-              <a:t>71% unter Limit</a:t>
-            </a:r>
-            <a:endParaRPr lang="en-US" sz="1100" dirty="0"/>
-          </a:p>
-        </p:txBody>
-      </p:sp>
-      <p:sp>
-        <p:nvSpPr>
-          <p:cNvPr id="10" name="Shape 8"/>
-          <p:cNvSpPr/>
-          <p:nvPr/>
-        </p:nvSpPr>
-        <p:spPr>
-          <a:xfrm>
-            <a:off x="4663440" y="1005840"/>
-            <a:ext cx="4114800" cy="1920240"/>
-          </a:xfrm>
-          <a:prstGeom prst="rect">
-            <a:avLst/>
-          </a:prstGeom>
-          <a:solidFill>
-            <a:srgbClr val="FFFFFF"/>
-          </a:solidFill>
-          <a:ln w="6350">
-            <a:solidFill>
-              <a:srgbClr val="E2EAF4"/>
-            </a:solidFill>
-            <a:prstDash val="solid"/>
-          </a:ln>
-          <a:effectLst>
-            <a:outerShdw blurRad="101600" dist="38100" dir="8100000" algn="bl" rotWithShape="0">
-              <a:srgbClr val="000000">
-                <a:alpha val="12000"/>
-              </a:srgbClr>
-            </a:outerShdw>
-          </a:effectLst>
-        </p:spPr>
-        <p:txBody>
-          <a:bodyPr/>
-          <a:lstStyle/>
-          <a:p>
-            <a:endParaRPr lang="de-AT"/>
-          </a:p>
-        </p:txBody>
-      </p:sp>
-      <p:sp>
-        <p:nvSpPr>
-          <p:cNvPr id="11" name="Shape 9"/>
-          <p:cNvSpPr/>
-          <p:nvPr/>
-        </p:nvSpPr>
-        <p:spPr>
-          <a:xfrm>
-            <a:off x="4663440" y="1005840"/>
-            <a:ext cx="4114800" cy="457200"/>
-          </a:xfrm>
-          <a:prstGeom prst="rect">
-            <a:avLst/>
-          </a:prstGeom>
-          <a:solidFill>
-            <a:srgbClr val="1A7D4A"/>
-          </a:solidFill>
-          <a:ln w="12700">
-            <a:solidFill>
-              <a:srgbClr val="1A7D4A"/>
-            </a:solidFill>
-            <a:prstDash val="solid"/>
-          </a:ln>
-        </p:spPr>
-        <p:txBody>
-          <a:bodyPr/>
-          <a:lstStyle/>
-          <a:p>
-            <a:endParaRPr lang="de-AT"/>
-          </a:p>
-        </p:txBody>
-      </p:sp>
-      <p:sp>
-        <p:nvSpPr>
-          <p:cNvPr id="12" name="Text 10"/>
-          <p:cNvSpPr/>
-          <p:nvPr/>
-        </p:nvSpPr>
-        <p:spPr>
-          <a:xfrm>
-            <a:off x="4754880" y="1005840"/>
-            <a:ext cx="3931920" cy="457200"/>
-          </a:xfrm>
-          <a:prstGeom prst="rect">
-            <a:avLst/>
-          </a:prstGeom>
-          <a:noFill/>
-          <a:ln/>
-        </p:spPr>
-        <p:txBody>
-          <a:bodyPr wrap="square" lIns="0" tIns="0" rIns="0" bIns="0" rtlCol="0" anchor="ctr"/>
-          <a:lstStyle/>
-          <a:p>
-            <a:pPr marL="0" indent="0">
-              <a:buNone/>
-            </a:pPr>
-            <a:r>
-              <a:rPr lang="en-US" sz="1300" b="1" dirty="0">
-                <a:solidFill>
-                  <a:srgbClr val="FFFFFF"/>
-                </a:solidFill>
-                <a:latin typeface="Calibri" pitchFamily="34" charset="0"/>
-                <a:ea typeface="Calibri" pitchFamily="34" charset="-122"/>
-                <a:cs typeface="Calibri" pitchFamily="34" charset="-120"/>
-              </a:rPr>
-              <a:t>✓  Fehlerrate</a:t>
-            </a:r>
-            <a:endParaRPr lang="en-US" sz="1300" dirty="0"/>
-          </a:p>
-        </p:txBody>
-      </p:sp>
-      <p:sp>
-        <p:nvSpPr>
-          <p:cNvPr id="13" name="Text 11"/>
-          <p:cNvSpPr/>
-          <p:nvPr/>
-        </p:nvSpPr>
-        <p:spPr>
-          <a:xfrm>
-            <a:off x="4754880" y="1508760"/>
-            <a:ext cx="3931920" cy="777240"/>
-          </a:xfrm>
-          <a:prstGeom prst="rect">
-            <a:avLst/>
-          </a:prstGeom>
-          <a:noFill/>
-          <a:ln/>
-        </p:spPr>
-        <p:txBody>
-          <a:bodyPr wrap="square" lIns="0" tIns="0" rIns="0" bIns="0" rtlCol="0" anchor="ctr"/>
-          <a:lstStyle/>
-          <a:p>
-            <a:pPr marL="0" indent="0" algn="ctr">
-              <a:buNone/>
-            </a:pPr>
-            <a:r>
-              <a:rPr lang="en-US" sz="4400" b="1" dirty="0">
-                <a:solidFill>
-                  <a:srgbClr val="1A7D4A"/>
-                </a:solidFill>
-                <a:latin typeface="Trebuchet MS" pitchFamily="34" charset="0"/>
-                <a:ea typeface="Trebuchet MS" pitchFamily="34" charset="-122"/>
-                <a:cs typeface="Trebuchet MS" pitchFamily="34" charset="-120"/>
-              </a:rPr>
-              <a:t>0,00%</a:t>
-            </a:r>
-            <a:endParaRPr lang="en-US" sz="4400" dirty="0"/>
-          </a:p>
-        </p:txBody>
-      </p:sp>
-      <p:sp>
-        <p:nvSpPr>
-          <p:cNvPr id="14" name="Text 12"/>
-          <p:cNvSpPr/>
-          <p:nvPr/>
-        </p:nvSpPr>
-        <p:spPr>
-          <a:xfrm>
-            <a:off x="4754880" y="2350008"/>
-            <a:ext cx="3931920" cy="320040"/>
-          </a:xfrm>
-          <a:prstGeom prst="rect">
-            <a:avLst/>
-          </a:prstGeom>
-          <a:noFill/>
-          <a:ln/>
-        </p:spPr>
-        <p:txBody>
-          <a:bodyPr wrap="square" lIns="0" tIns="0" rIns="0" bIns="0" rtlCol="0" anchor="ctr"/>
-          <a:lstStyle/>
-          <a:p>
-            <a:pPr marL="0" indent="0" algn="ctr">
-              <a:buNone/>
-            </a:pPr>
-            <a:r>
-              <a:rPr lang="en-US" sz="1100" dirty="0">
-                <a:solidFill>
-                  <a:srgbClr val="5C7A9B"/>
-                </a:solidFill>
-                <a:latin typeface="Calibri" pitchFamily="34" charset="0"/>
-                <a:ea typeface="Calibri" pitchFamily="34" charset="-122"/>
-                <a:cs typeface="Calibri" pitchFamily="34" charset="-120"/>
-              </a:rPr>
-              <a:t>Threshold: &lt; 1%</a:t>
-            </a:r>
-            <a:endParaRPr lang="en-US" sz="1100" dirty="0"/>
-          </a:p>
-        </p:txBody>
-      </p:sp>
-      <p:sp>
-        <p:nvSpPr>
-          <p:cNvPr id="15" name="Text 13"/>
-          <p:cNvSpPr/>
-          <p:nvPr/>
-        </p:nvSpPr>
-        <p:spPr>
-          <a:xfrm>
-            <a:off x="4754880" y="2670048"/>
-            <a:ext cx="3931920" cy="228600"/>
-          </a:xfrm>
-          <a:prstGeom prst="rect">
-            <a:avLst/>
-          </a:prstGeom>
-          <a:noFill/>
-          <a:ln/>
-        </p:spPr>
-        <p:txBody>
-          <a:bodyPr wrap="square" lIns="0" tIns="0" rIns="0" bIns="0" rtlCol="0" anchor="ctr"/>
-          <a:lstStyle/>
-          <a:p>
-            <a:pPr marL="0" indent="0" algn="ctr">
-              <a:buNone/>
-            </a:pPr>
-            <a:r>
-              <a:rPr lang="en-US" sz="1100" b="1" i="1" dirty="0">
-                <a:solidFill>
-                  <a:srgbClr val="1A7D4A"/>
-                </a:solidFill>
-                <a:latin typeface="Calibri" pitchFamily="34" charset="0"/>
-                <a:ea typeface="Calibri" pitchFamily="34" charset="-122"/>
-                <a:cs typeface="Calibri" pitchFamily="34" charset="-120"/>
-              </a:rPr>
-              <a:t>Keine fehlgeschlagenen Requests</a:t>
-            </a:r>
-            <a:endParaRPr lang="en-US" sz="1100" dirty="0"/>
-          </a:p>
-        </p:txBody>
-      </p:sp>
-      <p:graphicFrame>
-        <p:nvGraphicFramePr>
-          <p:cNvPr id="16" name="Chart 0"/>
-          <p:cNvGraphicFramePr/>
-          <p:nvPr/>
-        </p:nvGraphicFramePr>
-        <p:xfrm>
-          <a:off x="365760" y="3063240"/>
-          <a:ext cx="8412480" cy="1920240"/>
-        </p:xfrm>
-        <a:graphic>
-          <a:graphicData uri="http://schemas.openxmlformats.org/drawingml/2006/chart">
-            <c:chart xmlns:c="http://schemas.openxmlformats.org/drawingml/2006/chart" xmlns:r="http://schemas.openxmlformats.org/officeDocument/2006/relationships" r:id="rId3"/>
-          </a:graphicData>
-        </a:graphic>
-      </p:graphicFrame>
+              <a:t>Fragen?</a:t>
+            </a:r>
+            <a:endParaRPr lang="en-US" sz="3600" dirty="0"/>
+          </a:p>
+        </p:txBody>
+      </p:sp>
     </p:spTree>
   </p:cSld>
   <p:clrMapOvr>

--- a/PRESENTATION.pptx
+++ b/PRESENTATION.pptx
@@ -9097,116 +9097,6 @@
                 <a:cs typeface="Calibri" pitchFamily="34" charset="-120"/>
               </a:rPr>
               <a:t>GitHub Actions CI/CD Pipeline automatisiert Test-Ausführung auf Push/PR</a:t>
-            </a:r>
-            <a:endParaRPr lang="en-US" sz="1400" dirty="0"/>
-          </a:p>
-        </p:txBody>
-      </p:sp>
-      <p:sp>
-        <p:nvSpPr>
-          <p:cNvPr id="16" name="Shape 14"/>
-          <p:cNvSpPr/>
-          <p:nvPr/>
-        </p:nvSpPr>
-        <p:spPr>
-          <a:xfrm>
-            <a:off x="457200" y="3730752"/>
-            <a:ext cx="411480" cy="475488"/>
-          </a:xfrm>
-          <a:prstGeom prst="rect">
-            <a:avLst/>
-          </a:prstGeom>
-          <a:solidFill>
-            <a:srgbClr val="E63946"/>
-          </a:solidFill>
-          <a:ln w="12700">
-            <a:solidFill>
-              <a:srgbClr val="E63946"/>
-            </a:solidFill>
-            <a:prstDash val="solid"/>
-          </a:ln>
-        </p:spPr>
-        <p:txBody>
-          <a:bodyPr/>
-          <a:lstStyle/>
-          <a:p>
-            <a:endParaRPr lang="de-AT"/>
-          </a:p>
-        </p:txBody>
-      </p:sp>
-      <p:sp>
-        <p:nvSpPr>
-          <p:cNvPr id="17" name="Text 15"/>
-          <p:cNvSpPr/>
-          <p:nvPr/>
-        </p:nvSpPr>
-        <p:spPr>
-          <a:xfrm>
-            <a:off x="457200" y="3730752"/>
-            <a:ext cx="411480" cy="475488"/>
-          </a:xfrm>
-          <a:prstGeom prst="rect">
-            <a:avLst/>
-          </a:prstGeom>
-          <a:noFill/>
-          <a:ln/>
-        </p:spPr>
-        <p:txBody>
-          <a:bodyPr wrap="square" lIns="0" tIns="0" rIns="0" bIns="0" rtlCol="0" anchor="ctr"/>
-          <a:lstStyle/>
-          <a:p>
-            <a:pPr marL="0" indent="0" algn="ctr">
-              <a:buNone/>
-            </a:pPr>
-            <a:r>
-              <a:rPr lang="en-US" sz="1800" b="1" dirty="0">
-                <a:solidFill>
-                  <a:srgbClr val="FFFFFF"/>
-                </a:solidFill>
-                <a:latin typeface="Calibri" pitchFamily="34" charset="0"/>
-                <a:ea typeface="Calibri" pitchFamily="34" charset="-122"/>
-                <a:cs typeface="Calibri" pitchFamily="34" charset="-120"/>
-              </a:rPr>
-              <a:t>✓</a:t>
-            </a:r>
-            <a:endParaRPr lang="en-US" sz="1800" dirty="0"/>
-          </a:p>
-        </p:txBody>
-      </p:sp>
-      <p:sp>
-        <p:nvSpPr>
-          <p:cNvPr id="18" name="Text 16"/>
-          <p:cNvSpPr/>
-          <p:nvPr/>
-        </p:nvSpPr>
-        <p:spPr>
-          <a:xfrm>
-            <a:off x="960120" y="3749040"/>
-            <a:ext cx="7315200" cy="438912"/>
-          </a:xfrm>
-          <a:prstGeom prst="rect">
-            <a:avLst/>
-          </a:prstGeom>
-          <a:noFill/>
-          <a:ln/>
-        </p:spPr>
-        <p:txBody>
-          <a:bodyPr wrap="square" lIns="0" tIns="0" rIns="0" bIns="0" rtlCol="0" anchor="ctr"/>
-          <a:lstStyle/>
-          <a:p>
-            <a:pPr marL="0" indent="0">
-              <a:buNone/>
-            </a:pPr>
-            <a:r>
-              <a:rPr lang="en-US" sz="1400" dirty="0">
-                <a:solidFill>
-                  <a:srgbClr val="C5D8EE"/>
-                </a:solidFill>
-                <a:latin typeface="Calibri" pitchFamily="34" charset="0"/>
-                <a:ea typeface="Calibri" pitchFamily="34" charset="-122"/>
-                <a:cs typeface="Calibri" pitchFamily="34" charset="-120"/>
-              </a:rPr>
-              <a:t>Test-Isolation durch Serial-Execution und Cookie-Seeding sichergestellt</a:t>
             </a:r>
             <a:endParaRPr lang="en-US" sz="1400" dirty="0"/>
           </a:p>
